--- a/麺スタグラム.pptx
+++ b/麺スタグラム.pptx
@@ -6,8 +6,10 @@
   </p:sldMasterIdLst>
   <p:sldIdLst>
     <p:sldId id="256" r:id="rId2"/>
-    <p:sldId id="258" r:id="rId3"/>
-    <p:sldId id="257" r:id="rId4"/>
+    <p:sldId id="260" r:id="rId3"/>
+    <p:sldId id="258" r:id="rId4"/>
+    <p:sldId id="259" r:id="rId5"/>
+    <p:sldId id="261" r:id="rId6"/>
   </p:sldIdLst>
   <p:sldSz cx="12192000" cy="6858000"/>
   <p:notesSz cx="6858000" cy="9144000"/>
@@ -106,15 +108,20 @@
       </a:defRPr>
     </a:lvl9pPr>
   </p:defaultTextStyle>
+  <p:extLst>
+    <p:ext uri="{EFAFB233-063F-42B5-8137-9DF3F51BA10A}">
+      <p15:sldGuideLst xmlns:p15="http://schemas.microsoft.com/office/powerpoint/2012/main"/>
+    </p:ext>
+  </p:extLst>
 </p:presentation>
 </file>
 
 <file path=ppt/diagrams/colors1.xml><?xml version="1.0" encoding="utf-8"?>
-<dgm:colorsDef xmlns:dgm="http://schemas.openxmlformats.org/drawingml/2006/diagram" xmlns:a="http://schemas.openxmlformats.org/drawingml/2006/main" uniqueId="urn:microsoft.com/office/officeart/2005/8/colors/colorful1">
+<dgm:colorsDef xmlns:dgm="http://schemas.openxmlformats.org/drawingml/2006/diagram" xmlns:a="http://schemas.openxmlformats.org/drawingml/2006/main" uniqueId="urn:microsoft.com/office/officeart/2005/8/colors/colorful2">
   <dgm:title val=""/>
   <dgm:desc val=""/>
   <dgm:catLst>
-    <dgm:cat type="colorful" pri="10100"/>
+    <dgm:cat type="colorful" pri="10200"/>
   </dgm:catLst>
   <dgm:styleLbl name="node0">
     <dgm:fillClrLst meth="repeat">
@@ -129,12 +136,9 @@
     <dgm:txEffectClrLst/>
   </dgm:styleLbl>
   <dgm:styleLbl name="node1">
-    <dgm:fillClrLst meth="repeat">
+    <dgm:fillClrLst>
       <a:schemeClr val="accent2"/>
       <a:schemeClr val="accent3"/>
-      <a:schemeClr val="accent4"/>
-      <a:schemeClr val="accent5"/>
-      <a:schemeClr val="accent6"/>
     </dgm:fillClrLst>
     <dgm:linClrLst meth="repeat">
       <a:schemeClr val="lt1"/>
@@ -145,19 +149,13 @@
     <dgm:txEffectClrLst/>
   </dgm:styleLbl>
   <dgm:styleLbl name="alignNode1">
-    <dgm:fillClrLst meth="repeat">
+    <dgm:fillClrLst>
       <a:schemeClr val="accent2"/>
       <a:schemeClr val="accent3"/>
-      <a:schemeClr val="accent4"/>
-      <a:schemeClr val="accent5"/>
-      <a:schemeClr val="accent6"/>
     </dgm:fillClrLst>
-    <dgm:linClrLst meth="repeat">
+    <dgm:linClrLst>
       <a:schemeClr val="accent2"/>
       <a:schemeClr val="accent3"/>
-      <a:schemeClr val="accent4"/>
-      <a:schemeClr val="accent5"/>
-      <a:schemeClr val="accent6"/>
     </dgm:linClrLst>
     <dgm:effectClrLst/>
     <dgm:txLinClrLst/>
@@ -165,12 +163,9 @@
     <dgm:txEffectClrLst/>
   </dgm:styleLbl>
   <dgm:styleLbl name="lnNode1">
-    <dgm:fillClrLst meth="repeat">
+    <dgm:fillClrLst>
       <a:schemeClr val="accent2"/>
       <a:schemeClr val="accent3"/>
-      <a:schemeClr val="accent4"/>
-      <a:schemeClr val="accent5"/>
-      <a:schemeClr val="accent6"/>
     </dgm:fillClrLst>
     <dgm:linClrLst meth="repeat">
       <a:schemeClr val="lt1"/>
@@ -181,20 +176,11 @@
     <dgm:txEffectClrLst/>
   </dgm:styleLbl>
   <dgm:styleLbl name="vennNode1">
-    <dgm:fillClrLst meth="repeat">
+    <dgm:fillClrLst>
       <a:schemeClr val="accent2">
         <a:alpha val="50000"/>
       </a:schemeClr>
       <a:schemeClr val="accent3">
-        <a:alpha val="50000"/>
-      </a:schemeClr>
-      <a:schemeClr val="accent4">
-        <a:alpha val="50000"/>
-      </a:schemeClr>
-      <a:schemeClr val="accent5">
-        <a:alpha val="50000"/>
-      </a:schemeClr>
-      <a:schemeClr val="accent6">
         <a:alpha val="50000"/>
       </a:schemeClr>
     </dgm:fillClrLst>
@@ -208,18 +194,6 @@
   </dgm:styleLbl>
   <dgm:styleLbl name="node2">
     <dgm:fillClrLst>
-      <a:schemeClr val="accent2"/>
-    </dgm:fillClrLst>
-    <dgm:linClrLst meth="repeat">
-      <a:schemeClr val="lt1"/>
-    </dgm:linClrLst>
-    <dgm:effectClrLst/>
-    <dgm:txLinClrLst/>
-    <dgm:txFillClrLst/>
-    <dgm:txEffectClrLst/>
-  </dgm:styleLbl>
-  <dgm:styleLbl name="node3">
-    <dgm:fillClrLst>
       <a:schemeClr val="accent3"/>
     </dgm:fillClrLst>
     <dgm:linClrLst meth="repeat">
@@ -230,7 +204,7 @@
     <dgm:txFillClrLst/>
     <dgm:txEffectClrLst/>
   </dgm:styleLbl>
-  <dgm:styleLbl name="node4">
+  <dgm:styleLbl name="node3">
     <dgm:fillClrLst>
       <a:schemeClr val="accent4"/>
     </dgm:fillClrLst>
@@ -242,21 +216,24 @@
     <dgm:txFillClrLst/>
     <dgm:txEffectClrLst/>
   </dgm:styleLbl>
+  <dgm:styleLbl name="node4">
+    <dgm:fillClrLst>
+      <a:schemeClr val="accent5"/>
+    </dgm:fillClrLst>
+    <dgm:linClrLst meth="repeat">
+      <a:schemeClr val="lt1"/>
+    </dgm:linClrLst>
+    <dgm:effectClrLst/>
+    <dgm:txLinClrLst/>
+    <dgm:txFillClrLst/>
+    <dgm:txEffectClrLst/>
+  </dgm:styleLbl>
   <dgm:styleLbl name="fgImgPlace1">
-    <dgm:fillClrLst meth="repeat">
+    <dgm:fillClrLst>
       <a:schemeClr val="accent2">
         <a:tint val="50000"/>
       </a:schemeClr>
       <a:schemeClr val="accent3">
-        <a:tint val="50000"/>
-      </a:schemeClr>
-      <a:schemeClr val="accent4">
-        <a:tint val="50000"/>
-      </a:schemeClr>
-      <a:schemeClr val="accent5">
-        <a:tint val="50000"/>
-      </a:schemeClr>
-      <a:schemeClr val="accent6">
         <a:tint val="50000"/>
       </a:schemeClr>
     </dgm:fillClrLst>
@@ -272,10 +249,10 @@
   </dgm:styleLbl>
   <dgm:styleLbl name="alignImgPlace1">
     <dgm:fillClrLst>
-      <a:schemeClr val="accent1">
+      <a:schemeClr val="accent2">
         <a:tint val="50000"/>
       </a:schemeClr>
-      <a:schemeClr val="accent2">
+      <a:schemeClr val="accent3">
         <a:tint val="20000"/>
       </a:schemeClr>
     </dgm:fillClrLst>
@@ -291,10 +268,10 @@
   </dgm:styleLbl>
   <dgm:styleLbl name="bgImgPlace1">
     <dgm:fillClrLst>
-      <a:schemeClr val="accent1">
+      <a:schemeClr val="accent2">
         <a:tint val="50000"/>
       </a:schemeClr>
-      <a:schemeClr val="accent2">
+      <a:schemeClr val="accent3">
         <a:tint val="20000"/>
       </a:schemeClr>
     </dgm:fillClrLst>
@@ -309,14 +286,11 @@
     <dgm:txEffectClrLst/>
   </dgm:styleLbl>
   <dgm:styleLbl name="sibTrans2D1">
-    <dgm:fillClrLst meth="repeat">
+    <dgm:fillClrLst>
       <a:schemeClr val="accent2"/>
       <a:schemeClr val="accent3"/>
-      <a:schemeClr val="accent4"/>
-      <a:schemeClr val="accent5"/>
-      <a:schemeClr val="accent6"/>
     </dgm:fillClrLst>
-    <dgm:linClrLst meth="cycle">
+    <dgm:linClrLst meth="repeat">
       <a:schemeClr val="lt1"/>
     </dgm:linClrLst>
     <dgm:effectClrLst/>
@@ -325,14 +299,11 @@
     <dgm:txEffectClrLst/>
   </dgm:styleLbl>
   <dgm:styleLbl name="fgSibTrans2D1">
-    <dgm:fillClrLst meth="repeat">
+    <dgm:fillClrLst>
       <a:schemeClr val="accent2"/>
       <a:schemeClr val="accent3"/>
-      <a:schemeClr val="accent4"/>
-      <a:schemeClr val="accent5"/>
-      <a:schemeClr val="accent6"/>
     </dgm:fillClrLst>
-    <dgm:linClrLst meth="cycle">
+    <dgm:linClrLst meth="repeat">
       <a:schemeClr val="lt1"/>
     </dgm:linClrLst>
     <dgm:effectClrLst/>
@@ -343,14 +314,11 @@
     <dgm:txEffectClrLst/>
   </dgm:styleLbl>
   <dgm:styleLbl name="bgSibTrans2D1">
-    <dgm:fillClrLst meth="repeat">
+    <dgm:fillClrLst>
       <a:schemeClr val="accent2"/>
       <a:schemeClr val="accent3"/>
-      <a:schemeClr val="accent4"/>
-      <a:schemeClr val="accent5"/>
-      <a:schemeClr val="accent6"/>
     </dgm:fillClrLst>
-    <dgm:linClrLst meth="cycle">
+    <dgm:linClrLst meth="repeat">
       <a:schemeClr val="lt1"/>
     </dgm:linClrLst>
     <dgm:effectClrLst/>
@@ -361,19 +329,10 @@
     <dgm:txEffectClrLst/>
   </dgm:styleLbl>
   <dgm:styleLbl name="sibTrans1D1">
-    <dgm:fillClrLst meth="repeat">
+    <dgm:fillClrLst/>
+    <dgm:linClrLst>
       <a:schemeClr val="accent2"/>
       <a:schemeClr val="accent3"/>
-      <a:schemeClr val="accent4"/>
-      <a:schemeClr val="accent5"/>
-      <a:schemeClr val="accent6"/>
-    </dgm:fillClrLst>
-    <dgm:linClrLst meth="repeat">
-      <a:schemeClr val="accent2"/>
-      <a:schemeClr val="accent3"/>
-      <a:schemeClr val="accent4"/>
-      <a:schemeClr val="accent5"/>
-      <a:schemeClr val="accent6"/>
     </dgm:linClrLst>
     <dgm:effectClrLst/>
     <dgm:txLinClrLst/>
@@ -400,10 +359,12 @@
   </dgm:styleLbl>
   <dgm:styleLbl name="asst0">
     <dgm:fillClrLst meth="repeat">
-      <a:schemeClr val="accent1"/>
+      <a:schemeClr val="accent2"/>
     </dgm:fillClrLst>
     <dgm:linClrLst meth="repeat">
-      <a:schemeClr val="lt1"/>
+      <a:schemeClr val="lt1">
+        <a:shade val="80000"/>
+      </a:schemeClr>
     </dgm:linClrLst>
     <dgm:effectClrLst/>
     <dgm:txLinClrLst/>
@@ -412,10 +373,12 @@
   </dgm:styleLbl>
   <dgm:styleLbl name="asst1">
     <dgm:fillClrLst meth="repeat">
-      <a:schemeClr val="accent2"/>
+      <a:schemeClr val="accent3"/>
     </dgm:fillClrLst>
     <dgm:linClrLst meth="repeat">
-      <a:schemeClr val="lt1"/>
+      <a:schemeClr val="lt1">
+        <a:shade val="80000"/>
+      </a:schemeClr>
     </dgm:linClrLst>
     <dgm:effectClrLst/>
     <dgm:txLinClrLst/>
@@ -423,18 +386,6 @@
     <dgm:txEffectClrLst/>
   </dgm:styleLbl>
   <dgm:styleLbl name="asst2">
-    <dgm:fillClrLst>
-      <a:schemeClr val="accent3"/>
-    </dgm:fillClrLst>
-    <dgm:linClrLst meth="repeat">
-      <a:schemeClr val="lt1"/>
-    </dgm:linClrLst>
-    <dgm:effectClrLst/>
-    <dgm:txLinClrLst/>
-    <dgm:txFillClrLst/>
-    <dgm:txEffectClrLst/>
-  </dgm:styleLbl>
-  <dgm:styleLbl name="asst3">
     <dgm:fillClrLst>
       <a:schemeClr val="accent4"/>
     </dgm:fillClrLst>
@@ -446,9 +397,21 @@
     <dgm:txFillClrLst/>
     <dgm:txEffectClrLst/>
   </dgm:styleLbl>
+  <dgm:styleLbl name="asst3">
+    <dgm:fillClrLst>
+      <a:schemeClr val="accent5"/>
+    </dgm:fillClrLst>
+    <dgm:linClrLst meth="repeat">
+      <a:schemeClr val="lt1"/>
+    </dgm:linClrLst>
+    <dgm:effectClrLst/>
+    <dgm:txLinClrLst/>
+    <dgm:txFillClrLst/>
+    <dgm:txEffectClrLst/>
+  </dgm:styleLbl>
   <dgm:styleLbl name="asst4">
     <dgm:fillClrLst>
-      <a:schemeClr val="accent5"/>
+      <a:schemeClr val="accent6"/>
     </dgm:fillClrLst>
     <dgm:linClrLst meth="repeat">
       <a:schemeClr val="lt1"/>
@@ -515,22 +478,6 @@
       <a:schemeClr val="accent2"/>
     </dgm:fillClrLst>
     <dgm:linClrLst meth="repeat">
-      <a:schemeClr val="accent1"/>
-    </dgm:linClrLst>
-    <dgm:effectClrLst/>
-    <dgm:txLinClrLst/>
-    <dgm:txFillClrLst meth="repeat">
-      <a:schemeClr val="tx1"/>
-    </dgm:txFillClrLst>
-    <dgm:txEffectClrLst/>
-  </dgm:styleLbl>
-  <dgm:styleLbl name="parChTrans1D2">
-    <dgm:fillClrLst meth="repeat">
-      <a:schemeClr val="accent3">
-        <a:tint val="90000"/>
-      </a:schemeClr>
-    </dgm:fillClrLst>
-    <dgm:linClrLst meth="repeat">
       <a:schemeClr val="accent2"/>
     </dgm:linClrLst>
     <dgm:effectClrLst/>
@@ -540,10 +487,10 @@
     </dgm:txFillClrLst>
     <dgm:txEffectClrLst/>
   </dgm:styleLbl>
-  <dgm:styleLbl name="parChTrans1D3">
+  <dgm:styleLbl name="parChTrans1D2">
     <dgm:fillClrLst meth="repeat">
-      <a:schemeClr val="accent4">
-        <a:tint val="70000"/>
+      <a:schemeClr val="accent2">
+        <a:tint val="90000"/>
       </a:schemeClr>
     </dgm:fillClrLst>
     <dgm:linClrLst meth="repeat">
@@ -556,10 +503,10 @@
     </dgm:txFillClrLst>
     <dgm:txEffectClrLst/>
   </dgm:styleLbl>
-  <dgm:styleLbl name="parChTrans1D4">
+  <dgm:styleLbl name="parChTrans1D3">
     <dgm:fillClrLst meth="repeat">
-      <a:schemeClr val="accent5">
-        <a:tint val="50000"/>
+      <a:schemeClr val="accent2">
+        <a:tint val="70000"/>
       </a:schemeClr>
     </dgm:fillClrLst>
     <dgm:linClrLst meth="repeat">
@@ -572,18 +519,31 @@
     </dgm:txFillClrLst>
     <dgm:txEffectClrLst/>
   </dgm:styleLbl>
+  <dgm:styleLbl name="parChTrans1D4">
+    <dgm:fillClrLst meth="repeat">
+      <a:schemeClr val="accent2">
+        <a:tint val="50000"/>
+      </a:schemeClr>
+    </dgm:fillClrLst>
+    <dgm:linClrLst meth="repeat">
+      <a:schemeClr val="accent5"/>
+    </dgm:linClrLst>
+    <dgm:effectClrLst/>
+    <dgm:txLinClrLst/>
+    <dgm:txFillClrLst meth="repeat">
+      <a:schemeClr val="tx1"/>
+    </dgm:txFillClrLst>
+    <dgm:txEffectClrLst/>
+  </dgm:styleLbl>
   <dgm:styleLbl name="fgAcc1">
     <dgm:fillClrLst meth="repeat">
       <a:schemeClr val="lt1">
         <a:alpha val="90000"/>
       </a:schemeClr>
     </dgm:fillClrLst>
-    <dgm:linClrLst meth="repeat">
+    <dgm:linClrLst>
       <a:schemeClr val="accent2"/>
       <a:schemeClr val="accent3"/>
-      <a:schemeClr val="accent4"/>
-      <a:schemeClr val="accent5"/>
-      <a:schemeClr val="accent6"/>
     </dgm:linClrLst>
     <dgm:effectClrLst/>
     <dgm:txLinClrLst/>
@@ -598,12 +558,9 @@
         <a:alpha val="90000"/>
       </a:schemeClr>
     </dgm:fillClrLst>
-    <dgm:linClrLst meth="repeat">
+    <dgm:linClrLst>
       <a:schemeClr val="accent2"/>
       <a:schemeClr val="accent3"/>
-      <a:schemeClr val="accent4"/>
-      <a:schemeClr val="accent5"/>
-      <a:schemeClr val="accent6"/>
     </dgm:linClrLst>
     <dgm:effectClrLst/>
     <dgm:txLinClrLst/>
@@ -618,12 +575,9 @@
         <a:alpha val="90000"/>
       </a:schemeClr>
     </dgm:fillClrLst>
-    <dgm:linClrLst meth="repeat">
+    <dgm:linClrLst>
       <a:schemeClr val="accent2"/>
       <a:schemeClr val="accent3"/>
-      <a:schemeClr val="accent4"/>
-      <a:schemeClr val="accent5"/>
-      <a:schemeClr val="accent6"/>
     </dgm:linClrLst>
     <dgm:effectClrLst/>
     <dgm:txLinClrLst/>
@@ -639,7 +593,7 @@
       </a:schemeClr>
     </dgm:fillClrLst>
     <dgm:linClrLst meth="repeat">
-      <a:schemeClr val="accent1"/>
+      <a:schemeClr val="accent2"/>
     </dgm:linClrLst>
     <dgm:effectClrLst/>
     <dgm:txLinClrLst/>
@@ -654,12 +608,9 @@
         <a:alpha val="90000"/>
       </a:schemeClr>
     </dgm:fillClrLst>
-    <dgm:linClrLst meth="repeat">
+    <dgm:linClrLst>
       <a:schemeClr val="accent2"/>
       <a:schemeClr val="accent3"/>
-      <a:schemeClr val="accent4"/>
-      <a:schemeClr val="accent5"/>
-      <a:schemeClr val="accent6"/>
     </dgm:linClrLst>
     <dgm:effectClrLst/>
     <dgm:txLinClrLst/>
@@ -672,12 +623,9 @@
     <dgm:fillClrLst meth="repeat">
       <a:schemeClr val="lt1"/>
     </dgm:fillClrLst>
-    <dgm:linClrLst meth="repeat">
+    <dgm:linClrLst>
       <a:schemeClr val="accent2"/>
       <a:schemeClr val="accent3"/>
-      <a:schemeClr val="accent4"/>
-      <a:schemeClr val="accent5"/>
-      <a:schemeClr val="accent6"/>
     </dgm:linClrLst>
     <dgm:effectClrLst/>
     <dgm:txLinClrLst/>
@@ -690,12 +638,9 @@
     <dgm:fillClrLst meth="repeat">
       <a:schemeClr val="lt1"/>
     </dgm:fillClrLst>
-    <dgm:linClrLst meth="repeat">
+    <dgm:linClrLst>
       <a:schemeClr val="accent2"/>
       <a:schemeClr val="accent3"/>
-      <a:schemeClr val="accent4"/>
-      <a:schemeClr val="accent5"/>
-      <a:schemeClr val="accent6"/>
     </dgm:linClrLst>
     <dgm:effectClrLst/>
     <dgm:txLinClrLst/>
@@ -708,12 +653,9 @@
     <dgm:fillClrLst meth="repeat">
       <a:schemeClr val="lt1"/>
     </dgm:fillClrLst>
-    <dgm:linClrLst meth="repeat">
+    <dgm:linClrLst>
       <a:schemeClr val="accent2"/>
       <a:schemeClr val="accent3"/>
-      <a:schemeClr val="accent4"/>
-      <a:schemeClr val="accent5"/>
-      <a:schemeClr val="accent6"/>
     </dgm:linClrLst>
     <dgm:effectClrLst/>
     <dgm:txLinClrLst/>
@@ -723,7 +665,7 @@
     <dgm:txEffectClrLst/>
   </dgm:styleLbl>
   <dgm:styleLbl name="fgAccFollowNode1">
-    <dgm:fillClrLst meth="repeat">
+    <dgm:fillClrLst>
       <a:schemeClr val="accent2">
         <a:tint val="40000"/>
         <a:alpha val="90000"/>
@@ -732,37 +674,13 @@
         <a:tint val="40000"/>
         <a:alpha val="90000"/>
       </a:schemeClr>
-      <a:schemeClr val="accent4">
-        <a:tint val="40000"/>
-        <a:alpha val="90000"/>
-      </a:schemeClr>
-      <a:schemeClr val="accent5">
-        <a:tint val="40000"/>
-        <a:alpha val="90000"/>
-      </a:schemeClr>
-      <a:schemeClr val="accent6">
-        <a:tint val="40000"/>
-        <a:alpha val="90000"/>
-      </a:schemeClr>
     </dgm:fillClrLst>
-    <dgm:linClrLst meth="repeat">
+    <dgm:linClrLst>
       <a:schemeClr val="accent2">
         <a:tint val="40000"/>
         <a:alpha val="90000"/>
       </a:schemeClr>
       <a:schemeClr val="accent3">
-        <a:tint val="40000"/>
-        <a:alpha val="90000"/>
-      </a:schemeClr>
-      <a:schemeClr val="accent4">
-        <a:tint val="40000"/>
-        <a:alpha val="90000"/>
-      </a:schemeClr>
-      <a:schemeClr val="accent5">
-        <a:tint val="40000"/>
-        <a:alpha val="90000"/>
-      </a:schemeClr>
-      <a:schemeClr val="accent6">
         <a:tint val="40000"/>
         <a:alpha val="90000"/>
       </a:schemeClr>
@@ -775,7 +693,7 @@
     <dgm:txEffectClrLst/>
   </dgm:styleLbl>
   <dgm:styleLbl name="alignAccFollowNode1">
-    <dgm:fillClrLst meth="repeat">
+    <dgm:fillClrLst>
       <a:schemeClr val="accent2">
         <a:tint val="40000"/>
         <a:alpha val="90000"/>
@@ -784,37 +702,13 @@
         <a:tint val="40000"/>
         <a:alpha val="90000"/>
       </a:schemeClr>
-      <a:schemeClr val="accent4">
-        <a:tint val="40000"/>
-        <a:alpha val="90000"/>
-      </a:schemeClr>
-      <a:schemeClr val="accent5">
-        <a:tint val="40000"/>
-        <a:alpha val="90000"/>
-      </a:schemeClr>
-      <a:schemeClr val="accent6">
-        <a:tint val="40000"/>
-        <a:alpha val="90000"/>
-      </a:schemeClr>
     </dgm:fillClrLst>
-    <dgm:linClrLst meth="repeat">
+    <dgm:linClrLst>
       <a:schemeClr val="accent2">
         <a:tint val="40000"/>
         <a:alpha val="90000"/>
       </a:schemeClr>
       <a:schemeClr val="accent3">
-        <a:tint val="40000"/>
-        <a:alpha val="90000"/>
-      </a:schemeClr>
-      <a:schemeClr val="accent4">
-        <a:tint val="40000"/>
-        <a:alpha val="90000"/>
-      </a:schemeClr>
-      <a:schemeClr val="accent5">
-        <a:tint val="40000"/>
-        <a:alpha val="90000"/>
-      </a:schemeClr>
-      <a:schemeClr val="accent6">
         <a:tint val="40000"/>
         <a:alpha val="90000"/>
       </a:schemeClr>
@@ -827,7 +721,7 @@
     <dgm:txEffectClrLst/>
   </dgm:styleLbl>
   <dgm:styleLbl name="bgAccFollowNode1">
-    <dgm:fillClrLst meth="repeat">
+    <dgm:fillClrLst>
       <a:schemeClr val="accent2">
         <a:tint val="40000"/>
         <a:alpha val="90000"/>
@@ -836,37 +730,13 @@
         <a:tint val="40000"/>
         <a:alpha val="90000"/>
       </a:schemeClr>
-      <a:schemeClr val="accent4">
-        <a:tint val="40000"/>
-        <a:alpha val="90000"/>
-      </a:schemeClr>
-      <a:schemeClr val="accent5">
-        <a:tint val="40000"/>
-        <a:alpha val="90000"/>
-      </a:schemeClr>
-      <a:schemeClr val="accent6">
-        <a:tint val="40000"/>
-        <a:alpha val="90000"/>
-      </a:schemeClr>
     </dgm:fillClrLst>
-    <dgm:linClrLst meth="repeat">
+    <dgm:linClrLst>
       <a:schemeClr val="accent2">
         <a:tint val="40000"/>
         <a:alpha val="90000"/>
       </a:schemeClr>
       <a:schemeClr val="accent3">
-        <a:tint val="40000"/>
-        <a:alpha val="90000"/>
-      </a:schemeClr>
-      <a:schemeClr val="accent4">
-        <a:tint val="40000"/>
-        <a:alpha val="90000"/>
-      </a:schemeClr>
-      <a:schemeClr val="accent5">
-        <a:tint val="40000"/>
-        <a:alpha val="90000"/>
-      </a:schemeClr>
-      <a:schemeClr val="accent6">
         <a:tint val="40000"/>
         <a:alpha val="90000"/>
       </a:schemeClr>
@@ -901,22 +771,6 @@
       </a:schemeClr>
     </dgm:fillClrLst>
     <dgm:linClrLst>
-      <a:schemeClr val="accent2"/>
-    </dgm:linClrLst>
-    <dgm:effectClrLst/>
-    <dgm:txLinClrLst/>
-    <dgm:txFillClrLst meth="repeat">
-      <a:schemeClr val="dk1"/>
-    </dgm:txFillClrLst>
-    <dgm:txEffectClrLst/>
-  </dgm:styleLbl>
-  <dgm:styleLbl name="fgAcc3">
-    <dgm:fillClrLst meth="repeat">
-      <a:schemeClr val="lt1">
-        <a:alpha val="90000"/>
-      </a:schemeClr>
-    </dgm:fillClrLst>
-    <dgm:linClrLst>
       <a:schemeClr val="accent3"/>
     </dgm:linClrLst>
     <dgm:effectClrLst/>
@@ -926,6 +780,22 @@
     </dgm:txFillClrLst>
     <dgm:txEffectClrLst/>
   </dgm:styleLbl>
+  <dgm:styleLbl name="fgAcc3">
+    <dgm:fillClrLst meth="repeat">
+      <a:schemeClr val="lt1">
+        <a:alpha val="90000"/>
+      </a:schemeClr>
+    </dgm:fillClrLst>
+    <dgm:linClrLst>
+      <a:schemeClr val="accent4"/>
+    </dgm:linClrLst>
+    <dgm:effectClrLst/>
+    <dgm:txLinClrLst/>
+    <dgm:txFillClrLst meth="repeat">
+      <a:schemeClr val="dk1"/>
+    </dgm:txFillClrLst>
+    <dgm:txEffectClrLst/>
+  </dgm:styleLbl>
   <dgm:styleLbl name="fgAcc4">
     <dgm:fillClrLst meth="repeat">
       <a:schemeClr val="lt1">
@@ -933,7 +803,7 @@
       </a:schemeClr>
     </dgm:fillClrLst>
     <dgm:linClrLst>
-      <a:schemeClr val="accent4"/>
+      <a:schemeClr val="accent5"/>
     </dgm:linClrLst>
     <dgm:effectClrLst/>
     <dgm:txLinClrLst/>
@@ -976,7 +846,7 @@
   </dgm:styleLbl>
   <dgm:styleLbl name="trBgShp">
     <dgm:fillClrLst meth="repeat">
-      <a:schemeClr val="accent1">
+      <a:schemeClr val="accent2">
         <a:tint val="50000"/>
         <a:alpha val="40000"/>
       </a:schemeClr>
@@ -1032,7 +902,7 @@
 <dgm:dataModel xmlns:dgm="http://schemas.openxmlformats.org/drawingml/2006/diagram" xmlns:a="http://schemas.openxmlformats.org/drawingml/2006/main">
   <dgm:ptLst>
     <dgm:pt modelId="{4960815A-9881-49C7-9AA5-F2D01C217044}" type="doc">
-      <dgm:prSet loTypeId="urn:microsoft.com/office/officeart/2005/8/layout/hierarchy1" loCatId="hierarchy" qsTypeId="urn:microsoft.com/office/officeart/2005/8/quickstyle/simple1" qsCatId="simple" csTypeId="urn:microsoft.com/office/officeart/2005/8/colors/colorful1" csCatId="colorful"/>
+      <dgm:prSet loTypeId="urn:microsoft.com/office/officeart/2016/7/layout/BasicLinearProcessNumbered" loCatId="process" qsTypeId="urn:microsoft.com/office/officeart/2005/8/quickstyle/simple1" qsCatId="simple" csTypeId="urn:microsoft.com/office/officeart/2005/8/colors/colorful2" csCatId="colorful"/>
       <dgm:spPr/>
       <dgm:t>
         <a:bodyPr/>
@@ -1077,13 +947,16 @@
       </dgm:t>
     </dgm:pt>
     <dgm:pt modelId="{F1242CA9-C115-4EA8-A884-8F7156818ED7}" type="sibTrans" cxnId="{E8F2C96E-8959-45F2-AC5E-DCA6C6EF4D39}">
-      <dgm:prSet/>
+      <dgm:prSet phldrT="1"/>
       <dgm:spPr/>
       <dgm:t>
         <a:bodyPr/>
         <a:lstStyle/>
         <a:p>
-          <a:endParaRPr lang="en-US"/>
+          <a:r>
+            <a:rPr lang="en-US"/>
+            <a:t>1</a:t>
+          </a:r>
         </a:p>
       </dgm:t>
     </dgm:pt>
@@ -1114,13 +987,16 @@
       </dgm:t>
     </dgm:pt>
     <dgm:pt modelId="{5095B751-9F84-4D73-9102-8D66FA9A68C1}" type="sibTrans" cxnId="{62A20DA7-6D54-4E04-B421-660E4A6E6A09}">
-      <dgm:prSet/>
+      <dgm:prSet phldrT="2"/>
       <dgm:spPr/>
       <dgm:t>
         <a:bodyPr/>
         <a:lstStyle/>
         <a:p>
-          <a:endParaRPr lang="en-US"/>
+          <a:r>
+            <a:rPr lang="en-US"/>
+            <a:t>2</a:t>
+          </a:r>
         </a:p>
       </dgm:t>
     </dgm:pt>
@@ -1151,124 +1027,173 @@
       </dgm:t>
     </dgm:pt>
     <dgm:pt modelId="{2B7A7912-DB80-4C47-9213-B9F363C3B5FA}" type="sibTrans" cxnId="{D4BB7633-51AE-4575-AC3E-920C8C75726C}">
-      <dgm:prSet/>
+      <dgm:prSet phldrT="3"/>
       <dgm:spPr/>
       <dgm:t>
         <a:bodyPr/>
         <a:lstStyle/>
         <a:p>
-          <a:endParaRPr lang="en-US"/>
+          <a:r>
+            <a:rPr lang="en-US"/>
+            <a:t>3</a:t>
+          </a:r>
         </a:p>
       </dgm:t>
     </dgm:pt>
-    <dgm:pt modelId="{483C5115-6054-4159-B853-8435DB37269A}" type="pres">
-      <dgm:prSet presAssocID="{4960815A-9881-49C7-9AA5-F2D01C217044}" presName="hierChild1" presStyleCnt="0">
+    <dgm:pt modelId="{4BA6B55E-C6F3-4621-A418-7836130ACB84}" type="pres">
+      <dgm:prSet presAssocID="{4960815A-9881-49C7-9AA5-F2D01C217044}" presName="Name0" presStyleCnt="0">
         <dgm:presLayoutVars>
-          <dgm:chPref val="1"/>
-          <dgm:dir/>
-          <dgm:animOne val="branch"/>
           <dgm:animLvl val="lvl"/>
-          <dgm:resizeHandles/>
+          <dgm:resizeHandles val="exact"/>
         </dgm:presLayoutVars>
       </dgm:prSet>
       <dgm:spPr/>
     </dgm:pt>
-    <dgm:pt modelId="{F2B6D28F-44AD-49DE-8C72-ED8B830D8130}" type="pres">
-      <dgm:prSet presAssocID="{2A7C937D-B951-4378-B5CD-2B6610175104}" presName="hierRoot1" presStyleCnt="0"/>
-      <dgm:spPr/>
-    </dgm:pt>
-    <dgm:pt modelId="{3F4724AA-A844-48CC-8229-B6A3FBF6CA7D}" type="pres">
-      <dgm:prSet presAssocID="{2A7C937D-B951-4378-B5CD-2B6610175104}" presName="composite" presStyleCnt="0"/>
-      <dgm:spPr/>
-    </dgm:pt>
-    <dgm:pt modelId="{8F05AC5A-681E-42FF-94A2-34F216DBA947}" type="pres">
-      <dgm:prSet presAssocID="{2A7C937D-B951-4378-B5CD-2B6610175104}" presName="background" presStyleLbl="node0" presStyleIdx="0" presStyleCnt="3"/>
-      <dgm:spPr/>
-    </dgm:pt>
-    <dgm:pt modelId="{D1DE3A7B-FB12-4445-9A39-77E32712FBEB}" type="pres">
-      <dgm:prSet presAssocID="{2A7C937D-B951-4378-B5CD-2B6610175104}" presName="text" presStyleLbl="fgAcc0" presStyleIdx="0" presStyleCnt="3">
+    <dgm:pt modelId="{3263CD81-4E73-4B1B-9D3D-064B781DD0BB}" type="pres">
+      <dgm:prSet presAssocID="{2A7C937D-B951-4378-B5CD-2B6610175104}" presName="compositeNode" presStyleCnt="0">
         <dgm:presLayoutVars>
-          <dgm:chPref val="3"/>
+          <dgm:bulletEnabled val="1"/>
         </dgm:presLayoutVars>
       </dgm:prSet>
       <dgm:spPr/>
     </dgm:pt>
-    <dgm:pt modelId="{5859FC24-B777-4D6A-B76C-653FE278137D}" type="pres">
-      <dgm:prSet presAssocID="{2A7C937D-B951-4378-B5CD-2B6610175104}" presName="hierChild2" presStyleCnt="0"/>
+    <dgm:pt modelId="{82FC77A7-F672-4F92-8C5E-3422F7286B4C}" type="pres">
+      <dgm:prSet presAssocID="{2A7C937D-B951-4378-B5CD-2B6610175104}" presName="bgRect" presStyleLbl="bgAccFollowNode1" presStyleIdx="0" presStyleCnt="3"/>
       <dgm:spPr/>
     </dgm:pt>
-    <dgm:pt modelId="{9AE9B6FA-8408-4175-A6D8-0F9D0177889A}" type="pres">
-      <dgm:prSet presAssocID="{A2649880-44BE-4CD0-9A55-9C4A7BD71262}" presName="hierRoot1" presStyleCnt="0"/>
-      <dgm:spPr/>
-    </dgm:pt>
-    <dgm:pt modelId="{BE9E27BE-BF98-4D91-BD22-06B6A0A26DFD}" type="pres">
-      <dgm:prSet presAssocID="{A2649880-44BE-4CD0-9A55-9C4A7BD71262}" presName="composite" presStyleCnt="0"/>
-      <dgm:spPr/>
-    </dgm:pt>
-    <dgm:pt modelId="{16134A9E-D189-41A3-8413-E86E2EE09E10}" type="pres">
-      <dgm:prSet presAssocID="{A2649880-44BE-4CD0-9A55-9C4A7BD71262}" presName="background" presStyleLbl="node0" presStyleIdx="1" presStyleCnt="3"/>
-      <dgm:spPr/>
-    </dgm:pt>
-    <dgm:pt modelId="{3CBFA09C-4443-4984-B193-29309A03AFB7}" type="pres">
-      <dgm:prSet presAssocID="{A2649880-44BE-4CD0-9A55-9C4A7BD71262}" presName="text" presStyleLbl="fgAcc0" presStyleIdx="1" presStyleCnt="3">
+    <dgm:pt modelId="{8C7531EE-F728-4B8C-83ED-2350449D62C9}" type="pres">
+      <dgm:prSet presAssocID="{F1242CA9-C115-4EA8-A884-8F7156818ED7}" presName="sibTransNodeCircle" presStyleLbl="alignNode1" presStyleIdx="0" presStyleCnt="6">
         <dgm:presLayoutVars>
-          <dgm:chPref val="3"/>
+          <dgm:chMax val="0"/>
+          <dgm:bulletEnabled/>
         </dgm:presLayoutVars>
       </dgm:prSet>
       <dgm:spPr/>
     </dgm:pt>
-    <dgm:pt modelId="{D0FC9B0F-A17E-41CF-8690-54350902C2C3}" type="pres">
-      <dgm:prSet presAssocID="{A2649880-44BE-4CD0-9A55-9C4A7BD71262}" presName="hierChild2" presStyleCnt="0"/>
+    <dgm:pt modelId="{91FEDD44-94AA-4A11-889D-324C4FC329EB}" type="pres">
+      <dgm:prSet presAssocID="{2A7C937D-B951-4378-B5CD-2B6610175104}" presName="bottomLine" presStyleLbl="alignNode1" presStyleIdx="1" presStyleCnt="6">
+        <dgm:presLayoutVars/>
+      </dgm:prSet>
       <dgm:spPr/>
     </dgm:pt>
-    <dgm:pt modelId="{7F07936F-57B4-4C93-8BDF-276292F0621A}" type="pres">
-      <dgm:prSet presAssocID="{733B13A1-6338-45BD-A245-8CC27AED7FE1}" presName="hierRoot1" presStyleCnt="0"/>
-      <dgm:spPr/>
-    </dgm:pt>
-    <dgm:pt modelId="{D87FCE61-BA39-4267-A888-7CFB2B0F3140}" type="pres">
-      <dgm:prSet presAssocID="{733B13A1-6338-45BD-A245-8CC27AED7FE1}" presName="composite" presStyleCnt="0"/>
-      <dgm:spPr/>
-    </dgm:pt>
-    <dgm:pt modelId="{9E219BCF-B998-499C-ADFD-EF293F1B45C4}" type="pres">
-      <dgm:prSet presAssocID="{733B13A1-6338-45BD-A245-8CC27AED7FE1}" presName="background" presStyleLbl="node0" presStyleIdx="2" presStyleCnt="3"/>
-      <dgm:spPr/>
-    </dgm:pt>
-    <dgm:pt modelId="{7A381A10-7892-4B7D-AC8A-7FC715648F71}" type="pres">
-      <dgm:prSet presAssocID="{733B13A1-6338-45BD-A245-8CC27AED7FE1}" presName="text" presStyleLbl="fgAcc0" presStyleIdx="2" presStyleCnt="3">
+    <dgm:pt modelId="{C6E4461E-50FD-4153-9FBB-14370DAC2A53}" type="pres">
+      <dgm:prSet presAssocID="{2A7C937D-B951-4378-B5CD-2B6610175104}" presName="nodeText" presStyleLbl="bgAccFollowNode1" presStyleIdx="0" presStyleCnt="3">
         <dgm:presLayoutVars>
-          <dgm:chPref val="3"/>
+          <dgm:bulletEnabled val="1"/>
         </dgm:presLayoutVars>
       </dgm:prSet>
       <dgm:spPr/>
     </dgm:pt>
-    <dgm:pt modelId="{44527BF5-34BE-472F-8D42-EE6EC957EF40}" type="pres">
-      <dgm:prSet presAssocID="{733B13A1-6338-45BD-A245-8CC27AED7FE1}" presName="hierChild2" presStyleCnt="0"/>
+    <dgm:pt modelId="{2D635ECE-4EB3-4A8F-97DA-C84EEB69836B}" type="pres">
+      <dgm:prSet presAssocID="{F1242CA9-C115-4EA8-A884-8F7156818ED7}" presName="sibTrans" presStyleCnt="0"/>
+      <dgm:spPr/>
+    </dgm:pt>
+    <dgm:pt modelId="{2DD531F6-F916-43B0-8C6C-FA2472E52D85}" type="pres">
+      <dgm:prSet presAssocID="{A2649880-44BE-4CD0-9A55-9C4A7BD71262}" presName="compositeNode" presStyleCnt="0">
+        <dgm:presLayoutVars>
+          <dgm:bulletEnabled val="1"/>
+        </dgm:presLayoutVars>
+      </dgm:prSet>
+      <dgm:spPr/>
+    </dgm:pt>
+    <dgm:pt modelId="{D03C2E00-B61F-4E3D-8516-FA1A1744EEB3}" type="pres">
+      <dgm:prSet presAssocID="{A2649880-44BE-4CD0-9A55-9C4A7BD71262}" presName="bgRect" presStyleLbl="bgAccFollowNode1" presStyleIdx="1" presStyleCnt="3"/>
+      <dgm:spPr/>
+    </dgm:pt>
+    <dgm:pt modelId="{CF764E69-3ADB-4752-A19A-03CC611B11C4}" type="pres">
+      <dgm:prSet presAssocID="{5095B751-9F84-4D73-9102-8D66FA9A68C1}" presName="sibTransNodeCircle" presStyleLbl="alignNode1" presStyleIdx="2" presStyleCnt="6">
+        <dgm:presLayoutVars>
+          <dgm:chMax val="0"/>
+          <dgm:bulletEnabled/>
+        </dgm:presLayoutVars>
+      </dgm:prSet>
+      <dgm:spPr/>
+    </dgm:pt>
+    <dgm:pt modelId="{E64E9ACC-55C8-4BAE-A867-C67B4EC1C314}" type="pres">
+      <dgm:prSet presAssocID="{A2649880-44BE-4CD0-9A55-9C4A7BD71262}" presName="bottomLine" presStyleLbl="alignNode1" presStyleIdx="3" presStyleCnt="6">
+        <dgm:presLayoutVars/>
+      </dgm:prSet>
+      <dgm:spPr/>
+    </dgm:pt>
+    <dgm:pt modelId="{B73B3191-0486-4119-945A-990A4E660CD1}" type="pres">
+      <dgm:prSet presAssocID="{A2649880-44BE-4CD0-9A55-9C4A7BD71262}" presName="nodeText" presStyleLbl="bgAccFollowNode1" presStyleIdx="1" presStyleCnt="3">
+        <dgm:presLayoutVars>
+          <dgm:bulletEnabled val="1"/>
+        </dgm:presLayoutVars>
+      </dgm:prSet>
+      <dgm:spPr/>
+    </dgm:pt>
+    <dgm:pt modelId="{2EDE5313-8966-473B-9562-70D71B8657E5}" type="pres">
+      <dgm:prSet presAssocID="{5095B751-9F84-4D73-9102-8D66FA9A68C1}" presName="sibTrans" presStyleCnt="0"/>
+      <dgm:spPr/>
+    </dgm:pt>
+    <dgm:pt modelId="{E223E07C-947F-4884-8AB8-282555FC0114}" type="pres">
+      <dgm:prSet presAssocID="{733B13A1-6338-45BD-A245-8CC27AED7FE1}" presName="compositeNode" presStyleCnt="0">
+        <dgm:presLayoutVars>
+          <dgm:bulletEnabled val="1"/>
+        </dgm:presLayoutVars>
+      </dgm:prSet>
+      <dgm:spPr/>
+    </dgm:pt>
+    <dgm:pt modelId="{85D6F34E-9BB6-4495-8D7A-6D5C05B7D94B}" type="pres">
+      <dgm:prSet presAssocID="{733B13A1-6338-45BD-A245-8CC27AED7FE1}" presName="bgRect" presStyleLbl="bgAccFollowNode1" presStyleIdx="2" presStyleCnt="3"/>
+      <dgm:spPr/>
+    </dgm:pt>
+    <dgm:pt modelId="{F89A172E-48AB-43B8-BDB0-9D76AB9BC4F8}" type="pres">
+      <dgm:prSet presAssocID="{2B7A7912-DB80-4C47-9213-B9F363C3B5FA}" presName="sibTransNodeCircle" presStyleLbl="alignNode1" presStyleIdx="4" presStyleCnt="6">
+        <dgm:presLayoutVars>
+          <dgm:chMax val="0"/>
+          <dgm:bulletEnabled/>
+        </dgm:presLayoutVars>
+      </dgm:prSet>
+      <dgm:spPr/>
+    </dgm:pt>
+    <dgm:pt modelId="{51081732-D5A1-425F-9056-4D0984230A81}" type="pres">
+      <dgm:prSet presAssocID="{733B13A1-6338-45BD-A245-8CC27AED7FE1}" presName="bottomLine" presStyleLbl="alignNode1" presStyleIdx="5" presStyleCnt="6">
+        <dgm:presLayoutVars/>
+      </dgm:prSet>
+      <dgm:spPr/>
+    </dgm:pt>
+    <dgm:pt modelId="{547413FC-7620-4F84-ACE7-3B9286D8D28A}" type="pres">
+      <dgm:prSet presAssocID="{733B13A1-6338-45BD-A245-8CC27AED7FE1}" presName="nodeText" presStyleLbl="bgAccFollowNode1" presStyleIdx="2" presStyleCnt="3">
+        <dgm:presLayoutVars>
+          <dgm:bulletEnabled val="1"/>
+        </dgm:presLayoutVars>
+      </dgm:prSet>
       <dgm:spPr/>
     </dgm:pt>
   </dgm:ptLst>
   <dgm:cxnLst>
-    <dgm:cxn modelId="{5C959B2A-C098-4A68-9B7E-0388D5EDF366}" type="presOf" srcId="{A2649880-44BE-4CD0-9A55-9C4A7BD71262}" destId="{3CBFA09C-4443-4984-B193-29309A03AFB7}" srcOrd="0" destOrd="0" presId="urn:microsoft.com/office/officeart/2005/8/layout/hierarchy1"/>
+    <dgm:cxn modelId="{86BD0C21-43D4-431F-8486-3C3402FE4EBF}" type="presOf" srcId="{F1242CA9-C115-4EA8-A884-8F7156818ED7}" destId="{8C7531EE-F728-4B8C-83ED-2350449D62C9}" srcOrd="0" destOrd="0" presId="urn:microsoft.com/office/officeart/2016/7/layout/BasicLinearProcessNumbered"/>
+    <dgm:cxn modelId="{2A892233-0849-4AEA-A726-ED13409D47B8}" type="presOf" srcId="{A2649880-44BE-4CD0-9A55-9C4A7BD71262}" destId="{D03C2E00-B61F-4E3D-8516-FA1A1744EEB3}" srcOrd="0" destOrd="0" presId="urn:microsoft.com/office/officeart/2016/7/layout/BasicLinearProcessNumbered"/>
     <dgm:cxn modelId="{D4BB7633-51AE-4575-AC3E-920C8C75726C}" srcId="{4960815A-9881-49C7-9AA5-F2D01C217044}" destId="{733B13A1-6338-45BD-A245-8CC27AED7FE1}" srcOrd="2" destOrd="0" parTransId="{FF6F9D51-F256-430B-8635-D9EF786A9E1F}" sibTransId="{2B7A7912-DB80-4C47-9213-B9F363C3B5FA}"/>
-    <dgm:cxn modelId="{FDC96767-C1E1-4014-A935-4DACD24ED8A6}" type="presOf" srcId="{4960815A-9881-49C7-9AA5-F2D01C217044}" destId="{483C5115-6054-4159-B853-8435DB37269A}" srcOrd="0" destOrd="0" presId="urn:microsoft.com/office/officeart/2005/8/layout/hierarchy1"/>
     <dgm:cxn modelId="{E8F2C96E-8959-45F2-AC5E-DCA6C6EF4D39}" srcId="{4960815A-9881-49C7-9AA5-F2D01C217044}" destId="{2A7C937D-B951-4378-B5CD-2B6610175104}" srcOrd="0" destOrd="0" parTransId="{2265E988-8B7E-4DEC-A0D8-8838120C6B6F}" sibTransId="{F1242CA9-C115-4EA8-A884-8F7156818ED7}"/>
-    <dgm:cxn modelId="{3985F98D-3CF3-4E73-B5DF-6ACC2471EABA}" type="presOf" srcId="{733B13A1-6338-45BD-A245-8CC27AED7FE1}" destId="{7A381A10-7892-4B7D-AC8A-7FC715648F71}" srcOrd="0" destOrd="0" presId="urn:microsoft.com/office/officeart/2005/8/layout/hierarchy1"/>
+    <dgm:cxn modelId="{220E6677-F42A-483E-BDAB-8BF2BCA747A7}" type="presOf" srcId="{2A7C937D-B951-4378-B5CD-2B6610175104}" destId="{C6E4461E-50FD-4153-9FBB-14370DAC2A53}" srcOrd="1" destOrd="0" presId="urn:microsoft.com/office/officeart/2016/7/layout/BasicLinearProcessNumbered"/>
+    <dgm:cxn modelId="{04DCE977-9119-4A0F-9EC1-0806E4346077}" type="presOf" srcId="{733B13A1-6338-45BD-A245-8CC27AED7FE1}" destId="{85D6F34E-9BB6-4495-8D7A-6D5C05B7D94B}" srcOrd="0" destOrd="0" presId="urn:microsoft.com/office/officeart/2016/7/layout/BasicLinearProcessNumbered"/>
+    <dgm:cxn modelId="{50F24F87-B380-4773-BC8E-3A94BA7E20AC}" type="presOf" srcId="{4960815A-9881-49C7-9AA5-F2D01C217044}" destId="{4BA6B55E-C6F3-4621-A418-7836130ACB84}" srcOrd="0" destOrd="0" presId="urn:microsoft.com/office/officeart/2016/7/layout/BasicLinearProcessNumbered"/>
+    <dgm:cxn modelId="{2C32D69E-763F-4149-A361-3E0516FA0137}" type="presOf" srcId="{733B13A1-6338-45BD-A245-8CC27AED7FE1}" destId="{547413FC-7620-4F84-ACE7-3B9286D8D28A}" srcOrd="1" destOrd="0" presId="urn:microsoft.com/office/officeart/2016/7/layout/BasicLinearProcessNumbered"/>
+    <dgm:cxn modelId="{BD33D7A6-7164-4469-91E7-E87ECF35712F}" type="presOf" srcId="{2A7C937D-B951-4378-B5CD-2B6610175104}" destId="{82FC77A7-F672-4F92-8C5E-3422F7286B4C}" srcOrd="0" destOrd="0" presId="urn:microsoft.com/office/officeart/2016/7/layout/BasicLinearProcessNumbered"/>
     <dgm:cxn modelId="{62A20DA7-6D54-4E04-B421-660E4A6E6A09}" srcId="{4960815A-9881-49C7-9AA5-F2D01C217044}" destId="{A2649880-44BE-4CD0-9A55-9C4A7BD71262}" srcOrd="1" destOrd="0" parTransId="{A5CBC1C9-4BE8-40B5-B060-E81BEA28DA53}" sibTransId="{5095B751-9F84-4D73-9102-8D66FA9A68C1}"/>
-    <dgm:cxn modelId="{2C23B1AA-5CD9-4A83-B25D-8B17544DC8C5}" type="presOf" srcId="{2A7C937D-B951-4378-B5CD-2B6610175104}" destId="{D1DE3A7B-FB12-4445-9A39-77E32712FBEB}" srcOrd="0" destOrd="0" presId="urn:microsoft.com/office/officeart/2005/8/layout/hierarchy1"/>
-    <dgm:cxn modelId="{E8246AB8-D091-4D46-A9C4-991BB649C29E}" type="presParOf" srcId="{483C5115-6054-4159-B853-8435DB37269A}" destId="{F2B6D28F-44AD-49DE-8C72-ED8B830D8130}" srcOrd="0" destOrd="0" presId="urn:microsoft.com/office/officeart/2005/8/layout/hierarchy1"/>
-    <dgm:cxn modelId="{FE30BB91-FBEF-47C8-9175-673023FC5D5D}" type="presParOf" srcId="{F2B6D28F-44AD-49DE-8C72-ED8B830D8130}" destId="{3F4724AA-A844-48CC-8229-B6A3FBF6CA7D}" srcOrd="0" destOrd="0" presId="urn:microsoft.com/office/officeart/2005/8/layout/hierarchy1"/>
-    <dgm:cxn modelId="{179F2CB6-24A5-43B4-92AD-91B28DC61A56}" type="presParOf" srcId="{3F4724AA-A844-48CC-8229-B6A3FBF6CA7D}" destId="{8F05AC5A-681E-42FF-94A2-34F216DBA947}" srcOrd="0" destOrd="0" presId="urn:microsoft.com/office/officeart/2005/8/layout/hierarchy1"/>
-    <dgm:cxn modelId="{F201D231-3D80-4B5B-AA7F-7478B69B1A95}" type="presParOf" srcId="{3F4724AA-A844-48CC-8229-B6A3FBF6CA7D}" destId="{D1DE3A7B-FB12-4445-9A39-77E32712FBEB}" srcOrd="1" destOrd="0" presId="urn:microsoft.com/office/officeart/2005/8/layout/hierarchy1"/>
-    <dgm:cxn modelId="{8AF679C6-173C-48C8-A872-E166C3C39D2D}" type="presParOf" srcId="{F2B6D28F-44AD-49DE-8C72-ED8B830D8130}" destId="{5859FC24-B777-4D6A-B76C-653FE278137D}" srcOrd="1" destOrd="0" presId="urn:microsoft.com/office/officeart/2005/8/layout/hierarchy1"/>
-    <dgm:cxn modelId="{27F309E0-B34C-4456-A69C-705B0D25218E}" type="presParOf" srcId="{483C5115-6054-4159-B853-8435DB37269A}" destId="{9AE9B6FA-8408-4175-A6D8-0F9D0177889A}" srcOrd="1" destOrd="0" presId="urn:microsoft.com/office/officeart/2005/8/layout/hierarchy1"/>
-    <dgm:cxn modelId="{CC96279D-093A-4333-B9E2-D26A760023DD}" type="presParOf" srcId="{9AE9B6FA-8408-4175-A6D8-0F9D0177889A}" destId="{BE9E27BE-BF98-4D91-BD22-06B6A0A26DFD}" srcOrd="0" destOrd="0" presId="urn:microsoft.com/office/officeart/2005/8/layout/hierarchy1"/>
-    <dgm:cxn modelId="{E8E2E70D-21CE-4A86-8FBA-020216F038A7}" type="presParOf" srcId="{BE9E27BE-BF98-4D91-BD22-06B6A0A26DFD}" destId="{16134A9E-D189-41A3-8413-E86E2EE09E10}" srcOrd="0" destOrd="0" presId="urn:microsoft.com/office/officeart/2005/8/layout/hierarchy1"/>
-    <dgm:cxn modelId="{5A65A309-636B-478B-8F81-C7E297C49A8C}" type="presParOf" srcId="{BE9E27BE-BF98-4D91-BD22-06B6A0A26DFD}" destId="{3CBFA09C-4443-4984-B193-29309A03AFB7}" srcOrd="1" destOrd="0" presId="urn:microsoft.com/office/officeart/2005/8/layout/hierarchy1"/>
-    <dgm:cxn modelId="{54306FB0-8180-4C78-BB79-3F7F81AC4492}" type="presParOf" srcId="{9AE9B6FA-8408-4175-A6D8-0F9D0177889A}" destId="{D0FC9B0F-A17E-41CF-8690-54350902C2C3}" srcOrd="1" destOrd="0" presId="urn:microsoft.com/office/officeart/2005/8/layout/hierarchy1"/>
-    <dgm:cxn modelId="{CA609118-C824-496D-99F0-F81DCFC56793}" type="presParOf" srcId="{483C5115-6054-4159-B853-8435DB37269A}" destId="{7F07936F-57B4-4C93-8BDF-276292F0621A}" srcOrd="2" destOrd="0" presId="urn:microsoft.com/office/officeart/2005/8/layout/hierarchy1"/>
-    <dgm:cxn modelId="{180D10AC-3F7C-4173-92D3-5D95D38AA31B}" type="presParOf" srcId="{7F07936F-57B4-4C93-8BDF-276292F0621A}" destId="{D87FCE61-BA39-4267-A888-7CFB2B0F3140}" srcOrd="0" destOrd="0" presId="urn:microsoft.com/office/officeart/2005/8/layout/hierarchy1"/>
-    <dgm:cxn modelId="{4200A7C4-42DF-4B09-9A76-7A7AD7869F94}" type="presParOf" srcId="{D87FCE61-BA39-4267-A888-7CFB2B0F3140}" destId="{9E219BCF-B998-499C-ADFD-EF293F1B45C4}" srcOrd="0" destOrd="0" presId="urn:microsoft.com/office/officeart/2005/8/layout/hierarchy1"/>
-    <dgm:cxn modelId="{16815BED-CF46-4ED1-B157-2CEE1C85412A}" type="presParOf" srcId="{D87FCE61-BA39-4267-A888-7CFB2B0F3140}" destId="{7A381A10-7892-4B7D-AC8A-7FC715648F71}" srcOrd="1" destOrd="0" presId="urn:microsoft.com/office/officeart/2005/8/layout/hierarchy1"/>
-    <dgm:cxn modelId="{D120A681-38F1-4709-BE9D-A34ABB2C8832}" type="presParOf" srcId="{7F07936F-57B4-4C93-8BDF-276292F0621A}" destId="{44527BF5-34BE-472F-8D42-EE6EC957EF40}" srcOrd="1" destOrd="0" presId="urn:microsoft.com/office/officeart/2005/8/layout/hierarchy1"/>
+    <dgm:cxn modelId="{4CE93FCE-2D66-4EFE-8297-003D3CC6DD97}" type="presOf" srcId="{A2649880-44BE-4CD0-9A55-9C4A7BD71262}" destId="{B73B3191-0486-4119-945A-990A4E660CD1}" srcOrd="1" destOrd="0" presId="urn:microsoft.com/office/officeart/2016/7/layout/BasicLinearProcessNumbered"/>
+    <dgm:cxn modelId="{CB0B45D6-C569-401E-81B0-0EC43308523C}" type="presOf" srcId="{5095B751-9F84-4D73-9102-8D66FA9A68C1}" destId="{CF764E69-3ADB-4752-A19A-03CC611B11C4}" srcOrd="0" destOrd="0" presId="urn:microsoft.com/office/officeart/2016/7/layout/BasicLinearProcessNumbered"/>
+    <dgm:cxn modelId="{45CA7EF8-5D56-4887-9459-7B88051FA050}" type="presOf" srcId="{2B7A7912-DB80-4C47-9213-B9F363C3B5FA}" destId="{F89A172E-48AB-43B8-BDB0-9D76AB9BC4F8}" srcOrd="0" destOrd="0" presId="urn:microsoft.com/office/officeart/2016/7/layout/BasicLinearProcessNumbered"/>
+    <dgm:cxn modelId="{DA15C584-77BA-432F-BA72-87E285E2B62D}" type="presParOf" srcId="{4BA6B55E-C6F3-4621-A418-7836130ACB84}" destId="{3263CD81-4E73-4B1B-9D3D-064B781DD0BB}" srcOrd="0" destOrd="0" presId="urn:microsoft.com/office/officeart/2016/7/layout/BasicLinearProcessNumbered"/>
+    <dgm:cxn modelId="{945F07B8-05E4-4A70-BEFB-220F8A93329E}" type="presParOf" srcId="{3263CD81-4E73-4B1B-9D3D-064B781DD0BB}" destId="{82FC77A7-F672-4F92-8C5E-3422F7286B4C}" srcOrd="0" destOrd="0" presId="urn:microsoft.com/office/officeart/2016/7/layout/BasicLinearProcessNumbered"/>
+    <dgm:cxn modelId="{52217051-6257-4668-B958-770946DF4C30}" type="presParOf" srcId="{3263CD81-4E73-4B1B-9D3D-064B781DD0BB}" destId="{8C7531EE-F728-4B8C-83ED-2350449D62C9}" srcOrd="1" destOrd="0" presId="urn:microsoft.com/office/officeart/2016/7/layout/BasicLinearProcessNumbered"/>
+    <dgm:cxn modelId="{9CBDDF2A-0E9F-4FAC-9BDE-65CC3A74E242}" type="presParOf" srcId="{3263CD81-4E73-4B1B-9D3D-064B781DD0BB}" destId="{91FEDD44-94AA-4A11-889D-324C4FC329EB}" srcOrd="2" destOrd="0" presId="urn:microsoft.com/office/officeart/2016/7/layout/BasicLinearProcessNumbered"/>
+    <dgm:cxn modelId="{0713A19E-9210-4A94-A2C0-355CA8A10719}" type="presParOf" srcId="{3263CD81-4E73-4B1B-9D3D-064B781DD0BB}" destId="{C6E4461E-50FD-4153-9FBB-14370DAC2A53}" srcOrd="3" destOrd="0" presId="urn:microsoft.com/office/officeart/2016/7/layout/BasicLinearProcessNumbered"/>
+    <dgm:cxn modelId="{F8606037-B0C9-4917-B63B-D13F629C4966}" type="presParOf" srcId="{4BA6B55E-C6F3-4621-A418-7836130ACB84}" destId="{2D635ECE-4EB3-4A8F-97DA-C84EEB69836B}" srcOrd="1" destOrd="0" presId="urn:microsoft.com/office/officeart/2016/7/layout/BasicLinearProcessNumbered"/>
+    <dgm:cxn modelId="{42912E76-A395-4C7B-A779-6E92A2EC9BD3}" type="presParOf" srcId="{4BA6B55E-C6F3-4621-A418-7836130ACB84}" destId="{2DD531F6-F916-43B0-8C6C-FA2472E52D85}" srcOrd="2" destOrd="0" presId="urn:microsoft.com/office/officeart/2016/7/layout/BasicLinearProcessNumbered"/>
+    <dgm:cxn modelId="{24E28585-9C06-4C80-A21B-0C62E7FAC717}" type="presParOf" srcId="{2DD531F6-F916-43B0-8C6C-FA2472E52D85}" destId="{D03C2E00-B61F-4E3D-8516-FA1A1744EEB3}" srcOrd="0" destOrd="0" presId="urn:microsoft.com/office/officeart/2016/7/layout/BasicLinearProcessNumbered"/>
+    <dgm:cxn modelId="{5E6815D2-BC31-4E9C-BDD9-8ECDEF4EC8E5}" type="presParOf" srcId="{2DD531F6-F916-43B0-8C6C-FA2472E52D85}" destId="{CF764E69-3ADB-4752-A19A-03CC611B11C4}" srcOrd="1" destOrd="0" presId="urn:microsoft.com/office/officeart/2016/7/layout/BasicLinearProcessNumbered"/>
+    <dgm:cxn modelId="{58C0E130-D84D-4F15-AD02-AEFAB95EBA8F}" type="presParOf" srcId="{2DD531F6-F916-43B0-8C6C-FA2472E52D85}" destId="{E64E9ACC-55C8-4BAE-A867-C67B4EC1C314}" srcOrd="2" destOrd="0" presId="urn:microsoft.com/office/officeart/2016/7/layout/BasicLinearProcessNumbered"/>
+    <dgm:cxn modelId="{0D5ED5E0-E0E3-431C-934A-D68EF7DD78E9}" type="presParOf" srcId="{2DD531F6-F916-43B0-8C6C-FA2472E52D85}" destId="{B73B3191-0486-4119-945A-990A4E660CD1}" srcOrd="3" destOrd="0" presId="urn:microsoft.com/office/officeart/2016/7/layout/BasicLinearProcessNumbered"/>
+    <dgm:cxn modelId="{2C4D6EC0-1694-404D-B226-9411DEB627D9}" type="presParOf" srcId="{4BA6B55E-C6F3-4621-A418-7836130ACB84}" destId="{2EDE5313-8966-473B-9562-70D71B8657E5}" srcOrd="3" destOrd="0" presId="urn:microsoft.com/office/officeart/2016/7/layout/BasicLinearProcessNumbered"/>
+    <dgm:cxn modelId="{0AED4ABC-F453-47DA-9870-E2B9ED2FBA5F}" type="presParOf" srcId="{4BA6B55E-C6F3-4621-A418-7836130ACB84}" destId="{E223E07C-947F-4884-8AB8-282555FC0114}" srcOrd="4" destOrd="0" presId="urn:microsoft.com/office/officeart/2016/7/layout/BasicLinearProcessNumbered"/>
+    <dgm:cxn modelId="{EACA38C9-35BF-40CA-A12C-4EBE6BE4BCF7}" type="presParOf" srcId="{E223E07C-947F-4884-8AB8-282555FC0114}" destId="{85D6F34E-9BB6-4495-8D7A-6D5C05B7D94B}" srcOrd="0" destOrd="0" presId="urn:microsoft.com/office/officeart/2016/7/layout/BasicLinearProcessNumbered"/>
+    <dgm:cxn modelId="{D4C30454-49EA-4624-8FA7-B1FCC5AC6BD6}" type="presParOf" srcId="{E223E07C-947F-4884-8AB8-282555FC0114}" destId="{F89A172E-48AB-43B8-BDB0-9D76AB9BC4F8}" srcOrd="1" destOrd="0" presId="urn:microsoft.com/office/officeart/2016/7/layout/BasicLinearProcessNumbered"/>
+    <dgm:cxn modelId="{98EB0C41-190A-4BFD-ACB0-375575563AFD}" type="presParOf" srcId="{E223E07C-947F-4884-8AB8-282555FC0114}" destId="{51081732-D5A1-425F-9056-4D0984230A81}" srcOrd="2" destOrd="0" presId="urn:microsoft.com/office/officeart/2016/7/layout/BasicLinearProcessNumbered"/>
+    <dgm:cxn modelId="{757FD3B1-C545-4E10-9ED1-A083C82522BD}" type="presParOf" srcId="{E223E07C-947F-4884-8AB8-282555FC0114}" destId="{547413FC-7620-4F84-ACE7-3B9286D8D28A}" srcOrd="3" destOrd="0" presId="urn:microsoft.com/office/officeart/2016/7/layout/BasicLinearProcessNumbered"/>
   </dgm:cxnLst>
   <dgm:bg/>
   <dgm:whole/>
@@ -1288,23 +1213,23 @@
       <dsp:cNvGrpSpPr/>
     </dsp:nvGrpSpPr>
     <dsp:grpSpPr/>
-    <dsp:sp modelId="{8F05AC5A-681E-42FF-94A2-34F216DBA947}">
+    <dsp:sp modelId="{82FC77A7-F672-4F92-8C5E-3422F7286B4C}">
       <dsp:nvSpPr>
         <dsp:cNvPr id="0" name=""/>
         <dsp:cNvSpPr/>
       </dsp:nvSpPr>
       <dsp:spPr>
         <a:xfrm>
-          <a:off x="0" y="1081170"/>
-          <a:ext cx="2957512" cy="1878020"/>
+          <a:off x="0" y="0"/>
+          <a:ext cx="3414946" cy="4192805"/>
         </a:xfrm>
-        <a:prstGeom prst="roundRect">
-          <a:avLst>
-            <a:gd name="adj" fmla="val 10000"/>
-          </a:avLst>
+        <a:prstGeom prst="rect">
+          <a:avLst/>
         </a:prstGeom>
         <a:solidFill>
-          <a:schemeClr val="accent1">
+          <a:schemeClr val="accent2">
+            <a:tint val="40000"/>
+            <a:alpha val="90000"/>
             <a:hueOff val="0"/>
             <a:satOff val="0"/>
             <a:lumOff val="0"/>
@@ -1313,7 +1238,94 @@
         </a:solidFill>
         <a:ln w="19050" cap="flat" cmpd="sng" algn="ctr">
           <a:solidFill>
-            <a:schemeClr val="lt1">
+            <a:schemeClr val="accent2">
+              <a:tint val="40000"/>
+              <a:alpha val="90000"/>
+              <a:hueOff val="0"/>
+              <a:satOff val="0"/>
+              <a:lumOff val="0"/>
+              <a:alphaOff val="0"/>
+            </a:schemeClr>
+          </a:solidFill>
+          <a:prstDash val="solid"/>
+          <a:miter lim="800000"/>
+        </a:ln>
+        <a:effectLst/>
+      </dsp:spPr>
+      <dsp:style>
+        <a:lnRef idx="2">
+          <a:scrgbClr r="0" g="0" b="0"/>
+        </a:lnRef>
+        <a:fillRef idx="1">
+          <a:scrgbClr r="0" g="0" b="0"/>
+        </a:fillRef>
+        <a:effectRef idx="0">
+          <a:scrgbClr r="0" g="0" b="0"/>
+        </a:effectRef>
+        <a:fontRef idx="minor"/>
+      </dsp:style>
+      <dsp:txBody>
+        <a:bodyPr spcFirstLastPara="0" vert="horz" wrap="square" lIns="266243" tIns="330200" rIns="266243" bIns="330200" numCol="1" spcCol="1270" anchor="t" anchorCtr="0">
+          <a:noAutofit/>
+        </a:bodyPr>
+        <a:lstStyle/>
+        <a:p>
+          <a:pPr marL="0" lvl="0" indent="0" algn="l" defTabSz="844550">
+            <a:lnSpc>
+              <a:spcPct val="90000"/>
+            </a:lnSpc>
+            <a:spcBef>
+              <a:spcPct val="0"/>
+            </a:spcBef>
+            <a:spcAft>
+              <a:spcPct val="35000"/>
+            </a:spcAft>
+            <a:buNone/>
+          </a:pPr>
+          <a:r>
+            <a:rPr lang="ja-JP" sz="1900" kern="1200"/>
+            <a:t>・</a:t>
+          </a:r>
+          <a:r>
+            <a:rPr lang="en-US" sz="1900" kern="1200"/>
+            <a:t>TikTok</a:t>
+          </a:r>
+          <a:r>
+            <a:rPr lang="ja-JP" sz="1900" kern="1200"/>
+            <a:t>のような形でラーメンの動画が見れる</a:t>
+          </a:r>
+          <a:endParaRPr lang="en-US" sz="1900" kern="1200"/>
+        </a:p>
+      </dsp:txBody>
+      <dsp:txXfrm>
+        <a:off x="0" y="1593265"/>
+        <a:ext cx="3414946" cy="2515683"/>
+      </dsp:txXfrm>
+    </dsp:sp>
+    <dsp:sp modelId="{8C7531EE-F728-4B8C-83ED-2350449D62C9}">
+      <dsp:nvSpPr>
+        <dsp:cNvPr id="0" name=""/>
+        <dsp:cNvSpPr/>
+      </dsp:nvSpPr>
+      <dsp:spPr>
+        <a:xfrm>
+          <a:off x="1078552" y="419280"/>
+          <a:ext cx="1257841" cy="1257841"/>
+        </a:xfrm>
+        <a:prstGeom prst="ellipse">
+          <a:avLst/>
+        </a:prstGeom>
+        <a:solidFill>
+          <a:schemeClr val="accent2">
+            <a:hueOff val="0"/>
+            <a:satOff val="0"/>
+            <a:lumOff val="0"/>
+            <a:alphaOff val="0"/>
+          </a:schemeClr>
+        </a:solidFill>
+        <a:ln w="19050" cap="flat" cmpd="sng" algn="ctr">
+          <a:solidFill>
+            <a:schemeClr val="accent2">
               <a:hueOff val="0"/>
               <a:satOff val="0"/>
               <a:lumOff val="0"/>
@@ -1339,64 +1351,13 @@
           <a:schemeClr val="lt1"/>
         </a:fontRef>
       </dsp:style>
-    </dsp:sp>
-    <dsp:sp modelId="{D1DE3A7B-FB12-4445-9A39-77E32712FBEB}">
-      <dsp:nvSpPr>
-        <dsp:cNvPr id="0" name=""/>
-        <dsp:cNvSpPr/>
-      </dsp:nvSpPr>
-      <dsp:spPr>
-        <a:xfrm>
-          <a:off x="328612" y="1393352"/>
-          <a:ext cx="2957512" cy="1878020"/>
-        </a:xfrm>
-        <a:prstGeom prst="roundRect">
-          <a:avLst>
-            <a:gd name="adj" fmla="val 10000"/>
-          </a:avLst>
-        </a:prstGeom>
-        <a:solidFill>
-          <a:schemeClr val="lt1">
-            <a:alpha val="90000"/>
-            <a:hueOff val="0"/>
-            <a:satOff val="0"/>
-            <a:lumOff val="0"/>
-            <a:alphaOff val="0"/>
-          </a:schemeClr>
-        </a:solidFill>
-        <a:ln w="19050" cap="flat" cmpd="sng" algn="ctr">
-          <a:solidFill>
-            <a:schemeClr val="accent1">
-              <a:hueOff val="0"/>
-              <a:satOff val="0"/>
-              <a:lumOff val="0"/>
-              <a:alphaOff val="0"/>
-            </a:schemeClr>
-          </a:solidFill>
-          <a:prstDash val="solid"/>
-          <a:miter lim="800000"/>
-        </a:ln>
-        <a:effectLst/>
-      </dsp:spPr>
-      <dsp:style>
-        <a:lnRef idx="2">
-          <a:scrgbClr r="0" g="0" b="0"/>
-        </a:lnRef>
-        <a:fillRef idx="1">
-          <a:scrgbClr r="0" g="0" b="0"/>
-        </a:fillRef>
-        <a:effectRef idx="0">
-          <a:scrgbClr r="0" g="0" b="0"/>
-        </a:effectRef>
-        <a:fontRef idx="minor"/>
-      </dsp:style>
       <dsp:txBody>
-        <a:bodyPr spcFirstLastPara="0" vert="horz" wrap="square" lIns="64770" tIns="64770" rIns="64770" bIns="64770" numCol="1" spcCol="1270" anchor="ctr" anchorCtr="0">
+        <a:bodyPr spcFirstLastPara="0" vert="horz" wrap="square" lIns="98066" tIns="12700" rIns="98066" bIns="12700" numCol="1" spcCol="1270" anchor="ctr" anchorCtr="0">
           <a:noAutofit/>
         </a:bodyPr>
         <a:lstStyle/>
         <a:p>
-          <a:pPr marL="0" lvl="0" indent="0" algn="ctr" defTabSz="755650">
+          <a:pPr marL="0" lvl="0" indent="0" algn="ctr" defTabSz="1911350">
             <a:lnSpc>
               <a:spcPct val="90000"/>
             </a:lnSpc>
@@ -1409,54 +1370,43 @@
             <a:buNone/>
           </a:pPr>
           <a:r>
-            <a:rPr lang="ja-JP" sz="1700" kern="1200"/>
-            <a:t>・</a:t>
+            <a:rPr lang="en-US" sz="4300" kern="1200"/>
+            <a:t>1</a:t>
           </a:r>
-          <a:r>
-            <a:rPr lang="en-US" sz="1700" kern="1200"/>
-            <a:t>TikTok</a:t>
-          </a:r>
-          <a:r>
-            <a:rPr lang="ja-JP" sz="1700" kern="1200"/>
-            <a:t>のような形でラーメンの動画が見れる</a:t>
-          </a:r>
-          <a:endParaRPr lang="en-US" sz="1700" kern="1200"/>
         </a:p>
       </dsp:txBody>
       <dsp:txXfrm>
-        <a:off x="383617" y="1448357"/>
-        <a:ext cx="2847502" cy="1768010"/>
+        <a:off x="1262759" y="603487"/>
+        <a:ext cx="889427" cy="889427"/>
       </dsp:txXfrm>
     </dsp:sp>
-    <dsp:sp modelId="{16134A9E-D189-41A3-8413-E86E2EE09E10}">
+    <dsp:sp modelId="{91FEDD44-94AA-4A11-889D-324C4FC329EB}">
       <dsp:nvSpPr>
         <dsp:cNvPr id="0" name=""/>
         <dsp:cNvSpPr/>
       </dsp:nvSpPr>
       <dsp:spPr>
         <a:xfrm>
-          <a:off x="3614737" y="1081170"/>
-          <a:ext cx="2957512" cy="1878020"/>
+          <a:off x="0" y="4192733"/>
+          <a:ext cx="3414946" cy="72"/>
         </a:xfrm>
-        <a:prstGeom prst="roundRect">
-          <a:avLst>
-            <a:gd name="adj" fmla="val 10000"/>
-          </a:avLst>
+        <a:prstGeom prst="rect">
+          <a:avLst/>
         </a:prstGeom>
         <a:solidFill>
-          <a:schemeClr val="accent1">
-            <a:hueOff val="0"/>
-            <a:satOff val="0"/>
-            <a:lumOff val="0"/>
+          <a:schemeClr val="accent2">
+            <a:hueOff val="1288723"/>
+            <a:satOff val="-3699"/>
+            <a:lumOff val="-5922"/>
             <a:alphaOff val="0"/>
           </a:schemeClr>
         </a:solidFill>
         <a:ln w="19050" cap="flat" cmpd="sng" algn="ctr">
           <a:solidFill>
-            <a:schemeClr val="lt1">
-              <a:hueOff val="0"/>
-              <a:satOff val="0"/>
-              <a:lumOff val="0"/>
+            <a:schemeClr val="accent2">
+              <a:hueOff val="1288723"/>
+              <a:satOff val="-3699"/>
+              <a:lumOff val="-5922"/>
               <a:alphaOff val="0"/>
             </a:schemeClr>
           </a:solidFill>
@@ -1480,36 +1430,37 @@
         </a:fontRef>
       </dsp:style>
     </dsp:sp>
-    <dsp:sp modelId="{3CBFA09C-4443-4984-B193-29309A03AFB7}">
+    <dsp:sp modelId="{D03C2E00-B61F-4E3D-8516-FA1A1744EEB3}">
       <dsp:nvSpPr>
         <dsp:cNvPr id="0" name=""/>
         <dsp:cNvSpPr/>
       </dsp:nvSpPr>
       <dsp:spPr>
         <a:xfrm>
-          <a:off x="3943350" y="1393352"/>
-          <a:ext cx="2957512" cy="1878020"/>
+          <a:off x="3756441" y="0"/>
+          <a:ext cx="3414946" cy="4192805"/>
         </a:xfrm>
-        <a:prstGeom prst="roundRect">
-          <a:avLst>
-            <a:gd name="adj" fmla="val 10000"/>
-          </a:avLst>
+        <a:prstGeom prst="rect">
+          <a:avLst/>
         </a:prstGeom>
         <a:solidFill>
-          <a:schemeClr val="lt1">
+          <a:schemeClr val="accent2">
+            <a:tint val="40000"/>
             <a:alpha val="90000"/>
-            <a:hueOff val="0"/>
-            <a:satOff val="0"/>
-            <a:lumOff val="0"/>
+            <a:hueOff val="3367359"/>
+            <a:satOff val="-31116"/>
+            <a:lumOff val="-3508"/>
             <a:alphaOff val="0"/>
           </a:schemeClr>
         </a:solidFill>
         <a:ln w="19050" cap="flat" cmpd="sng" algn="ctr">
           <a:solidFill>
-            <a:schemeClr val="accent1">
-              <a:hueOff val="0"/>
-              <a:satOff val="0"/>
-              <a:lumOff val="0"/>
+            <a:schemeClr val="accent2">
+              <a:tint val="40000"/>
+              <a:alpha val="90000"/>
+              <a:hueOff val="3367359"/>
+              <a:satOff val="-31116"/>
+              <a:lumOff val="-3508"/>
               <a:alphaOff val="0"/>
             </a:schemeClr>
           </a:solidFill>
@@ -1531,12 +1482,12 @@
         <a:fontRef idx="minor"/>
       </dsp:style>
       <dsp:txBody>
-        <a:bodyPr spcFirstLastPara="0" vert="horz" wrap="square" lIns="64770" tIns="64770" rIns="64770" bIns="64770" numCol="1" spcCol="1270" anchor="ctr" anchorCtr="0">
+        <a:bodyPr spcFirstLastPara="0" vert="horz" wrap="square" lIns="266243" tIns="330200" rIns="266243" bIns="330200" numCol="1" spcCol="1270" anchor="t" anchorCtr="0">
           <a:noAutofit/>
         </a:bodyPr>
         <a:lstStyle/>
         <a:p>
-          <a:pPr marL="0" lvl="0" indent="0" algn="ctr" defTabSz="755650">
+          <a:pPr marL="0" lvl="0" indent="0" algn="l" defTabSz="844550">
             <a:lnSpc>
               <a:spcPct val="90000"/>
             </a:lnSpc>
@@ -1549,46 +1500,122 @@
             <a:buNone/>
           </a:pPr>
           <a:r>
-            <a:rPr lang="ja-JP" sz="1700" kern="1200"/>
+            <a:rPr lang="ja-JP" sz="1900" kern="1200"/>
             <a:t>・自分のいる場所から近くのラーメン屋のみを探せる（そのラーメン屋の評価や動画を詳細に見れる）</a:t>
           </a:r>
-          <a:endParaRPr lang="en-US" sz="1700" kern="1200"/>
+          <a:endParaRPr lang="en-US" sz="1900" kern="1200"/>
         </a:p>
       </dsp:txBody>
       <dsp:txXfrm>
-        <a:off x="3998355" y="1448357"/>
-        <a:ext cx="2847502" cy="1768010"/>
+        <a:off x="3756441" y="1593265"/>
+        <a:ext cx="3414946" cy="2515683"/>
       </dsp:txXfrm>
     </dsp:sp>
-    <dsp:sp modelId="{9E219BCF-B998-499C-ADFD-EF293F1B45C4}">
+    <dsp:sp modelId="{CF764E69-3ADB-4752-A19A-03CC611B11C4}">
       <dsp:nvSpPr>
         <dsp:cNvPr id="0" name=""/>
         <dsp:cNvSpPr/>
       </dsp:nvSpPr>
       <dsp:spPr>
         <a:xfrm>
-          <a:off x="7229475" y="1081170"/>
-          <a:ext cx="2957512" cy="1878020"/>
+          <a:off x="4834993" y="419280"/>
+          <a:ext cx="1257841" cy="1257841"/>
         </a:xfrm>
-        <a:prstGeom prst="roundRect">
-          <a:avLst>
-            <a:gd name="adj" fmla="val 10000"/>
-          </a:avLst>
+        <a:prstGeom prst="ellipse">
+          <a:avLst/>
         </a:prstGeom>
         <a:solidFill>
-          <a:schemeClr val="accent1">
-            <a:hueOff val="0"/>
-            <a:satOff val="0"/>
-            <a:lumOff val="0"/>
+          <a:schemeClr val="accent2">
+            <a:hueOff val="2577445"/>
+            <a:satOff val="-7397"/>
+            <a:lumOff val="-11844"/>
             <a:alphaOff val="0"/>
           </a:schemeClr>
         </a:solidFill>
         <a:ln w="19050" cap="flat" cmpd="sng" algn="ctr">
           <a:solidFill>
-            <a:schemeClr val="lt1">
-              <a:hueOff val="0"/>
-              <a:satOff val="0"/>
-              <a:lumOff val="0"/>
+            <a:schemeClr val="accent2">
+              <a:hueOff val="2577445"/>
+              <a:satOff val="-7397"/>
+              <a:lumOff val="-11844"/>
+              <a:alphaOff val="0"/>
+            </a:schemeClr>
+          </a:solidFill>
+          <a:prstDash val="solid"/>
+          <a:miter lim="800000"/>
+        </a:ln>
+        <a:effectLst/>
+      </dsp:spPr>
+      <dsp:style>
+        <a:lnRef idx="2">
+          <a:scrgbClr r="0" g="0" b="0"/>
+        </a:lnRef>
+        <a:fillRef idx="1">
+          <a:scrgbClr r="0" g="0" b="0"/>
+        </a:fillRef>
+        <a:effectRef idx="0">
+          <a:scrgbClr r="0" g="0" b="0"/>
+        </a:effectRef>
+        <a:fontRef idx="minor">
+          <a:schemeClr val="lt1"/>
+        </a:fontRef>
+      </dsp:style>
+      <dsp:txBody>
+        <a:bodyPr spcFirstLastPara="0" vert="horz" wrap="square" lIns="98066" tIns="12700" rIns="98066" bIns="12700" numCol="1" spcCol="1270" anchor="ctr" anchorCtr="0">
+          <a:noAutofit/>
+        </a:bodyPr>
+        <a:lstStyle/>
+        <a:p>
+          <a:pPr marL="0" lvl="0" indent="0" algn="ctr" defTabSz="1911350">
+            <a:lnSpc>
+              <a:spcPct val="90000"/>
+            </a:lnSpc>
+            <a:spcBef>
+              <a:spcPct val="0"/>
+            </a:spcBef>
+            <a:spcAft>
+              <a:spcPct val="35000"/>
+            </a:spcAft>
+            <a:buNone/>
+          </a:pPr>
+          <a:r>
+            <a:rPr lang="en-US" sz="4300" kern="1200"/>
+            <a:t>2</a:t>
+          </a:r>
+        </a:p>
+      </dsp:txBody>
+      <dsp:txXfrm>
+        <a:off x="5019200" y="603487"/>
+        <a:ext cx="889427" cy="889427"/>
+      </dsp:txXfrm>
+    </dsp:sp>
+    <dsp:sp modelId="{E64E9ACC-55C8-4BAE-A867-C67B4EC1C314}">
+      <dsp:nvSpPr>
+        <dsp:cNvPr id="0" name=""/>
+        <dsp:cNvSpPr/>
+      </dsp:nvSpPr>
+      <dsp:spPr>
+        <a:xfrm>
+          <a:off x="3756441" y="4192733"/>
+          <a:ext cx="3414946" cy="72"/>
+        </a:xfrm>
+        <a:prstGeom prst="rect">
+          <a:avLst/>
+        </a:prstGeom>
+        <a:solidFill>
+          <a:schemeClr val="accent2">
+            <a:hueOff val="3866169"/>
+            <a:satOff val="-11096"/>
+            <a:lumOff val="-17765"/>
+            <a:alphaOff val="0"/>
+          </a:schemeClr>
+        </a:solidFill>
+        <a:ln w="19050" cap="flat" cmpd="sng" algn="ctr">
+          <a:solidFill>
+            <a:schemeClr val="accent2">
+              <a:hueOff val="3866169"/>
+              <a:satOff val="-11096"/>
+              <a:lumOff val="-17765"/>
               <a:alphaOff val="0"/>
             </a:schemeClr>
           </a:solidFill>
@@ -1612,36 +1639,37 @@
         </a:fontRef>
       </dsp:style>
     </dsp:sp>
-    <dsp:sp modelId="{7A381A10-7892-4B7D-AC8A-7FC715648F71}">
+    <dsp:sp modelId="{85D6F34E-9BB6-4495-8D7A-6D5C05B7D94B}">
       <dsp:nvSpPr>
         <dsp:cNvPr id="0" name=""/>
         <dsp:cNvSpPr/>
       </dsp:nvSpPr>
       <dsp:spPr>
         <a:xfrm>
-          <a:off x="7558087" y="1393352"/>
-          <a:ext cx="2957512" cy="1878020"/>
+          <a:off x="7512882" y="0"/>
+          <a:ext cx="3414946" cy="4192805"/>
         </a:xfrm>
-        <a:prstGeom prst="roundRect">
-          <a:avLst>
-            <a:gd name="adj" fmla="val 10000"/>
-          </a:avLst>
+        <a:prstGeom prst="rect">
+          <a:avLst/>
         </a:prstGeom>
         <a:solidFill>
-          <a:schemeClr val="lt1">
+          <a:schemeClr val="accent2">
+            <a:tint val="40000"/>
             <a:alpha val="90000"/>
-            <a:hueOff val="0"/>
-            <a:satOff val="0"/>
-            <a:lumOff val="0"/>
+            <a:hueOff val="6734718"/>
+            <a:satOff val="-62232"/>
+            <a:lumOff val="-7015"/>
             <a:alphaOff val="0"/>
           </a:schemeClr>
         </a:solidFill>
         <a:ln w="19050" cap="flat" cmpd="sng" algn="ctr">
           <a:solidFill>
-            <a:schemeClr val="accent1">
-              <a:hueOff val="0"/>
-              <a:satOff val="0"/>
-              <a:lumOff val="0"/>
+            <a:schemeClr val="accent2">
+              <a:tint val="40000"/>
+              <a:alpha val="90000"/>
+              <a:hueOff val="6734718"/>
+              <a:satOff val="-62232"/>
+              <a:lumOff val="-7015"/>
               <a:alphaOff val="0"/>
             </a:schemeClr>
           </a:solidFill>
@@ -1663,12 +1691,12 @@
         <a:fontRef idx="minor"/>
       </dsp:style>
       <dsp:txBody>
-        <a:bodyPr spcFirstLastPara="0" vert="horz" wrap="square" lIns="64770" tIns="64770" rIns="64770" bIns="64770" numCol="1" spcCol="1270" anchor="ctr" anchorCtr="0">
+        <a:bodyPr spcFirstLastPara="0" vert="horz" wrap="square" lIns="266243" tIns="330200" rIns="266243" bIns="330200" numCol="1" spcCol="1270" anchor="t" anchorCtr="0">
           <a:noAutofit/>
         </a:bodyPr>
         <a:lstStyle/>
         <a:p>
-          <a:pPr marL="0" lvl="0" indent="0" algn="ctr" defTabSz="755650">
+          <a:pPr marL="0" lvl="0" indent="0" algn="l" defTabSz="844550">
             <a:lnSpc>
               <a:spcPct val="90000"/>
             </a:lnSpc>
@@ -1681,27 +1709,155 @@
             <a:buNone/>
           </a:pPr>
           <a:r>
-            <a:rPr lang="ja-JP" sz="1700" kern="1200"/>
+            <a:rPr lang="ja-JP" sz="1900" kern="1200"/>
             <a:t>・ラーメンや独自で行っている通販やお持ち帰り商品を購入できる</a:t>
           </a:r>
-          <a:endParaRPr lang="en-US" sz="1700" kern="1200"/>
+          <a:endParaRPr lang="en-US" sz="1900" kern="1200"/>
         </a:p>
       </dsp:txBody>
       <dsp:txXfrm>
-        <a:off x="7613092" y="1448357"/>
-        <a:ext cx="2847502" cy="1768010"/>
+        <a:off x="7512882" y="1593265"/>
+        <a:ext cx="3414946" cy="2515683"/>
       </dsp:txXfrm>
+    </dsp:sp>
+    <dsp:sp modelId="{F89A172E-48AB-43B8-BDB0-9D76AB9BC4F8}">
+      <dsp:nvSpPr>
+        <dsp:cNvPr id="0" name=""/>
+        <dsp:cNvSpPr/>
+      </dsp:nvSpPr>
+      <dsp:spPr>
+        <a:xfrm>
+          <a:off x="8591434" y="419280"/>
+          <a:ext cx="1257841" cy="1257841"/>
+        </a:xfrm>
+        <a:prstGeom prst="ellipse">
+          <a:avLst/>
+        </a:prstGeom>
+        <a:solidFill>
+          <a:schemeClr val="accent2">
+            <a:hueOff val="5154891"/>
+            <a:satOff val="-14794"/>
+            <a:lumOff val="-23687"/>
+            <a:alphaOff val="0"/>
+          </a:schemeClr>
+        </a:solidFill>
+        <a:ln w="19050" cap="flat" cmpd="sng" algn="ctr">
+          <a:solidFill>
+            <a:schemeClr val="accent2">
+              <a:hueOff val="5154891"/>
+              <a:satOff val="-14794"/>
+              <a:lumOff val="-23687"/>
+              <a:alphaOff val="0"/>
+            </a:schemeClr>
+          </a:solidFill>
+          <a:prstDash val="solid"/>
+          <a:miter lim="800000"/>
+        </a:ln>
+        <a:effectLst/>
+      </dsp:spPr>
+      <dsp:style>
+        <a:lnRef idx="2">
+          <a:scrgbClr r="0" g="0" b="0"/>
+        </a:lnRef>
+        <a:fillRef idx="1">
+          <a:scrgbClr r="0" g="0" b="0"/>
+        </a:fillRef>
+        <a:effectRef idx="0">
+          <a:scrgbClr r="0" g="0" b="0"/>
+        </a:effectRef>
+        <a:fontRef idx="minor">
+          <a:schemeClr val="lt1"/>
+        </a:fontRef>
+      </dsp:style>
+      <dsp:txBody>
+        <a:bodyPr spcFirstLastPara="0" vert="horz" wrap="square" lIns="98066" tIns="12700" rIns="98066" bIns="12700" numCol="1" spcCol="1270" anchor="ctr" anchorCtr="0">
+          <a:noAutofit/>
+        </a:bodyPr>
+        <a:lstStyle/>
+        <a:p>
+          <a:pPr marL="0" lvl="0" indent="0" algn="ctr" defTabSz="1911350">
+            <a:lnSpc>
+              <a:spcPct val="90000"/>
+            </a:lnSpc>
+            <a:spcBef>
+              <a:spcPct val="0"/>
+            </a:spcBef>
+            <a:spcAft>
+              <a:spcPct val="35000"/>
+            </a:spcAft>
+            <a:buNone/>
+          </a:pPr>
+          <a:r>
+            <a:rPr lang="en-US" sz="4300" kern="1200"/>
+            <a:t>3</a:t>
+          </a:r>
+        </a:p>
+      </dsp:txBody>
+      <dsp:txXfrm>
+        <a:off x="8775641" y="603487"/>
+        <a:ext cx="889427" cy="889427"/>
+      </dsp:txXfrm>
+    </dsp:sp>
+    <dsp:sp modelId="{51081732-D5A1-425F-9056-4D0984230A81}">
+      <dsp:nvSpPr>
+        <dsp:cNvPr id="0" name=""/>
+        <dsp:cNvSpPr/>
+      </dsp:nvSpPr>
+      <dsp:spPr>
+        <a:xfrm>
+          <a:off x="7512882" y="4192733"/>
+          <a:ext cx="3414946" cy="72"/>
+        </a:xfrm>
+        <a:prstGeom prst="rect">
+          <a:avLst/>
+        </a:prstGeom>
+        <a:solidFill>
+          <a:schemeClr val="accent2">
+            <a:hueOff val="6443614"/>
+            <a:satOff val="-18493"/>
+            <a:lumOff val="-29609"/>
+            <a:alphaOff val="0"/>
+          </a:schemeClr>
+        </a:solidFill>
+        <a:ln w="19050" cap="flat" cmpd="sng" algn="ctr">
+          <a:solidFill>
+            <a:schemeClr val="accent2">
+              <a:hueOff val="6443614"/>
+              <a:satOff val="-18493"/>
+              <a:lumOff val="-29609"/>
+              <a:alphaOff val="0"/>
+            </a:schemeClr>
+          </a:solidFill>
+          <a:prstDash val="solid"/>
+          <a:miter lim="800000"/>
+        </a:ln>
+        <a:effectLst/>
+      </dsp:spPr>
+      <dsp:style>
+        <a:lnRef idx="2">
+          <a:scrgbClr r="0" g="0" b="0"/>
+        </a:lnRef>
+        <a:fillRef idx="1">
+          <a:scrgbClr r="0" g="0" b="0"/>
+        </a:fillRef>
+        <a:effectRef idx="0">
+          <a:scrgbClr r="0" g="0" b="0"/>
+        </a:effectRef>
+        <a:fontRef idx="minor">
+          <a:schemeClr val="lt1"/>
+        </a:fontRef>
+      </dsp:style>
     </dsp:sp>
   </dsp:spTree>
 </dsp:drawing>
 </file>
 
 <file path=ppt/diagrams/layout1.xml><?xml version="1.0" encoding="utf-8"?>
-<dgm:layoutDef xmlns:dgm="http://schemas.openxmlformats.org/drawingml/2006/diagram" xmlns:a="http://schemas.openxmlformats.org/drawingml/2006/main" uniqueId="urn:microsoft.com/office/officeart/2005/8/layout/hierarchy1">
-  <dgm:title val=""/>
-  <dgm:desc val=""/>
+<dgm:layoutDef xmlns:dgm="http://schemas.openxmlformats.org/drawingml/2006/diagram" xmlns:a="http://schemas.openxmlformats.org/drawingml/2006/main" uniqueId="urn:microsoft.com/office/officeart/2016/7/layout/BasicLinearProcessNumbered">
+  <dgm:title val="Basic Linear Process Numbered"/>
+  <dgm:desc val="Used to show a progression; a timeline; sequential steps in a task, process, or workflow; or to emphasize movement or direction. Automatic numbers have been introduced to show the steps of the process which appears in a circle. Level 1 and Level 2 text appear in a rectangle."/>
   <dgm:catLst>
-    <dgm:cat type="hierarchy" pri="2000"/>
+    <dgm:cat type="process" pri="500"/>
   </dgm:catLst>
   <dgm:sampData>
     <dgm:dataModel>
@@ -1710,13 +1866,13 @@
         <dgm:pt modelId="1">
           <dgm:prSet phldr="1"/>
         </dgm:pt>
+        <dgm:pt modelId="11">
+          <dgm:prSet phldr="1"/>
+        </dgm:pt>
         <dgm:pt modelId="2">
           <dgm:prSet phldr="1"/>
         </dgm:pt>
         <dgm:pt modelId="21">
-          <dgm:prSet phldr="1"/>
-        </dgm:pt>
-        <dgm:pt modelId="22">
           <dgm:prSet phldr="1"/>
         </dgm:pt>
         <dgm:pt modelId="3">
@@ -1725,13 +1881,49 @@
         <dgm:pt modelId="31">
           <dgm:prSet phldr="1"/>
         </dgm:pt>
+        <dgm:pt modelId="101" type="sibTrans" cxnId="4">
+          <dgm:prSet phldrT="1"/>
+          <dgm:t>
+            <a:bodyPr/>
+            <a:lstStyle/>
+            <a:p>
+              <a:r>
+                <a:t>1</a:t>
+              </a:r>
+            </a:p>
+          </dgm:t>
+        </dgm:pt>
+        <dgm:pt modelId="201" type="sibTrans" cxnId="5">
+          <dgm:prSet phldrT="2"/>
+          <dgm:t>
+            <a:bodyPr/>
+            <a:lstStyle/>
+            <a:p>
+              <a:r>
+                <a:t>2</a:t>
+              </a:r>
+            </a:p>
+          </dgm:t>
+        </dgm:pt>
+        <dgm:pt modelId="301" type="sibTrans" cxnId="6">
+          <dgm:prSet phldrT="3"/>
+          <dgm:t>
+            <a:bodyPr/>
+            <a:lstStyle/>
+            <a:p>
+              <a:r>
+                <a:t>3</a:t>
+              </a:r>
+            </a:p>
+          </dgm:t>
+        </dgm:pt>
       </dgm:ptLst>
       <dgm:cxnLst>
-        <dgm:cxn modelId="4" srcId="0" destId="1" srcOrd="0" destOrd="0"/>
-        <dgm:cxn modelId="5" srcId="1" destId="2" srcOrd="0" destOrd="0"/>
-        <dgm:cxn modelId="6" srcId="1" destId="3" srcOrd="1" destOrd="0"/>
+        <dgm:cxn modelId="4" srcId="0" destId="1" srcOrd="0" destOrd="0" sibTransId="101"/>
+        <dgm:cxn modelId="5" srcId="0" destId="2" srcOrd="1" destOrd="0" sibTransId="201"/>
+        <dgm:cxn modelId="6" srcId="0" destId="3" srcOrd="2" destOrd="0" sibTransId="301"/>
+        <dgm:cxn modelId="13" srcId="1" destId="11" srcOrd="0" destOrd="0"/>
         <dgm:cxn modelId="23" srcId="2" destId="21" srcOrd="0" destOrd="0"/>
-        <dgm:cxn modelId="24" srcId="2" destId="22" srcOrd="1" destOrd="0"/>
         <dgm:cxn modelId="33" srcId="3" destId="31" srcOrd="0" destOrd="0"/>
       </dgm:cxnLst>
       <dgm:bg/>
@@ -1744,12 +1936,14 @@
         <dgm:pt modelId="0" type="doc"/>
         <dgm:pt modelId="1"/>
         <dgm:pt modelId="11"/>
-        <dgm:pt modelId="12"/>
+        <dgm:pt modelId="2"/>
+        <dgm:pt modelId="21"/>
       </dgm:ptLst>
       <dgm:cxnLst>
-        <dgm:cxn modelId="2" srcId="0" destId="1" srcOrd="0" destOrd="0"/>
+        <dgm:cxn modelId="4" srcId="0" destId="1" srcOrd="0" destOrd="0"/>
+        <dgm:cxn modelId="5" srcId="0" destId="2" srcOrd="1" destOrd="0"/>
         <dgm:cxn modelId="13" srcId="1" destId="11" srcOrd="0" destOrd="0"/>
-        <dgm:cxn modelId="14" srcId="1" destId="12" srcOrd="1" destOrd="0"/>
+        <dgm:cxn modelId="23" srcId="2" destId="21" srcOrd="0" destOrd="0"/>
       </dgm:cxnLst>
       <dgm:bg/>
       <dgm:whole/>
@@ -1760,502 +1954,178 @@
       <dgm:ptLst>
         <dgm:pt modelId="0" type="doc"/>
         <dgm:pt modelId="1"/>
+        <dgm:pt modelId="11"/>
         <dgm:pt modelId="2"/>
         <dgm:pt modelId="21"/>
-        <dgm:pt modelId="211"/>
         <dgm:pt modelId="3"/>
         <dgm:pt modelId="31"/>
-        <dgm:pt modelId="311"/>
+        <dgm:pt modelId="4"/>
+        <dgm:pt modelId="41"/>
       </dgm:ptLst>
       <dgm:cxnLst>
-        <dgm:cxn modelId="4" srcId="0" destId="1" srcOrd="0" destOrd="0"/>
-        <dgm:cxn modelId="5" srcId="1" destId="2" srcOrd="0" destOrd="0"/>
-        <dgm:cxn modelId="6" srcId="1" destId="3" srcOrd="1" destOrd="0"/>
+        <dgm:cxn modelId="5" srcId="0" destId="1" srcOrd="0" destOrd="0"/>
+        <dgm:cxn modelId="6" srcId="0" destId="2" srcOrd="1" destOrd="0"/>
+        <dgm:cxn modelId="7" srcId="0" destId="3" srcOrd="2" destOrd="0"/>
+        <dgm:cxn modelId="8" srcId="0" destId="4" srcOrd="3" destOrd="0"/>
+        <dgm:cxn modelId="13" srcId="1" destId="11" srcOrd="0" destOrd="0"/>
         <dgm:cxn modelId="23" srcId="2" destId="21" srcOrd="0" destOrd="0"/>
-        <dgm:cxn modelId="24" srcId="21" destId="211" srcOrd="0" destOrd="0"/>
         <dgm:cxn modelId="33" srcId="3" destId="31" srcOrd="0" destOrd="0"/>
-        <dgm:cxn modelId="34" srcId="31" destId="311" srcOrd="0" destOrd="0"/>
+        <dgm:cxn modelId="43" srcId="4" destId="41" srcOrd="0" destOrd="0"/>
       </dgm:cxnLst>
       <dgm:bg/>
       <dgm:whole/>
     </dgm:dataModel>
   </dgm:clrData>
-  <dgm:layoutNode name="hierChild1">
+  <dgm:layoutNode name="Name0">
     <dgm:varLst>
-      <dgm:chPref val="1"/>
-      <dgm:dir/>
-      <dgm:animOne val="branch"/>
       <dgm:animLvl val="lvl"/>
-      <dgm:resizeHandles/>
+      <dgm:resizeHandles val="exact"/>
     </dgm:varLst>
-    <dgm:choose name="Name0">
-      <dgm:if name="Name1" func="var" arg="dir" op="equ" val="norm">
-        <dgm:alg type="hierChild">
-          <dgm:param type="linDir" val="fromL"/>
-        </dgm:alg>
-      </dgm:if>
-      <dgm:else name="Name2">
-        <dgm:alg type="hierChild">
-          <dgm:param type="linDir" val="fromR"/>
-        </dgm:alg>
-      </dgm:else>
-    </dgm:choose>
+    <dgm:alg type="lin">
+      <dgm:param type="linDir" val="fromL"/>
+      <dgm:param type="nodeVertAlign" val="t"/>
+    </dgm:alg>
     <dgm:shape xmlns:r="http://schemas.openxmlformats.org/officeDocument/2006/relationships" r:blip="">
       <dgm:adjLst/>
     </dgm:shape>
     <dgm:presOf/>
     <dgm:constrLst>
-      <dgm:constr type="primFontSz" for="des" ptType="node" op="equ" val="65"/>
-      <dgm:constr type="w" for="des" forName="composite" refType="w"/>
-      <dgm:constr type="h" for="des" forName="composite" refType="w" refFor="des" refForName="composite" fact="0.667"/>
-      <dgm:constr type="w" for="des" forName="composite2" refType="w" refFor="des" refForName="composite"/>
-      <dgm:constr type="h" for="des" forName="composite2" refType="h" refFor="des" refForName="composite"/>
-      <dgm:constr type="w" for="des" forName="composite3" refType="w" refFor="des" refForName="composite"/>
-      <dgm:constr type="h" for="des" forName="composite3" refType="h" refFor="des" refForName="composite"/>
-      <dgm:constr type="w" for="des" forName="composite4" refType="w" refFor="des" refForName="composite"/>
-      <dgm:constr type="h" for="des" forName="composite4" refType="h" refFor="des" refForName="composite"/>
-      <dgm:constr type="w" for="des" forName="composite5" refType="w" refFor="des" refForName="composite"/>
-      <dgm:constr type="h" for="des" forName="composite5" refType="h" refFor="des" refForName="composite"/>
-      <dgm:constr type="sibSp" refType="w" refFor="des" refForName="composite" fact="0.1"/>
-      <dgm:constr type="sibSp" for="des" forName="hierChild2" refType="sibSp"/>
-      <dgm:constr type="sibSp" for="des" forName="hierChild3" refType="sibSp"/>
-      <dgm:constr type="sibSp" for="des" forName="hierChild4" refType="sibSp"/>
-      <dgm:constr type="sibSp" for="des" forName="hierChild5" refType="sibSp"/>
-      <dgm:constr type="sibSp" for="des" forName="hierChild6" refType="sibSp"/>
-      <dgm:constr type="sp" for="des" forName="hierRoot1" refType="h" refFor="des" refForName="composite" fact="0.25"/>
-      <dgm:constr type="sp" for="des" forName="hierRoot2" refType="sp" refFor="des" refForName="hierRoot1"/>
-      <dgm:constr type="sp" for="des" forName="hierRoot3" refType="sp" refFor="des" refForName="hierRoot1"/>
-      <dgm:constr type="sp" for="des" forName="hierRoot4" refType="sp" refFor="des" refForName="hierRoot1"/>
-      <dgm:constr type="sp" for="des" forName="hierRoot5" refType="sp" refFor="des" refForName="hierRoot1"/>
+      <dgm:constr type="h" for="ch" forName="compositeNode" refType="h"/>
+      <dgm:constr type="w" for="ch" forName="compositeNode" refType="w"/>
+      <dgm:constr type="w" for="des" forName="simulatedConn" refType="w" refFor="ch" refForName="compositeNode" fact="0.15"/>
+      <dgm:constr type="h" for="des" forName="simulatedConn" refType="w" refFor="des" refForName="simulatedConn"/>
+      <dgm:constr type="h" for="des" forName="vSp1" refType="w" refFor="ch" refForName="compositeNode" fact="0.8"/>
+      <dgm:constr type="h" for="des" forName="vSp2" refType="w" refFor="ch" refForName="compositeNode" fact="0.07"/>
+      <dgm:constr type="w" for="ch" forName="vProcSp" refType="w" refFor="des" refForName="simulatedConn" op="equ"/>
+      <dgm:constr type="h" for="ch" forName="vProcSp" refType="h" refFor="ch" refForName="compositeNode" op="equ"/>
+      <dgm:constr type="w" for="ch" forName="sibTrans" refType="w" refFor="ch" refForName="compositeNode" fact="0.1"/>
+      <dgm:constr type="primFontSz" for="des" forName="sibTransNodeCircle" op="equ"/>
+      <dgm:constr type="primFontSz" for="des" forName="nodeText" op="equ"/>
+      <dgm:constr type="h" for="des" forName="sibTransNodeCircle" op="equ"/>
+      <dgm:constr type="w" for="des" forName="sibTransNodeCircle" op="equ"/>
     </dgm:constrLst>
-    <dgm:ruleLst/>
-    <dgm:forEach name="Name3" axis="ch">
-      <dgm:forEach name="Name4" axis="self" ptType="node">
-        <dgm:layoutNode name="hierRoot1">
-          <dgm:alg type="hierRoot"/>
+    <dgm:ruleLst>
+      <dgm:rule type="h" val="NaN" fact="1.2" max="NaN"/>
+    </dgm:ruleLst>
+    <dgm:forEach name="Name4" axis="ch" ptType="node">
+      <dgm:layoutNode name="compositeNode">
+        <dgm:varLst>
+          <dgm:bulletEnabled val="1"/>
+        </dgm:varLst>
+        <dgm:alg type="composite"/>
+        <dgm:constrLst>
+          <dgm:constr type="h" refType="w" op="lte" fact="1.4"/>
+          <dgm:constr type="w" for="ch" forName="bgRect" refType="w"/>
+          <dgm:constr type="h" for="ch" forName="bgRect" refType="h"/>
+          <dgm:constr type="t" for="ch" forName="bgRect"/>
+          <dgm:constr type="l" for="ch" forName="bgRect"/>
+          <dgm:constr type="h" for="ch" forName="sibTransNodeCircle" refType="h" refFor="ch" refForName="bgRect" fact="0.3"/>
+          <dgm:constr type="w" for="ch" forName="sibTransNodeCircle" refType="h" refFor="ch" refForName="sibTransNodeCircle"/>
+          <dgm:constr type="ctrX" for="ch" forName="sibTransNodeCircle" refType="w" fact="0.5"/>
+          <dgm:constr type="ctrY" for="ch" forName="sibTransNodeCircle" refType="h" fact="0.25"/>
+          <dgm:constr type="r" for="ch" forName="nodeText" refType="r" refFor="ch" refForName="bgRect"/>
+          <dgm:constr type="h" for="ch" forName="nodeText" refType="h" refFor="ch" refForName="bgRect" fact="0.6"/>
+          <dgm:constr type="t" for="ch" forName="nodeText" refType="h" refFor="ch" refForName="bgRect" fact="0.38"/>
+          <dgm:constr type="b" for="ch" forName="bottomLine" refType="b" refFor="ch" refForName="bgRect"/>
+          <dgm:constr type="w" for="ch" forName="bottomLine" refType="w" refFor="ch" refForName="bgRect"/>
+          <dgm:constr type="h" for="ch" forName="bottomLine" val="0.002"/>
+        </dgm:constrLst>
+        <dgm:ruleLst/>
+        <dgm:layoutNode name="bgRect" styleLbl="bgAccFollowNode1">
+          <dgm:alg type="sp"/>
+          <dgm:shape xmlns:r="http://schemas.openxmlformats.org/officeDocument/2006/relationships" type="rect" r:blip="">
+            <dgm:adjLst/>
+          </dgm:shape>
+          <dgm:presOf axis="self"/>
+          <dgm:constrLst/>
+          <dgm:ruleLst/>
+        </dgm:layoutNode>
+        <dgm:forEach name="Name19" axis="followSib" ptType="sibTrans" hideLastTrans="0" cnt="1">
+          <dgm:layoutNode name="sibTransNodeCircle" styleLbl="alignNode1">
+            <dgm:varLst>
+              <dgm:chMax val="0"/>
+              <dgm:bulletEnabled/>
+            </dgm:varLst>
+            <dgm:presOf axis="self" ptType="sibTrans"/>
+            <dgm:alg type="tx">
+              <dgm:param type="txAnchorVert" val="mid"/>
+              <dgm:param type="txAnchorHorzCh" val="ctr"/>
+            </dgm:alg>
+            <dgm:shape xmlns:r="http://schemas.openxmlformats.org/officeDocument/2006/relationships" type="ellipse" r:blip="">
+              <dgm:adjLst/>
+            </dgm:shape>
+            <dgm:constrLst>
+              <dgm:constr type="w" refType="h" op="lte"/>
+              <dgm:constr type="primFontSz" val="48"/>
+              <dgm:constr type="tMarg" val="1"/>
+              <dgm:constr type="lMarg" refType="w" fact="0.221"/>
+              <dgm:constr type="rMarg" refType="w" fact="0.221"/>
+              <dgm:constr type="bMarg" val="1"/>
+            </dgm:constrLst>
+            <dgm:ruleLst>
+              <dgm:rule type="primFontSz" val="14" fact="NaN" max="NaN"/>
+            </dgm:ruleLst>
+          </dgm:layoutNode>
+        </dgm:forEach>
+        <dgm:layoutNode name="bottomLine" styleLbl="alignNode1">
+          <dgm:varLst/>
+          <dgm:presOf/>
+          <dgm:alg type="sp"/>
+          <dgm:shape xmlns:r="http://schemas.openxmlformats.org/officeDocument/2006/relationships" type="rect" r:blip="">
+            <dgm:adjLst/>
+          </dgm:shape>
+          <dgm:constrLst/>
+          <dgm:ruleLst/>
+        </dgm:layoutNode>
+        <dgm:layoutNode name="nodeText" styleLbl="bgAccFollowNode1" moveWith="bgRect">
+          <dgm:varLst>
+            <dgm:bulletEnabled val="1"/>
+          </dgm:varLst>
+          <dgm:alg type="tx">
+            <dgm:param type="parTxLTRAlign" val="l"/>
+            <dgm:param type="parTxRTLAlign" val="r"/>
+            <dgm:param type="txAnchorVert" val="t"/>
+          </dgm:alg>
+          <dgm:shape xmlns:r="http://schemas.openxmlformats.org/officeDocument/2006/relationships" type="rect" r:blip="" zOrderOff="-1" hideGeom="1">
+            <dgm:adjLst/>
+          </dgm:shape>
+          <dgm:presOf axis="desOrSelf" ptType="node"/>
+          <dgm:constrLst>
+            <dgm:constr type="primFontSz" val="26"/>
+            <dgm:constr type="tMarg" val="26"/>
+            <dgm:constr type="lMarg" refType="w" fact="0.221"/>
+            <dgm:constr type="rMarg" refType="w" fact="0.221"/>
+            <dgm:constr type="bMarg" val="26"/>
+          </dgm:constrLst>
+          <dgm:ruleLst>
+            <dgm:rule type="primFontSz" val="11" fact="NaN" max="NaN"/>
+          </dgm:ruleLst>
+        </dgm:layoutNode>
+      </dgm:layoutNode>
+      <dgm:forEach name="Name14" axis="followSib" ptType="sibTrans" cnt="1">
+        <dgm:layoutNode name="sibTrans">
+          <dgm:alg type="sp"/>
           <dgm:shape xmlns:r="http://schemas.openxmlformats.org/officeDocument/2006/relationships" r:blip="">
             <dgm:adjLst/>
           </dgm:shape>
           <dgm:presOf/>
-          <dgm:constrLst>
-            <dgm:constr type="bendDist" for="des" ptType="parTrans" refType="sp" fact="0.5"/>
-          </dgm:constrLst>
+          <dgm:constrLst/>
           <dgm:ruleLst/>
-          <dgm:layoutNode name="composite">
-            <dgm:alg type="composite"/>
-            <dgm:shape xmlns:r="http://schemas.openxmlformats.org/officeDocument/2006/relationships" r:blip="">
-              <dgm:adjLst/>
-            </dgm:shape>
-            <dgm:presOf/>
-            <dgm:constrLst>
-              <dgm:constr type="w" for="ch" forName="background" refType="w" fact="0.9"/>
-              <dgm:constr type="h" for="ch" forName="background" refType="w" refFor="ch" refForName="background" fact="0.635"/>
-              <dgm:constr type="t" for="ch" forName="background"/>
-              <dgm:constr type="l" for="ch" forName="background"/>
-              <dgm:constr type="w" for="ch" forName="text" refType="w" fact="0.9"/>
-              <dgm:constr type="h" for="ch" forName="text" refType="w" refFor="ch" refForName="text" fact="0.635"/>
-              <dgm:constr type="t" for="ch" forName="text" refType="w" fact="0.095"/>
-              <dgm:constr type="l" for="ch" forName="text" refType="w" fact="0.1"/>
-            </dgm:constrLst>
-            <dgm:ruleLst/>
-            <dgm:layoutNode name="background" styleLbl="node0" moveWith="text">
-              <dgm:alg type="sp"/>
-              <dgm:shape xmlns:r="http://schemas.openxmlformats.org/officeDocument/2006/relationships" type="roundRect" r:blip="">
-                <dgm:adjLst>
-                  <dgm:adj idx="1" val="0.1"/>
-                </dgm:adjLst>
-              </dgm:shape>
-              <dgm:presOf/>
-              <dgm:constrLst/>
-              <dgm:ruleLst/>
-            </dgm:layoutNode>
-            <dgm:layoutNode name="text" styleLbl="fgAcc0">
-              <dgm:varLst>
-                <dgm:chPref val="3"/>
-              </dgm:varLst>
-              <dgm:alg type="tx"/>
-              <dgm:shape xmlns:r="http://schemas.openxmlformats.org/officeDocument/2006/relationships" type="roundRect" r:blip="">
-                <dgm:adjLst>
-                  <dgm:adj idx="1" val="0.1"/>
-                </dgm:adjLst>
-              </dgm:shape>
-              <dgm:presOf axis="self"/>
-              <dgm:constrLst>
-                <dgm:constr type="tMarg" refType="primFontSz" fact="0.3"/>
-                <dgm:constr type="bMarg" refType="primFontSz" fact="0.3"/>
-                <dgm:constr type="lMarg" refType="primFontSz" fact="0.3"/>
-                <dgm:constr type="rMarg" refType="primFontSz" fact="0.3"/>
-              </dgm:constrLst>
-              <dgm:ruleLst>
-                <dgm:rule type="primFontSz" val="5" fact="NaN" max="NaN"/>
-              </dgm:ruleLst>
-            </dgm:layoutNode>
-          </dgm:layoutNode>
-          <dgm:layoutNode name="hierChild2">
-            <dgm:choose name="Name5">
-              <dgm:if name="Name6" func="var" arg="dir" op="equ" val="norm">
-                <dgm:alg type="hierChild">
-                  <dgm:param type="linDir" val="fromL"/>
-                </dgm:alg>
-              </dgm:if>
-              <dgm:else name="Name7">
-                <dgm:alg type="hierChild">
-                  <dgm:param type="linDir" val="fromR"/>
-                </dgm:alg>
-              </dgm:else>
-            </dgm:choose>
-            <dgm:shape xmlns:r="http://schemas.openxmlformats.org/officeDocument/2006/relationships" r:blip="">
-              <dgm:adjLst/>
-            </dgm:shape>
-            <dgm:presOf/>
-            <dgm:constrLst/>
-            <dgm:ruleLst/>
-            <dgm:forEach name="Name8" axis="ch">
-              <dgm:forEach name="Name9" axis="self" ptType="parTrans" cnt="1">
-                <dgm:layoutNode name="Name10">
-                  <dgm:alg type="conn">
-                    <dgm:param type="dim" val="1D"/>
-                    <dgm:param type="endSty" val="noArr"/>
-                    <dgm:param type="connRout" val="bend"/>
-                    <dgm:param type="bendPt" val="end"/>
-                    <dgm:param type="begPts" val="bCtr"/>
-                    <dgm:param type="endPts" val="tCtr"/>
-                    <dgm:param type="srcNode" val="background"/>
-                    <dgm:param type="dstNode" val="background2"/>
-                  </dgm:alg>
-                  <dgm:shape xmlns:r="http://schemas.openxmlformats.org/officeDocument/2006/relationships" type="conn" r:blip="" zOrderOff="-999">
-                    <dgm:adjLst/>
-                  </dgm:shape>
-                  <dgm:presOf axis="self"/>
-                  <dgm:constrLst>
-                    <dgm:constr type="begPad"/>
-                    <dgm:constr type="endPad"/>
-                  </dgm:constrLst>
-                  <dgm:ruleLst/>
-                </dgm:layoutNode>
-              </dgm:forEach>
-              <dgm:forEach name="Name11" axis="self" ptType="node">
-                <dgm:layoutNode name="hierRoot2">
-                  <dgm:alg type="hierRoot"/>
-                  <dgm:shape xmlns:r="http://schemas.openxmlformats.org/officeDocument/2006/relationships" r:blip="">
-                    <dgm:adjLst/>
-                  </dgm:shape>
-                  <dgm:presOf/>
-                  <dgm:constrLst>
-                    <dgm:constr type="bendDist" for="des" ptType="parTrans" refType="sp" fact="0.5"/>
-                  </dgm:constrLst>
-                  <dgm:ruleLst/>
-                  <dgm:layoutNode name="composite2">
-                    <dgm:alg type="composite"/>
-                    <dgm:shape xmlns:r="http://schemas.openxmlformats.org/officeDocument/2006/relationships" r:blip="">
-                      <dgm:adjLst/>
-                    </dgm:shape>
-                    <dgm:presOf/>
-                    <dgm:constrLst>
-                      <dgm:constr type="w" for="ch" forName="background2" refType="w" fact="0.9"/>
-                      <dgm:constr type="h" for="ch" forName="background2" refType="w" refFor="ch" refForName="background2" fact="0.635"/>
-                      <dgm:constr type="t" for="ch" forName="background2"/>
-                      <dgm:constr type="l" for="ch" forName="background2"/>
-                      <dgm:constr type="w" for="ch" forName="text2" refType="w" fact="0.9"/>
-                      <dgm:constr type="h" for="ch" forName="text2" refType="w" refFor="ch" refForName="text2" fact="0.635"/>
-                      <dgm:constr type="t" for="ch" forName="text2" refType="w" fact="0.095"/>
-                      <dgm:constr type="l" for="ch" forName="text2" refType="w" fact="0.1"/>
-                    </dgm:constrLst>
-                    <dgm:ruleLst/>
-                    <dgm:layoutNode name="background2" moveWith="text2">
-                      <dgm:alg type="sp"/>
-                      <dgm:shape xmlns:r="http://schemas.openxmlformats.org/officeDocument/2006/relationships" type="roundRect" r:blip="">
-                        <dgm:adjLst>
-                          <dgm:adj idx="1" val="0.1"/>
-                        </dgm:adjLst>
-                      </dgm:shape>
-                      <dgm:presOf/>
-                      <dgm:constrLst/>
-                      <dgm:ruleLst/>
-                    </dgm:layoutNode>
-                    <dgm:layoutNode name="text2" styleLbl="fgAcc2">
-                      <dgm:varLst>
-                        <dgm:chPref val="3"/>
-                      </dgm:varLst>
-                      <dgm:alg type="tx"/>
-                      <dgm:shape xmlns:r="http://schemas.openxmlformats.org/officeDocument/2006/relationships" type="roundRect" r:blip="">
-                        <dgm:adjLst>
-                          <dgm:adj idx="1" val="0.1"/>
-                        </dgm:adjLst>
-                      </dgm:shape>
-                      <dgm:presOf axis="self"/>
-                      <dgm:constrLst>
-                        <dgm:constr type="tMarg" refType="primFontSz" fact="0.3"/>
-                        <dgm:constr type="bMarg" refType="primFontSz" fact="0.3"/>
-                        <dgm:constr type="lMarg" refType="primFontSz" fact="0.3"/>
-                        <dgm:constr type="rMarg" refType="primFontSz" fact="0.3"/>
-                      </dgm:constrLst>
-                      <dgm:ruleLst>
-                        <dgm:rule type="primFontSz" val="5" fact="NaN" max="NaN"/>
-                      </dgm:ruleLst>
-                    </dgm:layoutNode>
-                  </dgm:layoutNode>
-                  <dgm:layoutNode name="hierChild3">
-                    <dgm:choose name="Name12">
-                      <dgm:if name="Name13" func="var" arg="dir" op="equ" val="norm">
-                        <dgm:alg type="hierChild">
-                          <dgm:param type="linDir" val="fromL"/>
-                        </dgm:alg>
-                      </dgm:if>
-                      <dgm:else name="Name14">
-                        <dgm:alg type="hierChild">
-                          <dgm:param type="linDir" val="fromR"/>
-                        </dgm:alg>
-                      </dgm:else>
-                    </dgm:choose>
-                    <dgm:shape xmlns:r="http://schemas.openxmlformats.org/officeDocument/2006/relationships" r:blip="">
-                      <dgm:adjLst/>
-                    </dgm:shape>
-                    <dgm:presOf/>
-                    <dgm:constrLst/>
-                    <dgm:ruleLst/>
-                    <dgm:forEach name="Name15" axis="ch">
-                      <dgm:forEach name="Name16" axis="self" ptType="parTrans" cnt="1">
-                        <dgm:layoutNode name="Name17">
-                          <dgm:alg type="conn">
-                            <dgm:param type="dim" val="1D"/>
-                            <dgm:param type="endSty" val="noArr"/>
-                            <dgm:param type="connRout" val="bend"/>
-                            <dgm:param type="bendPt" val="end"/>
-                            <dgm:param type="begPts" val="bCtr"/>
-                            <dgm:param type="endPts" val="tCtr"/>
-                            <dgm:param type="srcNode" val="background2"/>
-                            <dgm:param type="dstNode" val="background3"/>
-                          </dgm:alg>
-                          <dgm:shape xmlns:r="http://schemas.openxmlformats.org/officeDocument/2006/relationships" type="conn" r:blip="" zOrderOff="-999">
-                            <dgm:adjLst/>
-                          </dgm:shape>
-                          <dgm:presOf axis="self"/>
-                          <dgm:constrLst>
-                            <dgm:constr type="begPad"/>
-                            <dgm:constr type="endPad"/>
-                          </dgm:constrLst>
-                          <dgm:ruleLst/>
-                        </dgm:layoutNode>
-                      </dgm:forEach>
-                      <dgm:forEach name="Name18" axis="self" ptType="node">
-                        <dgm:layoutNode name="hierRoot3">
-                          <dgm:alg type="hierRoot"/>
-                          <dgm:shape xmlns:r="http://schemas.openxmlformats.org/officeDocument/2006/relationships" r:blip="">
-                            <dgm:adjLst/>
-                          </dgm:shape>
-                          <dgm:presOf/>
-                          <dgm:constrLst>
-                            <dgm:constr type="bendDist" for="des" ptType="parTrans" refType="sp" fact="0.5"/>
-                          </dgm:constrLst>
-                          <dgm:ruleLst/>
-                          <dgm:layoutNode name="composite3">
-                            <dgm:alg type="composite"/>
-                            <dgm:shape xmlns:r="http://schemas.openxmlformats.org/officeDocument/2006/relationships" r:blip="">
-                              <dgm:adjLst/>
-                            </dgm:shape>
-                            <dgm:presOf/>
-                            <dgm:constrLst>
-                              <dgm:constr type="w" for="ch" forName="background3" refType="w" fact="0.9"/>
-                              <dgm:constr type="h" for="ch" forName="background3" refType="w" refFor="ch" refForName="background3" fact="0.635"/>
-                              <dgm:constr type="t" for="ch" forName="background3"/>
-                              <dgm:constr type="l" for="ch" forName="background3"/>
-                              <dgm:constr type="w" for="ch" forName="text3" refType="w" fact="0.9"/>
-                              <dgm:constr type="h" for="ch" forName="text3" refType="w" refFor="ch" refForName="text3" fact="0.635"/>
-                              <dgm:constr type="t" for="ch" forName="text3" refType="w" fact="0.095"/>
-                              <dgm:constr type="l" for="ch" forName="text3" refType="w" fact="0.1"/>
-                            </dgm:constrLst>
-                            <dgm:ruleLst/>
-                            <dgm:layoutNode name="background3" moveWith="text3">
-                              <dgm:alg type="sp"/>
-                              <dgm:shape xmlns:r="http://schemas.openxmlformats.org/officeDocument/2006/relationships" type="roundRect" r:blip="">
-                                <dgm:adjLst>
-                                  <dgm:adj idx="1" val="0.1"/>
-                                </dgm:adjLst>
-                              </dgm:shape>
-                              <dgm:presOf/>
-                              <dgm:constrLst/>
-                              <dgm:ruleLst/>
-                            </dgm:layoutNode>
-                            <dgm:layoutNode name="text3" styleLbl="fgAcc3">
-                              <dgm:varLst>
-                                <dgm:chPref val="3"/>
-                              </dgm:varLst>
-                              <dgm:alg type="tx"/>
-                              <dgm:shape xmlns:r="http://schemas.openxmlformats.org/officeDocument/2006/relationships" type="roundRect" r:blip="">
-                                <dgm:adjLst>
-                                  <dgm:adj idx="1" val="0.1"/>
-                                </dgm:adjLst>
-                              </dgm:shape>
-                              <dgm:presOf axis="self"/>
-                              <dgm:constrLst>
-                                <dgm:constr type="tMarg" refType="primFontSz" fact="0.3"/>
-                                <dgm:constr type="bMarg" refType="primFontSz" fact="0.3"/>
-                                <dgm:constr type="lMarg" refType="primFontSz" fact="0.3"/>
-                                <dgm:constr type="rMarg" refType="primFontSz" fact="0.3"/>
-                              </dgm:constrLst>
-                              <dgm:ruleLst>
-                                <dgm:rule type="primFontSz" val="5" fact="NaN" max="NaN"/>
-                              </dgm:ruleLst>
-                            </dgm:layoutNode>
-                          </dgm:layoutNode>
-                          <dgm:layoutNode name="hierChild4">
-                            <dgm:choose name="Name19">
-                              <dgm:if name="Name20" func="var" arg="dir" op="equ" val="norm">
-                                <dgm:alg type="hierChild">
-                                  <dgm:param type="linDir" val="fromL"/>
-                                </dgm:alg>
-                              </dgm:if>
-                              <dgm:else name="Name21">
-                                <dgm:alg type="hierChild">
-                                  <dgm:param type="linDir" val="fromR"/>
-                                </dgm:alg>
-                              </dgm:else>
-                            </dgm:choose>
-                            <dgm:shape xmlns:r="http://schemas.openxmlformats.org/officeDocument/2006/relationships" r:blip="">
-                              <dgm:adjLst/>
-                            </dgm:shape>
-                            <dgm:presOf/>
-                            <dgm:constrLst/>
-                            <dgm:ruleLst/>
-                            <dgm:forEach name="repeat" axis="ch">
-                              <dgm:forEach name="Name22" axis="self" ptType="parTrans" cnt="1">
-                                <dgm:layoutNode name="Name23">
-                                  <dgm:choose name="Name24">
-                                    <dgm:if name="Name25" axis="self" func="depth" op="lte" val="4">
-                                      <dgm:alg type="conn">
-                                        <dgm:param type="dim" val="1D"/>
-                                        <dgm:param type="endSty" val="noArr"/>
-                                        <dgm:param type="connRout" val="bend"/>
-                                        <dgm:param type="bendPt" val="end"/>
-                                        <dgm:param type="begPts" val="bCtr"/>
-                                        <dgm:param type="endPts" val="tCtr"/>
-                                        <dgm:param type="srcNode" val="background3"/>
-                                        <dgm:param type="dstNode" val="background4"/>
-                                      </dgm:alg>
-                                    </dgm:if>
-                                    <dgm:else name="Name26">
-                                      <dgm:alg type="conn">
-                                        <dgm:param type="dim" val="1D"/>
-                                        <dgm:param type="endSty" val="noArr"/>
-                                        <dgm:param type="connRout" val="bend"/>
-                                        <dgm:param type="bendPt" val="end"/>
-                                        <dgm:param type="begPts" val="bCtr"/>
-                                        <dgm:param type="endPts" val="tCtr"/>
-                                        <dgm:param type="srcNode" val="background4"/>
-                                        <dgm:param type="dstNode" val="background4"/>
-                                      </dgm:alg>
-                                    </dgm:else>
-                                  </dgm:choose>
-                                  <dgm:shape xmlns:r="http://schemas.openxmlformats.org/officeDocument/2006/relationships" type="conn" r:blip="" zOrderOff="-999">
-                                    <dgm:adjLst/>
-                                  </dgm:shape>
-                                  <dgm:presOf axis="self"/>
-                                  <dgm:constrLst>
-                                    <dgm:constr type="begPad"/>
-                                    <dgm:constr type="endPad"/>
-                                  </dgm:constrLst>
-                                  <dgm:ruleLst/>
-                                </dgm:layoutNode>
-                              </dgm:forEach>
-                              <dgm:forEach name="Name27" axis="self" ptType="node">
-                                <dgm:layoutNode name="hierRoot4">
-                                  <dgm:alg type="hierRoot"/>
-                                  <dgm:shape xmlns:r="http://schemas.openxmlformats.org/officeDocument/2006/relationships" r:blip="">
-                                    <dgm:adjLst/>
-                                  </dgm:shape>
-                                  <dgm:presOf/>
-                                  <dgm:constrLst>
-                                    <dgm:constr type="bendDist" for="des" ptType="parTrans" refType="sp" fact="0.5"/>
-                                  </dgm:constrLst>
-                                  <dgm:ruleLst/>
-                                  <dgm:layoutNode name="composite4">
-                                    <dgm:alg type="composite"/>
-                                    <dgm:shape xmlns:r="http://schemas.openxmlformats.org/officeDocument/2006/relationships" r:blip="">
-                                      <dgm:adjLst/>
-                                    </dgm:shape>
-                                    <dgm:presOf/>
-                                    <dgm:constrLst>
-                                      <dgm:constr type="w" for="ch" forName="background4" refType="w" fact="0.9"/>
-                                      <dgm:constr type="h" for="ch" forName="background4" refType="w" refFor="ch" refForName="background4" fact="0.635"/>
-                                      <dgm:constr type="t" for="ch" forName="background4"/>
-                                      <dgm:constr type="l" for="ch" forName="background4"/>
-                                      <dgm:constr type="w" for="ch" forName="text4" refType="w" fact="0.9"/>
-                                      <dgm:constr type="h" for="ch" forName="text4" refType="w" refFor="ch" refForName="text4" fact="0.635"/>
-                                      <dgm:constr type="t" for="ch" forName="text4" refType="w" fact="0.095"/>
-                                      <dgm:constr type="l" for="ch" forName="text4" refType="w" fact="0.1"/>
-                                    </dgm:constrLst>
-                                    <dgm:ruleLst/>
-                                    <dgm:layoutNode name="background4" moveWith="text4">
-                                      <dgm:alg type="sp"/>
-                                      <dgm:shape xmlns:r="http://schemas.openxmlformats.org/officeDocument/2006/relationships" type="roundRect" r:blip="">
-                                        <dgm:adjLst>
-                                          <dgm:adj idx="1" val="0.1"/>
-                                        </dgm:adjLst>
-                                      </dgm:shape>
-                                      <dgm:presOf/>
-                                      <dgm:constrLst/>
-                                      <dgm:ruleLst/>
-                                    </dgm:layoutNode>
-                                    <dgm:layoutNode name="text4" styleLbl="fgAcc4">
-                                      <dgm:varLst>
-                                        <dgm:chPref val="3"/>
-                                      </dgm:varLst>
-                                      <dgm:alg type="tx"/>
-                                      <dgm:shape xmlns:r="http://schemas.openxmlformats.org/officeDocument/2006/relationships" type="roundRect" r:blip="">
-                                        <dgm:adjLst>
-                                          <dgm:adj idx="1" val="0.1"/>
-                                        </dgm:adjLst>
-                                      </dgm:shape>
-                                      <dgm:presOf axis="self"/>
-                                      <dgm:constrLst>
-                                        <dgm:constr type="tMarg" refType="primFontSz" fact="0.3"/>
-                                        <dgm:constr type="bMarg" refType="primFontSz" fact="0.3"/>
-                                        <dgm:constr type="lMarg" refType="primFontSz" fact="0.3"/>
-                                        <dgm:constr type="rMarg" refType="primFontSz" fact="0.3"/>
-                                      </dgm:constrLst>
-                                      <dgm:ruleLst>
-                                        <dgm:rule type="primFontSz" val="5" fact="NaN" max="NaN"/>
-                                      </dgm:ruleLst>
-                                    </dgm:layoutNode>
-                                  </dgm:layoutNode>
-                                  <dgm:layoutNode name="hierChild5">
-                                    <dgm:choose name="Name28">
-                                      <dgm:if name="Name29" func="var" arg="dir" op="equ" val="norm">
-                                        <dgm:alg type="hierChild">
-                                          <dgm:param type="linDir" val="fromL"/>
-                                        </dgm:alg>
-                                      </dgm:if>
-                                      <dgm:else name="Name30">
-                                        <dgm:alg type="hierChild">
-                                          <dgm:param type="linDir" val="fromR"/>
-                                        </dgm:alg>
-                                      </dgm:else>
-                                    </dgm:choose>
-                                    <dgm:shape xmlns:r="http://schemas.openxmlformats.org/officeDocument/2006/relationships" r:blip="">
-                                      <dgm:adjLst/>
-                                    </dgm:shape>
-                                    <dgm:presOf/>
-                                    <dgm:constrLst/>
-                                    <dgm:ruleLst/>
-                                    <dgm:forEach name="Name31" ref="repeat"/>
-                                  </dgm:layoutNode>
-                                </dgm:layoutNode>
-                              </dgm:forEach>
-                            </dgm:forEach>
-                          </dgm:layoutNode>
-                        </dgm:layoutNode>
-                      </dgm:forEach>
-                    </dgm:forEach>
-                  </dgm:layoutNode>
-                </dgm:layoutNode>
-              </dgm:forEach>
-            </dgm:forEach>
-          </dgm:layoutNode>
         </dgm:layoutNode>
       </dgm:forEach>
     </dgm:forEach>
   </dgm:layoutNode>
+  <dgm:extLst>
+    <a:ext uri="{4F341089-5ED1-44EC-B178-C955D00A3D55}">
+      <dgm1611:autoBuNodeInfoLst xmlns:dgm1611="http://schemas.microsoft.com/office/drawing/2016/11/diagram">
+        <dgm1611:autoBuNodeInfo lvl="1" ptType="sibTrans">
+          <dgm1611:buPr prefix="" leadZeros="0">
+            <a:buAutoNum type="arabicParenBoth"/>
+          </dgm1611:buPr>
+        </dgm1611:autoBuNodeInfo>
+      </dgm1611:autoBuNodeInfoLst>
+    </a:ext>
+  </dgm:extLst>
 </dgm:layoutDef>
 </file>
 
@@ -3440,7 +3310,7 @@
           <a:p>
             <a:fld id="{E97C3365-1D62-41A6-BAAF-94637F0EAF0C}" type="datetimeFigureOut">
               <a:rPr kumimoji="1" lang="ja-JP" altLang="en-US" smtClean="0"/>
-              <a:t>2026/5/13</a:t>
+              <a:t>2026/7/15</a:t>
             </a:fld>
             <a:endParaRPr kumimoji="1" lang="ja-JP" altLang="en-US"/>
           </a:p>
@@ -3670,7 +3540,7 @@
           <a:p>
             <a:fld id="{E97C3365-1D62-41A6-BAAF-94637F0EAF0C}" type="datetimeFigureOut">
               <a:rPr kumimoji="1" lang="ja-JP" altLang="en-US" smtClean="0"/>
-              <a:t>2026/5/13</a:t>
+              <a:t>2026/7/15</a:t>
             </a:fld>
             <a:endParaRPr kumimoji="1" lang="ja-JP" altLang="en-US"/>
           </a:p>
@@ -3910,7 +3780,7 @@
           <a:p>
             <a:fld id="{E97C3365-1D62-41A6-BAAF-94637F0EAF0C}" type="datetimeFigureOut">
               <a:rPr kumimoji="1" lang="ja-JP" altLang="en-US" smtClean="0"/>
-              <a:t>2026/5/13</a:t>
+              <a:t>2026/7/15</a:t>
             </a:fld>
             <a:endParaRPr kumimoji="1" lang="ja-JP" altLang="en-US"/>
           </a:p>
@@ -4140,7 +4010,7 @@
           <a:p>
             <a:fld id="{E97C3365-1D62-41A6-BAAF-94637F0EAF0C}" type="datetimeFigureOut">
               <a:rPr kumimoji="1" lang="ja-JP" altLang="en-US" smtClean="0"/>
-              <a:t>2026/5/13</a:t>
+              <a:t>2026/7/15</a:t>
             </a:fld>
             <a:endParaRPr kumimoji="1" lang="ja-JP" altLang="en-US"/>
           </a:p>
@@ -4415,7 +4285,7 @@
           <a:p>
             <a:fld id="{E97C3365-1D62-41A6-BAAF-94637F0EAF0C}" type="datetimeFigureOut">
               <a:rPr kumimoji="1" lang="ja-JP" altLang="en-US" smtClean="0"/>
-              <a:t>2026/5/13</a:t>
+              <a:t>2026/7/15</a:t>
             </a:fld>
             <a:endParaRPr kumimoji="1" lang="ja-JP" altLang="en-US"/>
           </a:p>
@@ -4744,7 +4614,7 @@
           <a:p>
             <a:fld id="{E97C3365-1D62-41A6-BAAF-94637F0EAF0C}" type="datetimeFigureOut">
               <a:rPr kumimoji="1" lang="ja-JP" altLang="en-US" smtClean="0"/>
-              <a:t>2026/5/13</a:t>
+              <a:t>2026/7/15</a:t>
             </a:fld>
             <a:endParaRPr kumimoji="1" lang="ja-JP" altLang="en-US"/>
           </a:p>
@@ -5220,7 +5090,7 @@
           <a:p>
             <a:fld id="{E97C3365-1D62-41A6-BAAF-94637F0EAF0C}" type="datetimeFigureOut">
               <a:rPr kumimoji="1" lang="ja-JP" altLang="en-US" smtClean="0"/>
-              <a:t>2026/5/13</a:t>
+              <a:t>2026/7/15</a:t>
             </a:fld>
             <a:endParaRPr kumimoji="1" lang="ja-JP" altLang="en-US"/>
           </a:p>
@@ -5361,7 +5231,7 @@
           <a:p>
             <a:fld id="{E97C3365-1D62-41A6-BAAF-94637F0EAF0C}" type="datetimeFigureOut">
               <a:rPr kumimoji="1" lang="ja-JP" altLang="en-US" smtClean="0"/>
-              <a:t>2026/5/13</a:t>
+              <a:t>2026/7/15</a:t>
             </a:fld>
             <a:endParaRPr kumimoji="1" lang="ja-JP" altLang="en-US"/>
           </a:p>
@@ -5474,7 +5344,7 @@
           <a:p>
             <a:fld id="{E97C3365-1D62-41A6-BAAF-94637F0EAF0C}" type="datetimeFigureOut">
               <a:rPr kumimoji="1" lang="ja-JP" altLang="en-US" smtClean="0"/>
-              <a:t>2026/5/13</a:t>
+              <a:t>2026/7/15</a:t>
             </a:fld>
             <a:endParaRPr kumimoji="1" lang="ja-JP" altLang="en-US"/>
           </a:p>
@@ -5817,7 +5687,7 @@
           <a:p>
             <a:fld id="{E97C3365-1D62-41A6-BAAF-94637F0EAF0C}" type="datetimeFigureOut">
               <a:rPr kumimoji="1" lang="ja-JP" altLang="en-US" smtClean="0"/>
-              <a:t>2026/5/13</a:t>
+              <a:t>2026/7/15</a:t>
             </a:fld>
             <a:endParaRPr kumimoji="1" lang="ja-JP" altLang="en-US"/>
           </a:p>
@@ -6105,7 +5975,7 @@
           <a:p>
             <a:fld id="{E97C3365-1D62-41A6-BAAF-94637F0EAF0C}" type="datetimeFigureOut">
               <a:rPr kumimoji="1" lang="ja-JP" altLang="en-US" smtClean="0"/>
-              <a:t>2026/5/13</a:t>
+              <a:t>2026/7/15</a:t>
             </a:fld>
             <a:endParaRPr kumimoji="1" lang="ja-JP" altLang="en-US"/>
           </a:p>
@@ -6378,7 +6248,7 @@
           <a:p>
             <a:fld id="{E97C3365-1D62-41A6-BAAF-94637F0EAF0C}" type="datetimeFigureOut">
               <a:rPr kumimoji="1" lang="ja-JP" altLang="en-US" smtClean="0"/>
-              <a:t>2026/5/13</a:t>
+              <a:t>2026/7/15</a:t>
             </a:fld>
             <a:endParaRPr kumimoji="1" lang="ja-JP" altLang="en-US"/>
           </a:p>
@@ -6893,12 +6763,16 @@
           <a:p>
             <a:pPr algn="l"/>
             <a:r>
-              <a:rPr kumimoji="1" lang="ja-JP" altLang="en-US" sz="4400" dirty="0">
+              <a:rPr kumimoji="1" lang="ja-JP" altLang="en-US" sz="4400">
                 <a:latin typeface="HGS行書体" panose="03000600000000000000" pitchFamily="66" charset="-128"/>
                 <a:ea typeface="HGS行書体" panose="03000600000000000000" pitchFamily="66" charset="-128"/>
               </a:rPr>
               <a:t>麺スタグラム</a:t>
             </a:r>
+            <a:endParaRPr kumimoji="1" lang="ja-JP" altLang="en-US" sz="4400" dirty="0">
+              <a:latin typeface="HGS行書体" panose="03000600000000000000" pitchFamily="66" charset="-128"/>
+              <a:ea typeface="HGS行書体" panose="03000600000000000000" pitchFamily="66" charset="-128"/>
+            </a:endParaRPr>
           </a:p>
         </p:txBody>
       </p:sp>
@@ -7374,10 +7248,10 @@
       </p:grpSpPr>
       <p:sp useBgFill="1">
         <p:nvSpPr>
-          <p:cNvPr id="38" name="Rectangle 37">
+          <p:cNvPr id="8" name="Rectangle 7">
             <a:extLst>
               <a:ext uri="{FF2B5EF4-FFF2-40B4-BE49-F238E27FC236}">
-                <a16:creationId xmlns:a16="http://schemas.microsoft.com/office/drawing/2014/main" id="{955A2079-FA98-4876-80F0-72364A7D2EA4}"/>
+                <a16:creationId xmlns:a16="http://schemas.microsoft.com/office/drawing/2014/main" id="{100EDD19-6802-4EC3-95CE-CFFAB042CFD6}"/>
               </a:ext>
               <a:ext uri="{C183D7F6-B498-43B3-948B-1728B52AA6E4}">
                 <adec:decorative xmlns:adec="http://schemas.microsoft.com/office/drawing/2017/decorative" val="1"/>
@@ -7397,7 +7271,7 @@
         </p:nvSpPr>
         <p:spPr>
           <a:xfrm>
-            <a:off x="-1" y="0"/>
+            <a:off x="0" y="0"/>
             <a:ext cx="12188952" cy="6858000"/>
           </a:xfrm>
           <a:prstGeom prst="rect">
@@ -7437,7 +7311,7 @@
           <p:cNvPr id="2" name="タイトル 1">
             <a:extLst>
               <a:ext uri="{FF2B5EF4-FFF2-40B4-BE49-F238E27FC236}">
-                <a16:creationId xmlns:a16="http://schemas.microsoft.com/office/drawing/2014/main" id="{37F8E801-5E88-641A-6DE8-B9496D4CC168}"/>
+                <a16:creationId xmlns:a16="http://schemas.microsoft.com/office/drawing/2014/main" id="{E4CB74C5-35DB-1E5C-A46F-041DA4116A55}"/>
               </a:ext>
             </a:extLst>
           </p:cNvPr>
@@ -7450,8 +7324,8 @@
         </p:nvSpPr>
         <p:spPr>
           <a:xfrm>
-            <a:off x="838200" y="557188"/>
-            <a:ext cx="10515600" cy="1133499"/>
+            <a:off x="838200" y="365125"/>
+            <a:ext cx="10515600" cy="1325563"/>
           </a:xfrm>
         </p:spPr>
         <p:txBody>
@@ -7460,9 +7334,1063 @@
           </a:bodyPr>
           <a:lstStyle/>
           <a:p>
+            <a:r>
+              <a:rPr kumimoji="1" lang="ja-JP" altLang="en-US" sz="5400"/>
+              <a:t>なぜ作ろうと思ったのか</a:t>
+            </a:r>
+          </a:p>
+        </p:txBody>
+      </p:sp>
+      <p:sp>
+        <p:nvSpPr>
+          <p:cNvPr id="10" name="sketch line">
+            <a:extLst>
+              <a:ext uri="{FF2B5EF4-FFF2-40B4-BE49-F238E27FC236}">
+                <a16:creationId xmlns:a16="http://schemas.microsoft.com/office/drawing/2014/main" id="{DB17E863-922E-4C26-BD64-E8FD41D28661}"/>
+              </a:ext>
+              <a:ext uri="{C183D7F6-B498-43B3-948B-1728B52AA6E4}">
+                <adec:decorative xmlns:adec="http://schemas.microsoft.com/office/drawing/2017/decorative" val="1"/>
+              </a:ext>
+            </a:extLst>
+          </p:cNvPr>
+          <p:cNvSpPr>
+            <a:spLocks noGrp="1" noRot="1" noChangeAspect="1" noMove="1" noResize="1" noEditPoints="1" noAdjustHandles="1" noChangeArrowheads="1" noChangeShapeType="1" noTextEdit="1"/>
+          </p:cNvSpPr>
+          <p:nvPr>
+            <p:extLst>
+              <p:ext uri="{386F3935-93C4-4BCD-93E2-E3B085C9AB24}">
+                <p16:designElem xmlns:p16="http://schemas.microsoft.com/office/powerpoint/2015/main" val="1"/>
+              </p:ext>
+            </p:extLst>
+          </p:nvPr>
+        </p:nvSpPr>
+        <p:spPr>
+          <a:xfrm>
+            <a:off x="669036" y="1677373"/>
+            <a:ext cx="10853928" cy="18288"/>
+          </a:xfrm>
+          <a:custGeom>
+            <a:avLst/>
+            <a:gdLst>
+              <a:gd name="csX0" fmla="*/ 0 w 10853928"/>
+              <a:gd name="csY0" fmla="*/ 0 h 18288"/>
+              <a:gd name="csX1" fmla="*/ 461292 w 10853928"/>
+              <a:gd name="csY1" fmla="*/ 0 h 18288"/>
+              <a:gd name="csX2" fmla="*/ 1139662 w 10853928"/>
+              <a:gd name="csY2" fmla="*/ 0 h 18288"/>
+              <a:gd name="csX3" fmla="*/ 1926572 w 10853928"/>
+              <a:gd name="csY3" fmla="*/ 0 h 18288"/>
+              <a:gd name="csX4" fmla="*/ 2279325 w 10853928"/>
+              <a:gd name="csY4" fmla="*/ 0 h 18288"/>
+              <a:gd name="csX5" fmla="*/ 2632078 w 10853928"/>
+              <a:gd name="csY5" fmla="*/ 0 h 18288"/>
+              <a:gd name="csX6" fmla="*/ 3527527 w 10853928"/>
+              <a:gd name="csY6" fmla="*/ 0 h 18288"/>
+              <a:gd name="csX7" fmla="*/ 4205897 w 10853928"/>
+              <a:gd name="csY7" fmla="*/ 0 h 18288"/>
+              <a:gd name="csX8" fmla="*/ 4558650 w 10853928"/>
+              <a:gd name="csY8" fmla="*/ 0 h 18288"/>
+              <a:gd name="csX9" fmla="*/ 5237020 w 10853928"/>
+              <a:gd name="csY9" fmla="*/ 0 h 18288"/>
+              <a:gd name="csX10" fmla="*/ 6132469 w 10853928"/>
+              <a:gd name="csY10" fmla="*/ 0 h 18288"/>
+              <a:gd name="csX11" fmla="*/ 6702301 w 10853928"/>
+              <a:gd name="csY11" fmla="*/ 0 h 18288"/>
+              <a:gd name="csX12" fmla="*/ 7272132 w 10853928"/>
+              <a:gd name="csY12" fmla="*/ 0 h 18288"/>
+              <a:gd name="csX13" fmla="*/ 7950502 w 10853928"/>
+              <a:gd name="csY13" fmla="*/ 0 h 18288"/>
+              <a:gd name="csX14" fmla="*/ 8737412 w 10853928"/>
+              <a:gd name="csY14" fmla="*/ 0 h 18288"/>
+              <a:gd name="csX15" fmla="*/ 9524322 w 10853928"/>
+              <a:gd name="csY15" fmla="*/ 0 h 18288"/>
+              <a:gd name="csX16" fmla="*/ 10853928 w 10853928"/>
+              <a:gd name="csY16" fmla="*/ 0 h 18288"/>
+              <a:gd name="csX17" fmla="*/ 10853928 w 10853928"/>
+              <a:gd name="csY17" fmla="*/ 18288 h 18288"/>
+              <a:gd name="csX18" fmla="*/ 10392636 w 10853928"/>
+              <a:gd name="csY18" fmla="*/ 18288 h 18288"/>
+              <a:gd name="csX19" fmla="*/ 9497187 w 10853928"/>
+              <a:gd name="csY19" fmla="*/ 18288 h 18288"/>
+              <a:gd name="csX20" fmla="*/ 8818817 w 10853928"/>
+              <a:gd name="csY20" fmla="*/ 18288 h 18288"/>
+              <a:gd name="csX21" fmla="*/ 8466064 w 10853928"/>
+              <a:gd name="csY21" fmla="*/ 18288 h 18288"/>
+              <a:gd name="csX22" fmla="*/ 7787693 w 10853928"/>
+              <a:gd name="csY22" fmla="*/ 18288 h 18288"/>
+              <a:gd name="csX23" fmla="*/ 7217862 w 10853928"/>
+              <a:gd name="csY23" fmla="*/ 18288 h 18288"/>
+              <a:gd name="csX24" fmla="*/ 6648031 w 10853928"/>
+              <a:gd name="csY24" fmla="*/ 18288 h 18288"/>
+              <a:gd name="csX25" fmla="*/ 6078200 w 10853928"/>
+              <a:gd name="csY25" fmla="*/ 18288 h 18288"/>
+              <a:gd name="csX26" fmla="*/ 5508368 w 10853928"/>
+              <a:gd name="csY26" fmla="*/ 18288 h 18288"/>
+              <a:gd name="csX27" fmla="*/ 4721459 w 10853928"/>
+              <a:gd name="csY27" fmla="*/ 18288 h 18288"/>
+              <a:gd name="csX28" fmla="*/ 4043088 w 10853928"/>
+              <a:gd name="csY28" fmla="*/ 18288 h 18288"/>
+              <a:gd name="csX29" fmla="*/ 3690336 w 10853928"/>
+              <a:gd name="csY29" fmla="*/ 18288 h 18288"/>
+              <a:gd name="csX30" fmla="*/ 3120504 w 10853928"/>
+              <a:gd name="csY30" fmla="*/ 18288 h 18288"/>
+              <a:gd name="csX31" fmla="*/ 2333595 w 10853928"/>
+              <a:gd name="csY31" fmla="*/ 18288 h 18288"/>
+              <a:gd name="csX32" fmla="*/ 1872303 w 10853928"/>
+              <a:gd name="csY32" fmla="*/ 18288 h 18288"/>
+              <a:gd name="csX33" fmla="*/ 976854 w 10853928"/>
+              <a:gd name="csY33" fmla="*/ 18288 h 18288"/>
+              <a:gd name="csX34" fmla="*/ 0 w 10853928"/>
+              <a:gd name="csY34" fmla="*/ 18288 h 18288"/>
+              <a:gd name="csX35" fmla="*/ 0 w 10853928"/>
+              <a:gd name="csY35" fmla="*/ 0 h 18288"/>
+            </a:gdLst>
+            <a:ahLst/>
+            <a:cxnLst>
+              <a:cxn ang="0">
+                <a:pos x="csX0" y="csY0"/>
+              </a:cxn>
+              <a:cxn ang="0">
+                <a:pos x="csX1" y="csY1"/>
+              </a:cxn>
+              <a:cxn ang="0">
+                <a:pos x="csX2" y="csY2"/>
+              </a:cxn>
+              <a:cxn ang="0">
+                <a:pos x="csX3" y="csY3"/>
+              </a:cxn>
+              <a:cxn ang="0">
+                <a:pos x="csX4" y="csY4"/>
+              </a:cxn>
+              <a:cxn ang="0">
+                <a:pos x="csX5" y="csY5"/>
+              </a:cxn>
+              <a:cxn ang="0">
+                <a:pos x="csX6" y="csY6"/>
+              </a:cxn>
+              <a:cxn ang="0">
+                <a:pos x="csX7" y="csY7"/>
+              </a:cxn>
+              <a:cxn ang="0">
+                <a:pos x="csX8" y="csY8"/>
+              </a:cxn>
+              <a:cxn ang="0">
+                <a:pos x="csX9" y="csY9"/>
+              </a:cxn>
+              <a:cxn ang="0">
+                <a:pos x="csX10" y="csY10"/>
+              </a:cxn>
+              <a:cxn ang="0">
+                <a:pos x="csX11" y="csY11"/>
+              </a:cxn>
+              <a:cxn ang="0">
+                <a:pos x="csX12" y="csY12"/>
+              </a:cxn>
+              <a:cxn ang="0">
+                <a:pos x="csX13" y="csY13"/>
+              </a:cxn>
+              <a:cxn ang="0">
+                <a:pos x="csX14" y="csY14"/>
+              </a:cxn>
+              <a:cxn ang="0">
+                <a:pos x="csX15" y="csY15"/>
+              </a:cxn>
+              <a:cxn ang="0">
+                <a:pos x="csX16" y="csY16"/>
+              </a:cxn>
+              <a:cxn ang="0">
+                <a:pos x="csX17" y="csY17"/>
+              </a:cxn>
+              <a:cxn ang="0">
+                <a:pos x="csX18" y="csY18"/>
+              </a:cxn>
+              <a:cxn ang="0">
+                <a:pos x="csX19" y="csY19"/>
+              </a:cxn>
+              <a:cxn ang="0">
+                <a:pos x="csX20" y="csY20"/>
+              </a:cxn>
+              <a:cxn ang="0">
+                <a:pos x="csX21" y="csY21"/>
+              </a:cxn>
+              <a:cxn ang="0">
+                <a:pos x="csX22" y="csY22"/>
+              </a:cxn>
+              <a:cxn ang="0">
+                <a:pos x="csX23" y="csY23"/>
+              </a:cxn>
+              <a:cxn ang="0">
+                <a:pos x="csX24" y="csY24"/>
+              </a:cxn>
+              <a:cxn ang="0">
+                <a:pos x="csX25" y="csY25"/>
+              </a:cxn>
+              <a:cxn ang="0">
+                <a:pos x="csX26" y="csY26"/>
+              </a:cxn>
+              <a:cxn ang="0">
+                <a:pos x="csX27" y="csY27"/>
+              </a:cxn>
+              <a:cxn ang="0">
+                <a:pos x="csX28" y="csY28"/>
+              </a:cxn>
+              <a:cxn ang="0">
+                <a:pos x="csX29" y="csY29"/>
+              </a:cxn>
+              <a:cxn ang="0">
+                <a:pos x="csX30" y="csY30"/>
+              </a:cxn>
+              <a:cxn ang="0">
+                <a:pos x="csX31" y="csY31"/>
+              </a:cxn>
+              <a:cxn ang="0">
+                <a:pos x="csX32" y="csY32"/>
+              </a:cxn>
+              <a:cxn ang="0">
+                <a:pos x="csX33" y="csY33"/>
+              </a:cxn>
+              <a:cxn ang="0">
+                <a:pos x="csX34" y="csY34"/>
+              </a:cxn>
+              <a:cxn ang="0">
+                <a:pos x="csX35" y="csY35"/>
+              </a:cxn>
+            </a:cxnLst>
+            <a:rect l="l" t="t" r="r" b="b"/>
+            <a:pathLst>
+              <a:path w="10853928" h="18288" fill="none" extrusionOk="0">
+                <a:moveTo>
+                  <a:pt x="0" y="0"/>
+                </a:moveTo>
+                <a:cubicBezTo>
+                  <a:pt x="146993" y="-19076"/>
+                  <a:pt x="347684" y="-4790"/>
+                  <a:pt x="461292" y="0"/>
+                </a:cubicBezTo>
+                <a:cubicBezTo>
+                  <a:pt x="574900" y="4790"/>
+                  <a:pt x="808367" y="19821"/>
+                  <a:pt x="1139662" y="0"/>
+                </a:cubicBezTo>
+                <a:cubicBezTo>
+                  <a:pt x="1470957" y="-19821"/>
+                  <a:pt x="1627405" y="5721"/>
+                  <a:pt x="1926572" y="0"/>
+                </a:cubicBezTo>
+                <a:cubicBezTo>
+                  <a:pt x="2225739" y="-5721"/>
+                  <a:pt x="2137730" y="-3235"/>
+                  <a:pt x="2279325" y="0"/>
+                </a:cubicBezTo>
+                <a:cubicBezTo>
+                  <a:pt x="2420920" y="3235"/>
+                  <a:pt x="2456518" y="9685"/>
+                  <a:pt x="2632078" y="0"/>
+                </a:cubicBezTo>
+                <a:cubicBezTo>
+                  <a:pt x="2807638" y="-9685"/>
+                  <a:pt x="3211516" y="-43007"/>
+                  <a:pt x="3527527" y="0"/>
+                </a:cubicBezTo>
+                <a:cubicBezTo>
+                  <a:pt x="3843538" y="43007"/>
+                  <a:pt x="4058833" y="22042"/>
+                  <a:pt x="4205897" y="0"/>
+                </a:cubicBezTo>
+                <a:cubicBezTo>
+                  <a:pt x="4352961" y="-22042"/>
+                  <a:pt x="4474805" y="-11846"/>
+                  <a:pt x="4558650" y="0"/>
+                </a:cubicBezTo>
+                <a:cubicBezTo>
+                  <a:pt x="4642495" y="11846"/>
+                  <a:pt x="5041928" y="-6069"/>
+                  <a:pt x="5237020" y="0"/>
+                </a:cubicBezTo>
+                <a:cubicBezTo>
+                  <a:pt x="5432112" y="6069"/>
+                  <a:pt x="5943266" y="-17479"/>
+                  <a:pt x="6132469" y="0"/>
+                </a:cubicBezTo>
+                <a:cubicBezTo>
+                  <a:pt x="6321672" y="17479"/>
+                  <a:pt x="6483872" y="26234"/>
+                  <a:pt x="6702301" y="0"/>
+                </a:cubicBezTo>
+                <a:cubicBezTo>
+                  <a:pt x="6920730" y="-26234"/>
+                  <a:pt x="6991194" y="-15156"/>
+                  <a:pt x="7272132" y="0"/>
+                </a:cubicBezTo>
+                <a:cubicBezTo>
+                  <a:pt x="7553070" y="15156"/>
+                  <a:pt x="7684444" y="-32961"/>
+                  <a:pt x="7950502" y="0"/>
+                </a:cubicBezTo>
+                <a:cubicBezTo>
+                  <a:pt x="8216560" y="32961"/>
+                  <a:pt x="8493290" y="-10491"/>
+                  <a:pt x="8737412" y="0"/>
+                </a:cubicBezTo>
+                <a:cubicBezTo>
+                  <a:pt x="8981534" y="10491"/>
+                  <a:pt x="9191586" y="-13899"/>
+                  <a:pt x="9524322" y="0"/>
+                </a:cubicBezTo>
+                <a:cubicBezTo>
+                  <a:pt x="9857058" y="13899"/>
+                  <a:pt x="10297509" y="7485"/>
+                  <a:pt x="10853928" y="0"/>
+                </a:cubicBezTo>
+                <a:cubicBezTo>
+                  <a:pt x="10854574" y="4451"/>
+                  <a:pt x="10854418" y="9226"/>
+                  <a:pt x="10853928" y="18288"/>
+                </a:cubicBezTo>
+                <a:cubicBezTo>
+                  <a:pt x="10691638" y="28522"/>
+                  <a:pt x="10574319" y="29578"/>
+                  <a:pt x="10392636" y="18288"/>
+                </a:cubicBezTo>
+                <a:cubicBezTo>
+                  <a:pt x="10210953" y="6998"/>
+                  <a:pt x="9836277" y="-16742"/>
+                  <a:pt x="9497187" y="18288"/>
+                </a:cubicBezTo>
+                <a:cubicBezTo>
+                  <a:pt x="9158097" y="53318"/>
+                  <a:pt x="9119479" y="30714"/>
+                  <a:pt x="8818817" y="18288"/>
+                </a:cubicBezTo>
+                <a:cubicBezTo>
+                  <a:pt x="8518155" y="5863"/>
+                  <a:pt x="8640037" y="6483"/>
+                  <a:pt x="8466064" y="18288"/>
+                </a:cubicBezTo>
+                <a:cubicBezTo>
+                  <a:pt x="8292091" y="30093"/>
+                  <a:pt x="7997656" y="18914"/>
+                  <a:pt x="7787693" y="18288"/>
+                </a:cubicBezTo>
+                <a:cubicBezTo>
+                  <a:pt x="7577730" y="17662"/>
+                  <a:pt x="7412468" y="21416"/>
+                  <a:pt x="7217862" y="18288"/>
+                </a:cubicBezTo>
+                <a:cubicBezTo>
+                  <a:pt x="7023256" y="15160"/>
+                  <a:pt x="6898018" y="14824"/>
+                  <a:pt x="6648031" y="18288"/>
+                </a:cubicBezTo>
+                <a:cubicBezTo>
+                  <a:pt x="6398044" y="21752"/>
+                  <a:pt x="6254402" y="38625"/>
+                  <a:pt x="6078200" y="18288"/>
+                </a:cubicBezTo>
+                <a:cubicBezTo>
+                  <a:pt x="5901998" y="-2049"/>
+                  <a:pt x="5622886" y="3213"/>
+                  <a:pt x="5508368" y="18288"/>
+                </a:cubicBezTo>
+                <a:cubicBezTo>
+                  <a:pt x="5393850" y="33363"/>
+                  <a:pt x="5036260" y="26830"/>
+                  <a:pt x="4721459" y="18288"/>
+                </a:cubicBezTo>
+                <a:cubicBezTo>
+                  <a:pt x="4406658" y="9746"/>
+                  <a:pt x="4239221" y="41551"/>
+                  <a:pt x="4043088" y="18288"/>
+                </a:cubicBezTo>
+                <a:cubicBezTo>
+                  <a:pt x="3846955" y="-4975"/>
+                  <a:pt x="3818802" y="34658"/>
+                  <a:pt x="3690336" y="18288"/>
+                </a:cubicBezTo>
+                <a:cubicBezTo>
+                  <a:pt x="3561870" y="1918"/>
+                  <a:pt x="3265491" y="42194"/>
+                  <a:pt x="3120504" y="18288"/>
+                </a:cubicBezTo>
+                <a:cubicBezTo>
+                  <a:pt x="2975517" y="-5618"/>
+                  <a:pt x="2720254" y="36673"/>
+                  <a:pt x="2333595" y="18288"/>
+                </a:cubicBezTo>
+                <a:cubicBezTo>
+                  <a:pt x="1946936" y="-97"/>
+                  <a:pt x="2097241" y="5776"/>
+                  <a:pt x="1872303" y="18288"/>
+                </a:cubicBezTo>
+                <a:cubicBezTo>
+                  <a:pt x="1647365" y="30800"/>
+                  <a:pt x="1282708" y="45380"/>
+                  <a:pt x="976854" y="18288"/>
+                </a:cubicBezTo>
+                <a:cubicBezTo>
+                  <a:pt x="671000" y="-8804"/>
+                  <a:pt x="408401" y="-12775"/>
+                  <a:pt x="0" y="18288"/>
+                </a:cubicBezTo>
+                <a:cubicBezTo>
+                  <a:pt x="-213" y="9468"/>
+                  <a:pt x="187" y="4459"/>
+                  <a:pt x="0" y="0"/>
+                </a:cubicBezTo>
+                <a:close/>
+              </a:path>
+              <a:path w="10853928" h="18288" stroke="0" extrusionOk="0">
+                <a:moveTo>
+                  <a:pt x="0" y="0"/>
+                </a:moveTo>
+                <a:cubicBezTo>
+                  <a:pt x="267322" y="15284"/>
+                  <a:pt x="415388" y="-21048"/>
+                  <a:pt x="569831" y="0"/>
+                </a:cubicBezTo>
+                <a:cubicBezTo>
+                  <a:pt x="724274" y="21048"/>
+                  <a:pt x="769333" y="-2353"/>
+                  <a:pt x="922584" y="0"/>
+                </a:cubicBezTo>
+                <a:cubicBezTo>
+                  <a:pt x="1075835" y="2353"/>
+                  <a:pt x="1399490" y="-145"/>
+                  <a:pt x="1818033" y="0"/>
+                </a:cubicBezTo>
+                <a:cubicBezTo>
+                  <a:pt x="2236576" y="145"/>
+                  <a:pt x="2145330" y="5482"/>
+                  <a:pt x="2387864" y="0"/>
+                </a:cubicBezTo>
+                <a:cubicBezTo>
+                  <a:pt x="2630398" y="-5482"/>
+                  <a:pt x="2793207" y="18487"/>
+                  <a:pt x="2957695" y="0"/>
+                </a:cubicBezTo>
+                <a:cubicBezTo>
+                  <a:pt x="3122183" y="-18487"/>
+                  <a:pt x="3579141" y="19003"/>
+                  <a:pt x="3853144" y="0"/>
+                </a:cubicBezTo>
+                <a:cubicBezTo>
+                  <a:pt x="4127147" y="-19003"/>
+                  <a:pt x="4209857" y="12211"/>
+                  <a:pt x="4314436" y="0"/>
+                </a:cubicBezTo>
+                <a:cubicBezTo>
+                  <a:pt x="4419015" y="-12211"/>
+                  <a:pt x="4762459" y="-17220"/>
+                  <a:pt x="5209885" y="0"/>
+                </a:cubicBezTo>
+                <a:cubicBezTo>
+                  <a:pt x="5657311" y="17220"/>
+                  <a:pt x="5692663" y="-3290"/>
+                  <a:pt x="6105335" y="0"/>
+                </a:cubicBezTo>
+                <a:cubicBezTo>
+                  <a:pt x="6518007" y="3290"/>
+                  <a:pt x="6455516" y="-5124"/>
+                  <a:pt x="6783705" y="0"/>
+                </a:cubicBezTo>
+                <a:cubicBezTo>
+                  <a:pt x="7111894" y="5124"/>
+                  <a:pt x="7441941" y="-17829"/>
+                  <a:pt x="7679154" y="0"/>
+                </a:cubicBezTo>
+                <a:cubicBezTo>
+                  <a:pt x="7916367" y="17829"/>
+                  <a:pt x="8102967" y="-24363"/>
+                  <a:pt x="8248985" y="0"/>
+                </a:cubicBezTo>
+                <a:cubicBezTo>
+                  <a:pt x="8395003" y="24363"/>
+                  <a:pt x="8552393" y="25505"/>
+                  <a:pt x="8818817" y="0"/>
+                </a:cubicBezTo>
+                <a:cubicBezTo>
+                  <a:pt x="9085241" y="-25505"/>
+                  <a:pt x="9411308" y="38000"/>
+                  <a:pt x="9605726" y="0"/>
+                </a:cubicBezTo>
+                <a:cubicBezTo>
+                  <a:pt x="9800144" y="-38000"/>
+                  <a:pt x="10006468" y="-25741"/>
+                  <a:pt x="10175558" y="0"/>
+                </a:cubicBezTo>
+                <a:cubicBezTo>
+                  <a:pt x="10344648" y="25741"/>
+                  <a:pt x="10696282" y="695"/>
+                  <a:pt x="10853928" y="0"/>
+                </a:cubicBezTo>
+                <a:cubicBezTo>
+                  <a:pt x="10853521" y="8690"/>
+                  <a:pt x="10853774" y="14141"/>
+                  <a:pt x="10853928" y="18288"/>
+                </a:cubicBezTo>
+                <a:cubicBezTo>
+                  <a:pt x="10608124" y="24255"/>
+                  <a:pt x="10343415" y="22307"/>
+                  <a:pt x="10067018" y="18288"/>
+                </a:cubicBezTo>
+                <a:cubicBezTo>
+                  <a:pt x="9790621" y="14270"/>
+                  <a:pt x="9843266" y="3564"/>
+                  <a:pt x="9714266" y="18288"/>
+                </a:cubicBezTo>
+                <a:cubicBezTo>
+                  <a:pt x="9585266" y="33012"/>
+                  <a:pt x="9379484" y="1875"/>
+                  <a:pt x="9252974" y="18288"/>
+                </a:cubicBezTo>
+                <a:cubicBezTo>
+                  <a:pt x="9126464" y="34701"/>
+                  <a:pt x="8580678" y="-4904"/>
+                  <a:pt x="8357525" y="18288"/>
+                </a:cubicBezTo>
+                <a:cubicBezTo>
+                  <a:pt x="8134372" y="41480"/>
+                  <a:pt x="7903199" y="26458"/>
+                  <a:pt x="7679154" y="18288"/>
+                </a:cubicBezTo>
+                <a:cubicBezTo>
+                  <a:pt x="7455109" y="10118"/>
+                  <a:pt x="7435944" y="27109"/>
+                  <a:pt x="7217862" y="18288"/>
+                </a:cubicBezTo>
+                <a:cubicBezTo>
+                  <a:pt x="6999780" y="9467"/>
+                  <a:pt x="6680409" y="18985"/>
+                  <a:pt x="6539492" y="18288"/>
+                </a:cubicBezTo>
+                <a:cubicBezTo>
+                  <a:pt x="6398575" y="17592"/>
+                  <a:pt x="6312077" y="33018"/>
+                  <a:pt x="6186739" y="18288"/>
+                </a:cubicBezTo>
+                <a:cubicBezTo>
+                  <a:pt x="6061401" y="3558"/>
+                  <a:pt x="5947033" y="12075"/>
+                  <a:pt x="5833986" y="18288"/>
+                </a:cubicBezTo>
+                <a:cubicBezTo>
+                  <a:pt x="5720939" y="24501"/>
+                  <a:pt x="5482226" y="8586"/>
+                  <a:pt x="5155616" y="18288"/>
+                </a:cubicBezTo>
+                <a:cubicBezTo>
+                  <a:pt x="4829006" y="27991"/>
+                  <a:pt x="4841274" y="29316"/>
+                  <a:pt x="4694324" y="18288"/>
+                </a:cubicBezTo>
+                <a:cubicBezTo>
+                  <a:pt x="4547374" y="7260"/>
+                  <a:pt x="4077675" y="7013"/>
+                  <a:pt x="3907414" y="18288"/>
+                </a:cubicBezTo>
+                <a:cubicBezTo>
+                  <a:pt x="3737153" y="29564"/>
+                  <a:pt x="3538393" y="21630"/>
+                  <a:pt x="3446122" y="18288"/>
+                </a:cubicBezTo>
+                <a:cubicBezTo>
+                  <a:pt x="3353851" y="14946"/>
+                  <a:pt x="2990320" y="-8091"/>
+                  <a:pt x="2659212" y="18288"/>
+                </a:cubicBezTo>
+                <a:cubicBezTo>
+                  <a:pt x="2328104" y="44667"/>
+                  <a:pt x="2427653" y="9607"/>
+                  <a:pt x="2306460" y="18288"/>
+                </a:cubicBezTo>
+                <a:cubicBezTo>
+                  <a:pt x="2185267" y="26969"/>
+                  <a:pt x="1719763" y="3717"/>
+                  <a:pt x="1519550" y="18288"/>
+                </a:cubicBezTo>
+                <a:cubicBezTo>
+                  <a:pt x="1319337" y="32860"/>
+                  <a:pt x="1167371" y="17040"/>
+                  <a:pt x="1058258" y="18288"/>
+                </a:cubicBezTo>
+                <a:cubicBezTo>
+                  <a:pt x="949145" y="19536"/>
+                  <a:pt x="780234" y="31447"/>
+                  <a:pt x="705505" y="18288"/>
+                </a:cubicBezTo>
+                <a:cubicBezTo>
+                  <a:pt x="630776" y="5129"/>
+                  <a:pt x="215796" y="30056"/>
+                  <a:pt x="0" y="18288"/>
+                </a:cubicBezTo>
+                <a:cubicBezTo>
+                  <a:pt x="-53" y="11301"/>
+                  <a:pt x="-649" y="7756"/>
+                  <a:pt x="0" y="0"/>
+                </a:cubicBezTo>
+                <a:close/>
+              </a:path>
+            </a:pathLst>
+          </a:custGeom>
+          <a:solidFill>
+            <a:schemeClr val="accent2"/>
+          </a:solidFill>
+          <a:ln w="41275" cap="rnd">
+            <a:solidFill>
+              <a:schemeClr val="accent2"/>
+            </a:solidFill>
+            <a:round/>
+            <a:extLst>
+              <a:ext uri="{C807C97D-BFC1-408E-A445-0C87EB9F89A2}">
+                <ask:lineSketchStyleProps xmlns:ask="http://schemas.microsoft.com/office/drawing/2018/sketchyshapes" sd="1219033472">
+                  <a:prstGeom prst="rect">
+                    <a:avLst/>
+                  </a:prstGeom>
+                  <ask:type>
+                    <ask:lineSketchFreehand/>
+                  </ask:type>
+                </ask:lineSketchStyleProps>
+              </a:ext>
+            </a:extLst>
+          </a:ln>
+        </p:spPr>
+        <p:style>
+          <a:lnRef idx="2">
+            <a:schemeClr val="accent1">
+              <a:shade val="50000"/>
+            </a:schemeClr>
+          </a:lnRef>
+          <a:fillRef idx="1">
+            <a:schemeClr val="accent1"/>
+          </a:fillRef>
+          <a:effectRef idx="0">
+            <a:schemeClr val="accent1"/>
+          </a:effectRef>
+          <a:fontRef idx="minor">
+            <a:schemeClr val="lt1"/>
+          </a:fontRef>
+        </p:style>
+        <p:txBody>
+          <a:bodyPr rtlCol="0" anchor="ctr"/>
+          <a:lstStyle/>
+          <a:p>
             <a:pPr algn="ctr"/>
-            <a:r>
-              <a:rPr kumimoji="1" lang="ja-JP" altLang="en-US" sz="5200"/>
+            <a:endParaRPr lang="en-US"/>
+          </a:p>
+        </p:txBody>
+      </p:sp>
+      <p:sp>
+        <p:nvSpPr>
+          <p:cNvPr id="3" name="コンテンツ プレースホルダー 2">
+            <a:extLst>
+              <a:ext uri="{FF2B5EF4-FFF2-40B4-BE49-F238E27FC236}">
+                <a16:creationId xmlns:a16="http://schemas.microsoft.com/office/drawing/2014/main" id="{512A07E5-081A-30FB-0F08-F9F2422C7C7C}"/>
+              </a:ext>
+            </a:extLst>
+          </p:cNvPr>
+          <p:cNvSpPr>
+            <a:spLocks noGrp="1"/>
+          </p:cNvSpPr>
+          <p:nvPr>
+            <p:ph idx="1"/>
+          </p:nvPr>
+        </p:nvSpPr>
+        <p:spPr>
+          <a:xfrm>
+            <a:off x="838200" y="3253169"/>
+            <a:ext cx="10515600" cy="1018688"/>
+          </a:xfrm>
+        </p:spPr>
+        <p:txBody>
+          <a:bodyPr>
+            <a:noAutofit/>
+          </a:bodyPr>
+          <a:lstStyle/>
+          <a:p>
+            <a:pPr marL="0" indent="0">
+              <a:buNone/>
+            </a:pPr>
+            <a:r>
+              <a:rPr kumimoji="1" lang="ja-JP" altLang="en-US" sz="4800" dirty="0"/>
+              <a:t>自分がラーメンを大好きだからです</a:t>
+            </a:r>
+          </a:p>
+        </p:txBody>
+      </p:sp>
+    </p:spTree>
+    <p:extLst>
+      <p:ext uri="{BB962C8B-B14F-4D97-AF65-F5344CB8AC3E}">
+        <p14:creationId xmlns:p14="http://schemas.microsoft.com/office/powerpoint/2010/main" val="657649911"/>
+      </p:ext>
+    </p:extLst>
+  </p:cSld>
+  <p:clrMapOvr>
+    <a:masterClrMapping/>
+  </p:clrMapOvr>
+</p:sld>
+</file>
+
+<file path=ppt/slides/slide3.xml><?xml version="1.0" encoding="utf-8"?>
+<p:sld xmlns:a="http://schemas.openxmlformats.org/drawingml/2006/main" xmlns:r="http://schemas.openxmlformats.org/officeDocument/2006/relationships" xmlns:p="http://schemas.openxmlformats.org/presentationml/2006/main">
+  <p:cSld>
+    <p:bg>
+      <p:bgPr>
+        <a:solidFill>
+          <a:schemeClr val="bg1"/>
+        </a:solidFill>
+        <a:effectLst/>
+      </p:bgPr>
+    </p:bg>
+    <p:spTree>
+      <p:nvGrpSpPr>
+        <p:cNvPr id="1" name=""/>
+        <p:cNvGrpSpPr/>
+        <p:nvPr/>
+      </p:nvGrpSpPr>
+      <p:grpSpPr>
+        <a:xfrm>
+          <a:off x="0" y="0"/>
+          <a:ext cx="0" cy="0"/>
+          <a:chOff x="0" y="0"/>
+          <a:chExt cx="0" cy="0"/>
+        </a:xfrm>
+      </p:grpSpPr>
+      <p:sp useBgFill="1">
+        <p:nvSpPr>
+          <p:cNvPr id="43" name="Rectangle 42">
+            <a:extLst>
+              <a:ext uri="{FF2B5EF4-FFF2-40B4-BE49-F238E27FC236}">
+                <a16:creationId xmlns:a16="http://schemas.microsoft.com/office/drawing/2014/main" id="{BACC6370-2D7E-4714-9D71-7542949D7D5D}"/>
+              </a:ext>
+              <a:ext uri="{C183D7F6-B498-43B3-948B-1728B52AA6E4}">
+                <adec:decorative xmlns:adec="http://schemas.microsoft.com/office/drawing/2017/decorative" val="1"/>
+              </a:ext>
+            </a:extLst>
+          </p:cNvPr>
+          <p:cNvSpPr>
+            <a:spLocks noGrp="1" noRot="1" noChangeAspect="1" noMove="1" noResize="1" noEditPoints="1" noAdjustHandles="1" noChangeArrowheads="1" noChangeShapeType="1" noTextEdit="1"/>
+          </p:cNvSpPr>
+          <p:nvPr>
+            <p:extLst>
+              <p:ext uri="{386F3935-93C4-4BCD-93E2-E3B085C9AB24}">
+                <p16:designElem xmlns:p16="http://schemas.microsoft.com/office/powerpoint/2015/main" val="1"/>
+              </p:ext>
+            </p:extLst>
+          </p:nvPr>
+        </p:nvSpPr>
+        <p:spPr>
+          <a:xfrm>
+            <a:off x="0" y="0"/>
+            <a:ext cx="12192000" cy="6858000"/>
+          </a:xfrm>
+          <a:prstGeom prst="rect">
+            <a:avLst/>
+          </a:prstGeom>
+          <a:ln w="12700" cap="flat" cmpd="sng" algn="ctr">
+            <a:noFill/>
+            <a:prstDash val="solid"/>
+            <a:miter lim="800000"/>
+          </a:ln>
+          <a:effectLst/>
+          <a:extLst>
+            <a:ext uri="{91240B29-F687-4F45-9708-019B960494DF}">
+              <a14:hiddenLine xmlns:a14="http://schemas.microsoft.com/office/drawing/2010/main" w="12700" cap="flat" cmpd="sng" algn="ctr">
+                <a:solidFill>
+                  <a:schemeClr val="accent1">
+                    <a:shade val="50000"/>
+                  </a:schemeClr>
+                </a:solidFill>
+                <a:prstDash val="solid"/>
+                <a:miter lim="800000"/>
+              </a14:hiddenLine>
+            </a:ext>
+          </a:extLst>
+        </p:spPr>
+        <p:style>
+          <a:lnRef idx="2">
+            <a:schemeClr val="accent1">
+              <a:shade val="50000"/>
+            </a:schemeClr>
+          </a:lnRef>
+          <a:fillRef idx="1">
+            <a:schemeClr val="accent1"/>
+          </a:fillRef>
+          <a:effectRef idx="0">
+            <a:schemeClr val="accent1"/>
+          </a:effectRef>
+          <a:fontRef idx="minor">
+            <a:schemeClr val="lt1"/>
+          </a:fontRef>
+        </p:style>
+        <p:txBody>
+          <a:bodyPr rtlCol="0" anchor="ctr"/>
+          <a:lstStyle/>
+          <a:p>
+            <a:pPr algn="ctr"/>
+            <a:endParaRPr lang="en-US"/>
+          </a:p>
+        </p:txBody>
+      </p:sp>
+      <p:sp>
+        <p:nvSpPr>
+          <p:cNvPr id="45" name="Rectangle 44">
+            <a:extLst>
+              <a:ext uri="{FF2B5EF4-FFF2-40B4-BE49-F238E27FC236}">
+                <a16:creationId xmlns:a16="http://schemas.microsoft.com/office/drawing/2014/main" id="{F68B3F68-107C-434F-AA38-110D5EA91B85}"/>
+              </a:ext>
+              <a:ext uri="{C183D7F6-B498-43B3-948B-1728B52AA6E4}">
+                <adec:decorative xmlns:adec="http://schemas.microsoft.com/office/drawing/2017/decorative" val="1"/>
+              </a:ext>
+            </a:extLst>
+          </p:cNvPr>
+          <p:cNvSpPr>
+            <a:spLocks noGrp="1" noRot="1" noChangeAspect="1" noMove="1" noResize="1" noEditPoints="1" noAdjustHandles="1" noChangeArrowheads="1" noChangeShapeType="1" noTextEdit="1"/>
+          </p:cNvSpPr>
+          <p:nvPr>
+            <p:extLst>
+              <p:ext uri="{386F3935-93C4-4BCD-93E2-E3B085C9AB24}">
+                <p16:designElem xmlns:p16="http://schemas.microsoft.com/office/powerpoint/2015/main" val="1"/>
+              </p:ext>
+            </p:extLst>
+          </p:nvPr>
+        </p:nvSpPr>
+        <p:spPr>
+          <a:xfrm flipH="1">
+            <a:off x="2" y="0"/>
+            <a:ext cx="12191998" cy="1575955"/>
+          </a:xfrm>
+          <a:prstGeom prst="rect">
+            <a:avLst/>
+          </a:prstGeom>
+          <a:gradFill>
+            <a:gsLst>
+              <a:gs pos="0">
+                <a:srgbClr val="000000">
+                  <a:alpha val="96000"/>
+                </a:srgbClr>
+              </a:gs>
+              <a:gs pos="100000">
+                <a:schemeClr val="accent1">
+                  <a:lumMod val="75000"/>
+                </a:schemeClr>
+              </a:gs>
+            </a:gsLst>
+            <a:lin ang="8400000" scaled="0"/>
+          </a:gradFill>
+          <a:ln>
+            <a:noFill/>
+          </a:ln>
+        </p:spPr>
+        <p:style>
+          <a:lnRef idx="2">
+            <a:schemeClr val="accent1">
+              <a:shade val="50000"/>
+            </a:schemeClr>
+          </a:lnRef>
+          <a:fillRef idx="1">
+            <a:schemeClr val="accent1"/>
+          </a:fillRef>
+          <a:effectRef idx="0">
+            <a:schemeClr val="accent1"/>
+          </a:effectRef>
+          <a:fontRef idx="minor">
+            <a:schemeClr val="lt1"/>
+          </a:fontRef>
+        </p:style>
+        <p:txBody>
+          <a:bodyPr rtlCol="0" anchor="ctr"/>
+          <a:lstStyle/>
+          <a:p>
+            <a:pPr algn="ctr"/>
+            <a:endParaRPr lang="en-US"/>
+          </a:p>
+        </p:txBody>
+      </p:sp>
+      <p:sp>
+        <p:nvSpPr>
+          <p:cNvPr id="47" name="Rectangle 46">
+            <a:extLst>
+              <a:ext uri="{FF2B5EF4-FFF2-40B4-BE49-F238E27FC236}">
+                <a16:creationId xmlns:a16="http://schemas.microsoft.com/office/drawing/2014/main" id="{AAD0DBB9-1A4B-4391-81D4-CB19F9AB918A}"/>
+              </a:ext>
+              <a:ext uri="{C183D7F6-B498-43B3-948B-1728B52AA6E4}">
+                <adec:decorative xmlns:adec="http://schemas.microsoft.com/office/drawing/2017/decorative" val="1"/>
+              </a:ext>
+            </a:extLst>
+          </p:cNvPr>
+          <p:cNvSpPr>
+            <a:spLocks noGrp="1" noRot="1" noChangeAspect="1" noMove="1" noResize="1" noEditPoints="1" noAdjustHandles="1" noChangeArrowheads="1" noChangeShapeType="1" noTextEdit="1"/>
+          </p:cNvSpPr>
+          <p:nvPr>
+            <p:extLst>
+              <p:ext uri="{386F3935-93C4-4BCD-93E2-E3B085C9AB24}">
+                <p16:designElem xmlns:p16="http://schemas.microsoft.com/office/powerpoint/2015/main" val="1"/>
+              </p:ext>
+            </p:extLst>
+          </p:nvPr>
+        </p:nvSpPr>
+        <p:spPr>
+          <a:xfrm rot="10800000" flipH="1">
+            <a:off x="8128857" y="0"/>
+            <a:ext cx="4063143" cy="1576412"/>
+          </a:xfrm>
+          <a:prstGeom prst="rect">
+            <a:avLst/>
+          </a:prstGeom>
+          <a:gradFill>
+            <a:gsLst>
+              <a:gs pos="19000">
+                <a:schemeClr val="accent1">
+                  <a:lumMod val="50000"/>
+                  <a:alpha val="68000"/>
+                </a:schemeClr>
+              </a:gs>
+              <a:gs pos="100000">
+                <a:schemeClr val="accent1">
+                  <a:alpha val="79000"/>
+                </a:schemeClr>
+              </a:gs>
+            </a:gsLst>
+            <a:lin ang="19200000" scaled="0"/>
+          </a:gradFill>
+          <a:ln>
+            <a:noFill/>
+          </a:ln>
+        </p:spPr>
+        <p:style>
+          <a:lnRef idx="2">
+            <a:schemeClr val="accent1">
+              <a:shade val="50000"/>
+            </a:schemeClr>
+          </a:lnRef>
+          <a:fillRef idx="1">
+            <a:schemeClr val="accent1"/>
+          </a:fillRef>
+          <a:effectRef idx="0">
+            <a:schemeClr val="accent1"/>
+          </a:effectRef>
+          <a:fontRef idx="minor">
+            <a:schemeClr val="lt1"/>
+          </a:fontRef>
+        </p:style>
+        <p:txBody>
+          <a:bodyPr rtlCol="0" anchor="ctr"/>
+          <a:lstStyle/>
+          <a:p>
+            <a:pPr algn="ctr"/>
+            <a:endParaRPr lang="en-US"/>
+          </a:p>
+        </p:txBody>
+      </p:sp>
+      <p:sp>
+        <p:nvSpPr>
+          <p:cNvPr id="49" name="Rectangle 48">
+            <a:extLst>
+              <a:ext uri="{FF2B5EF4-FFF2-40B4-BE49-F238E27FC236}">
+                <a16:creationId xmlns:a16="http://schemas.microsoft.com/office/drawing/2014/main" id="{063BBA22-50EA-4C4D-BE05-F1CE4E63AA56}"/>
+              </a:ext>
+              <a:ext uri="{C183D7F6-B498-43B3-948B-1728B52AA6E4}">
+                <adec:decorative xmlns:adec="http://schemas.microsoft.com/office/drawing/2017/decorative" val="1"/>
+              </a:ext>
+            </a:extLst>
+          </p:cNvPr>
+          <p:cNvSpPr>
+            <a:spLocks noGrp="1" noRot="1" noChangeAspect="1" noMove="1" noResize="1" noEditPoints="1" noAdjustHandles="1" noChangeArrowheads="1" noChangeShapeType="1" noTextEdit="1"/>
+          </p:cNvSpPr>
+          <p:nvPr>
+            <p:extLst>
+              <p:ext uri="{386F3935-93C4-4BCD-93E2-E3B085C9AB24}">
+                <p16:designElem xmlns:p16="http://schemas.microsoft.com/office/powerpoint/2015/main" val="1"/>
+              </p:ext>
+            </p:extLst>
+          </p:nvPr>
+        </p:nvSpPr>
+        <p:spPr>
+          <a:xfrm rot="5400000">
+            <a:off x="5307777" y="-5307778"/>
+            <a:ext cx="1576446" cy="12192002"/>
+          </a:xfrm>
+          <a:prstGeom prst="rect">
+            <a:avLst/>
+          </a:prstGeom>
+          <a:gradFill>
+            <a:gsLst>
+              <a:gs pos="23000">
+                <a:schemeClr val="accent1">
+                  <a:alpha val="0"/>
+                </a:schemeClr>
+              </a:gs>
+              <a:gs pos="99000">
+                <a:srgbClr val="000000">
+                  <a:alpha val="74000"/>
+                </a:srgbClr>
+              </a:gs>
+            </a:gsLst>
+            <a:lin ang="20400000" scaled="0"/>
+          </a:gradFill>
+          <a:ln>
+            <a:noFill/>
+          </a:ln>
+        </p:spPr>
+        <p:style>
+          <a:lnRef idx="2">
+            <a:schemeClr val="accent1">
+              <a:shade val="50000"/>
+            </a:schemeClr>
+          </a:lnRef>
+          <a:fillRef idx="1">
+            <a:schemeClr val="accent1"/>
+          </a:fillRef>
+          <a:effectRef idx="0">
+            <a:schemeClr val="accent1"/>
+          </a:effectRef>
+          <a:fontRef idx="minor">
+            <a:schemeClr val="lt1"/>
+          </a:fontRef>
+        </p:style>
+        <p:txBody>
+          <a:bodyPr rtlCol="0" anchor="ctr"/>
+          <a:lstStyle/>
+          <a:p>
+            <a:pPr algn="ctr"/>
+            <a:endParaRPr lang="en-US" dirty="0"/>
+          </a:p>
+        </p:txBody>
+      </p:sp>
+      <p:sp>
+        <p:nvSpPr>
+          <p:cNvPr id="2" name="タイトル 1">
+            <a:extLst>
+              <a:ext uri="{FF2B5EF4-FFF2-40B4-BE49-F238E27FC236}">
+                <a16:creationId xmlns:a16="http://schemas.microsoft.com/office/drawing/2014/main" id="{37F8E801-5E88-641A-6DE8-B9496D4CC168}"/>
+              </a:ext>
+            </a:extLst>
+          </p:cNvPr>
+          <p:cNvSpPr>
+            <a:spLocks noGrp="1"/>
+          </p:cNvSpPr>
+          <p:nvPr>
+            <p:ph type="title"/>
+          </p:nvPr>
+        </p:nvSpPr>
+        <p:spPr>
+          <a:xfrm>
+            <a:off x="1371597" y="348865"/>
+            <a:ext cx="10044023" cy="877729"/>
+          </a:xfrm>
+        </p:spPr>
+        <p:txBody>
+          <a:bodyPr anchor="ctr">
+            <a:normAutofit/>
+          </a:bodyPr>
+          <a:lstStyle/>
+          <a:p>
+            <a:r>
+              <a:rPr kumimoji="1" lang="ja-JP" altLang="en-US" sz="4000">
+                <a:solidFill>
+                  <a:srgbClr val="FFFFFF"/>
+                </a:solidFill>
+              </a:rPr>
               <a:t>どのようなアプリか</a:t>
             </a:r>
           </a:p>
@@ -7484,14 +8412,14 @@
             <p:ph idx="1"/>
             <p:extLst>
               <p:ext uri="{D42A27DB-BD31-4B8C-83A1-F6EECF244321}">
-                <p14:modId xmlns:p14="http://schemas.microsoft.com/office/powerpoint/2010/main" val="4277582574"/>
+                <p14:modId xmlns:p14="http://schemas.microsoft.com/office/powerpoint/2010/main" val="2548682798"/>
               </p:ext>
             </p:extLst>
           </p:nvPr>
         </p:nvGraphicFramePr>
         <p:xfrm>
-          <a:off x="838200" y="1828800"/>
-          <a:ext cx="10515600" cy="4352544"/>
+          <a:off x="644056" y="2112579"/>
+          <a:ext cx="10927829" cy="4192805"/>
         </p:xfrm>
         <a:graphic>
           <a:graphicData uri="http://schemas.openxmlformats.org/drawingml/2006/diagram">
@@ -7512,7 +8440,631 @@
 </p:sld>
 </file>
 
-<file path=ppt/slides/slide3.xml><?xml version="1.0" encoding="utf-8"?>
+<file path=ppt/slides/slide4.xml><?xml version="1.0" encoding="utf-8"?>
+<p:sld xmlns:a="http://schemas.openxmlformats.org/drawingml/2006/main" xmlns:r="http://schemas.openxmlformats.org/officeDocument/2006/relationships" xmlns:p="http://schemas.openxmlformats.org/presentationml/2006/main">
+  <p:cSld>
+    <p:bg>
+      <p:bgPr>
+        <a:solidFill>
+          <a:schemeClr val="bg1"/>
+        </a:solidFill>
+        <a:effectLst/>
+      </p:bgPr>
+    </p:bg>
+    <p:spTree>
+      <p:nvGrpSpPr>
+        <p:cNvPr id="1" name=""/>
+        <p:cNvGrpSpPr/>
+        <p:nvPr/>
+      </p:nvGrpSpPr>
+      <p:grpSpPr>
+        <a:xfrm>
+          <a:off x="0" y="0"/>
+          <a:ext cx="0" cy="0"/>
+          <a:chOff x="0" y="0"/>
+          <a:chExt cx="0" cy="0"/>
+        </a:xfrm>
+      </p:grpSpPr>
+      <p:sp useBgFill="1">
+        <p:nvSpPr>
+          <p:cNvPr id="7" name="Rectangle 6">
+            <a:extLst>
+              <a:ext uri="{FF2B5EF4-FFF2-40B4-BE49-F238E27FC236}">
+                <a16:creationId xmlns:a16="http://schemas.microsoft.com/office/drawing/2014/main" id="{FFD48BC7-DC40-47DE-87EE-9F4B6ECB9ABB}"/>
+              </a:ext>
+              <a:ext uri="{C183D7F6-B498-43B3-948B-1728B52AA6E4}">
+                <adec:decorative xmlns:adec="http://schemas.microsoft.com/office/drawing/2017/decorative" val="1"/>
+              </a:ext>
+            </a:extLst>
+          </p:cNvPr>
+          <p:cNvSpPr>
+            <a:spLocks noGrp="1" noRot="1" noChangeAspect="1" noMove="1" noResize="1" noEditPoints="1" noAdjustHandles="1" noChangeArrowheads="1" noChangeShapeType="1" noTextEdit="1"/>
+          </p:cNvSpPr>
+          <p:nvPr>
+            <p:extLst>
+              <p:ext uri="{386F3935-93C4-4BCD-93E2-E3B085C9AB24}">
+                <p16:designElem xmlns:p16="http://schemas.microsoft.com/office/powerpoint/2015/main" val="1"/>
+              </p:ext>
+            </p:extLst>
+          </p:nvPr>
+        </p:nvSpPr>
+        <p:spPr>
+          <a:xfrm>
+            <a:off x="0" y="0"/>
+            <a:ext cx="12192000" cy="6858000"/>
+          </a:xfrm>
+          <a:prstGeom prst="rect">
+            <a:avLst/>
+          </a:prstGeom>
+          <a:ln>
+            <a:noFill/>
+          </a:ln>
+        </p:spPr>
+        <p:style>
+          <a:lnRef idx="2">
+            <a:schemeClr val="accent1">
+              <a:shade val="50000"/>
+            </a:schemeClr>
+          </a:lnRef>
+          <a:fillRef idx="1">
+            <a:schemeClr val="accent1"/>
+          </a:fillRef>
+          <a:effectRef idx="0">
+            <a:schemeClr val="accent1"/>
+          </a:effectRef>
+          <a:fontRef idx="minor">
+            <a:schemeClr val="lt1"/>
+          </a:fontRef>
+        </p:style>
+        <p:txBody>
+          <a:bodyPr rtlCol="0" anchor="ctr"/>
+          <a:lstStyle/>
+          <a:p>
+            <a:pPr algn="ctr"/>
+            <a:endParaRPr lang="en-US"/>
+          </a:p>
+        </p:txBody>
+      </p:sp>
+      <p:sp useBgFill="1">
+        <p:nvSpPr>
+          <p:cNvPr id="9" name="Freeform: Shape 8">
+            <a:extLst>
+              <a:ext uri="{FF2B5EF4-FFF2-40B4-BE49-F238E27FC236}">
+                <a16:creationId xmlns:a16="http://schemas.microsoft.com/office/drawing/2014/main" id="{E502BBC7-2C76-46F3-BC24-5985BC13DB88}"/>
+              </a:ext>
+              <a:ext uri="{C183D7F6-B498-43B3-948B-1728B52AA6E4}">
+                <adec:decorative xmlns:adec="http://schemas.microsoft.com/office/drawing/2017/decorative" val="1"/>
+              </a:ext>
+            </a:extLst>
+          </p:cNvPr>
+          <p:cNvSpPr>
+            <a:spLocks noGrp="1" noRot="1" noChangeAspect="1" noMove="1" noResize="1" noEditPoints="1" noAdjustHandles="1" noChangeArrowheads="1" noChangeShapeType="1" noTextEdit="1"/>
+          </p:cNvSpPr>
+          <p:nvPr>
+            <p:extLst>
+              <p:ext uri="{386F3935-93C4-4BCD-93E2-E3B085C9AB24}">
+                <p16:designElem xmlns:p16="http://schemas.microsoft.com/office/powerpoint/2015/main" val="1"/>
+              </p:ext>
+            </p:extLst>
+          </p:nvPr>
+        </p:nvSpPr>
+        <p:spPr>
+          <a:xfrm>
+            <a:off x="1114425" y="0"/>
+            <a:ext cx="9963150" cy="6858000"/>
+          </a:xfrm>
+          <a:custGeom>
+            <a:avLst/>
+            <a:gdLst>
+              <a:gd name="connsiteX0" fmla="*/ 1595771 w 9963150"/>
+              <a:gd name="connsiteY0" fmla="*/ 0 h 6858000"/>
+              <a:gd name="connsiteX1" fmla="*/ 8367379 w 9963150"/>
+              <a:gd name="connsiteY1" fmla="*/ 0 h 6858000"/>
+              <a:gd name="connsiteX2" fmla="*/ 8504080 w 9963150"/>
+              <a:gd name="connsiteY2" fmla="*/ 130333 h 6858000"/>
+              <a:gd name="connsiteX3" fmla="*/ 9963150 w 9963150"/>
+              <a:gd name="connsiteY3" fmla="*/ 3652838 h 6858000"/>
+              <a:gd name="connsiteX4" fmla="*/ 8825600 w 9963150"/>
+              <a:gd name="connsiteY4" fmla="*/ 6821583 h 6858000"/>
+              <a:gd name="connsiteX5" fmla="*/ 8794055 w 9963150"/>
+              <a:gd name="connsiteY5" fmla="*/ 6858000 h 6858000"/>
+              <a:gd name="connsiteX6" fmla="*/ 1169096 w 9963150"/>
+              <a:gd name="connsiteY6" fmla="*/ 6858000 h 6858000"/>
+              <a:gd name="connsiteX7" fmla="*/ 1137550 w 9963150"/>
+              <a:gd name="connsiteY7" fmla="*/ 6821583 h 6858000"/>
+              <a:gd name="connsiteX8" fmla="*/ 0 w 9963150"/>
+              <a:gd name="connsiteY8" fmla="*/ 3652838 h 6858000"/>
+              <a:gd name="connsiteX9" fmla="*/ 1459070 w 9963150"/>
+              <a:gd name="connsiteY9" fmla="*/ 130333 h 6858000"/>
+            </a:gdLst>
+            <a:ahLst/>
+            <a:cxnLst>
+              <a:cxn ang="0">
+                <a:pos x="connsiteX0" y="connsiteY0"/>
+              </a:cxn>
+              <a:cxn ang="0">
+                <a:pos x="connsiteX1" y="connsiteY1"/>
+              </a:cxn>
+              <a:cxn ang="0">
+                <a:pos x="connsiteX2" y="connsiteY2"/>
+              </a:cxn>
+              <a:cxn ang="0">
+                <a:pos x="connsiteX3" y="connsiteY3"/>
+              </a:cxn>
+              <a:cxn ang="0">
+                <a:pos x="connsiteX4" y="connsiteY4"/>
+              </a:cxn>
+              <a:cxn ang="0">
+                <a:pos x="connsiteX5" y="connsiteY5"/>
+              </a:cxn>
+              <a:cxn ang="0">
+                <a:pos x="connsiteX6" y="connsiteY6"/>
+              </a:cxn>
+              <a:cxn ang="0">
+                <a:pos x="connsiteX7" y="connsiteY7"/>
+              </a:cxn>
+              <a:cxn ang="0">
+                <a:pos x="connsiteX8" y="connsiteY8"/>
+              </a:cxn>
+              <a:cxn ang="0">
+                <a:pos x="connsiteX9" y="connsiteY9"/>
+              </a:cxn>
+            </a:cxnLst>
+            <a:rect l="l" t="t" r="r" b="b"/>
+            <a:pathLst>
+              <a:path w="9963150" h="6858000">
+                <a:moveTo>
+                  <a:pt x="1595771" y="0"/>
+                </a:moveTo>
+                <a:lnTo>
+                  <a:pt x="8367379" y="0"/>
+                </a:lnTo>
+                <a:lnTo>
+                  <a:pt x="8504080" y="130333"/>
+                </a:lnTo>
+                <a:cubicBezTo>
+                  <a:pt x="9405568" y="1031820"/>
+                  <a:pt x="9963150" y="2277214"/>
+                  <a:pt x="9963150" y="3652838"/>
+                </a:cubicBezTo>
+                <a:cubicBezTo>
+                  <a:pt x="9963150" y="4856509"/>
+                  <a:pt x="9536251" y="5960473"/>
+                  <a:pt x="8825600" y="6821583"/>
+                </a:cubicBezTo>
+                <a:lnTo>
+                  <a:pt x="8794055" y="6858000"/>
+                </a:lnTo>
+                <a:lnTo>
+                  <a:pt x="1169096" y="6858000"/>
+                </a:lnTo>
+                <a:lnTo>
+                  <a:pt x="1137550" y="6821583"/>
+                </a:lnTo>
+                <a:cubicBezTo>
+                  <a:pt x="426899" y="5960473"/>
+                  <a:pt x="0" y="4856509"/>
+                  <a:pt x="0" y="3652838"/>
+                </a:cubicBezTo>
+                <a:cubicBezTo>
+                  <a:pt x="0" y="2277214"/>
+                  <a:pt x="557582" y="1031820"/>
+                  <a:pt x="1459070" y="130333"/>
+                </a:cubicBezTo>
+                <a:close/>
+              </a:path>
+            </a:pathLst>
+          </a:custGeom>
+          <a:ln w="9525">
+            <a:solidFill>
+              <a:srgbClr val="EFEFEF"/>
+            </a:solidFill>
+          </a:ln>
+          <a:effectLst>
+            <a:outerShdw blurRad="139700" sx="102000" sy="102000" algn="ctr" rotWithShape="0">
+              <a:schemeClr val="bg1">
+                <a:lumMod val="85000"/>
+                <a:alpha val="38000"/>
+              </a:schemeClr>
+            </a:outerShdw>
+          </a:effectLst>
+        </p:spPr>
+        <p:style>
+          <a:lnRef idx="2">
+            <a:schemeClr val="accent1">
+              <a:shade val="50000"/>
+            </a:schemeClr>
+          </a:lnRef>
+          <a:fillRef idx="1">
+            <a:schemeClr val="accent1"/>
+          </a:fillRef>
+          <a:effectRef idx="0">
+            <a:schemeClr val="accent1"/>
+          </a:effectRef>
+          <a:fontRef idx="minor">
+            <a:schemeClr val="lt1"/>
+          </a:fontRef>
+        </p:style>
+        <p:txBody>
+          <a:bodyPr wrap="square" rtlCol="0" anchor="ctr">
+            <a:noAutofit/>
+          </a:bodyPr>
+          <a:lstStyle/>
+          <a:p>
+            <a:pPr marL="0" marR="0" lvl="0" indent="0" algn="ctr" defTabSz="914400" rtl="0" eaLnBrk="1" fontAlgn="auto" latinLnBrk="0" hangingPunct="1">
+              <a:lnSpc>
+                <a:spcPct val="100000"/>
+              </a:lnSpc>
+              <a:spcBef>
+                <a:spcPts val="0"/>
+              </a:spcBef>
+              <a:spcAft>
+                <a:spcPts val="0"/>
+              </a:spcAft>
+              <a:buClrTx/>
+              <a:buSzTx/>
+              <a:buFontTx/>
+              <a:buNone/>
+              <a:tabLst/>
+              <a:defRPr/>
+            </a:pPr>
+            <a:endParaRPr kumimoji="0" lang="en-US" sz="1800" b="0" i="0" u="none" strike="noStrike" kern="1200" cap="none" spc="0" normalizeH="0" baseline="0" noProof="0">
+              <a:ln>
+                <a:noFill/>
+              </a:ln>
+              <a:solidFill>
+                <a:prstClr val="white"/>
+              </a:solidFill>
+              <a:effectLst/>
+              <a:uLnTx/>
+              <a:uFillTx/>
+              <a:latin typeface="Calibri" panose="020F0502020204030204"/>
+              <a:ea typeface="+mn-ea"/>
+              <a:cs typeface="+mn-cs"/>
+            </a:endParaRPr>
+          </a:p>
+        </p:txBody>
+      </p:sp>
+      <p:sp useBgFill="1">
+        <p:nvSpPr>
+          <p:cNvPr id="11" name="Freeform: Shape 10">
+            <a:extLst>
+              <a:ext uri="{FF2B5EF4-FFF2-40B4-BE49-F238E27FC236}">
+                <a16:creationId xmlns:a16="http://schemas.microsoft.com/office/drawing/2014/main" id="{C7F28D52-2A5F-4D23-81AE-7CB8B591C7AF}"/>
+              </a:ext>
+              <a:ext uri="{C183D7F6-B498-43B3-948B-1728B52AA6E4}">
+                <adec:decorative xmlns:adec="http://schemas.microsoft.com/office/drawing/2017/decorative" val="1"/>
+              </a:ext>
+            </a:extLst>
+          </p:cNvPr>
+          <p:cNvSpPr>
+            <a:spLocks noGrp="1" noRot="1" noChangeAspect="1" noMove="1" noResize="1" noEditPoints="1" noAdjustHandles="1" noChangeArrowheads="1" noChangeShapeType="1" noTextEdit="1"/>
+          </p:cNvSpPr>
+          <p:nvPr>
+            <p:extLst>
+              <p:ext uri="{386F3935-93C4-4BCD-93E2-E3B085C9AB24}">
+                <p16:designElem xmlns:p16="http://schemas.microsoft.com/office/powerpoint/2015/main" val="1"/>
+              </p:ext>
+            </p:extLst>
+          </p:nvPr>
+        </p:nvSpPr>
+        <p:spPr>
+          <a:xfrm>
+            <a:off x="1121664" y="0"/>
+            <a:ext cx="9948672" cy="6858000"/>
+          </a:xfrm>
+          <a:custGeom>
+            <a:avLst/>
+            <a:gdLst>
+              <a:gd name="connsiteX0" fmla="*/ 1595771 w 9963150"/>
+              <a:gd name="connsiteY0" fmla="*/ 0 h 6858000"/>
+              <a:gd name="connsiteX1" fmla="*/ 8367379 w 9963150"/>
+              <a:gd name="connsiteY1" fmla="*/ 0 h 6858000"/>
+              <a:gd name="connsiteX2" fmla="*/ 8504080 w 9963150"/>
+              <a:gd name="connsiteY2" fmla="*/ 130333 h 6858000"/>
+              <a:gd name="connsiteX3" fmla="*/ 9963150 w 9963150"/>
+              <a:gd name="connsiteY3" fmla="*/ 3652838 h 6858000"/>
+              <a:gd name="connsiteX4" fmla="*/ 8825600 w 9963150"/>
+              <a:gd name="connsiteY4" fmla="*/ 6821583 h 6858000"/>
+              <a:gd name="connsiteX5" fmla="*/ 8794055 w 9963150"/>
+              <a:gd name="connsiteY5" fmla="*/ 6858000 h 6858000"/>
+              <a:gd name="connsiteX6" fmla="*/ 1169096 w 9963150"/>
+              <a:gd name="connsiteY6" fmla="*/ 6858000 h 6858000"/>
+              <a:gd name="connsiteX7" fmla="*/ 1137550 w 9963150"/>
+              <a:gd name="connsiteY7" fmla="*/ 6821583 h 6858000"/>
+              <a:gd name="connsiteX8" fmla="*/ 0 w 9963150"/>
+              <a:gd name="connsiteY8" fmla="*/ 3652838 h 6858000"/>
+              <a:gd name="connsiteX9" fmla="*/ 1459070 w 9963150"/>
+              <a:gd name="connsiteY9" fmla="*/ 130333 h 6858000"/>
+            </a:gdLst>
+            <a:ahLst/>
+            <a:cxnLst>
+              <a:cxn ang="0">
+                <a:pos x="connsiteX0" y="connsiteY0"/>
+              </a:cxn>
+              <a:cxn ang="0">
+                <a:pos x="connsiteX1" y="connsiteY1"/>
+              </a:cxn>
+              <a:cxn ang="0">
+                <a:pos x="connsiteX2" y="connsiteY2"/>
+              </a:cxn>
+              <a:cxn ang="0">
+                <a:pos x="connsiteX3" y="connsiteY3"/>
+              </a:cxn>
+              <a:cxn ang="0">
+                <a:pos x="connsiteX4" y="connsiteY4"/>
+              </a:cxn>
+              <a:cxn ang="0">
+                <a:pos x="connsiteX5" y="connsiteY5"/>
+              </a:cxn>
+              <a:cxn ang="0">
+                <a:pos x="connsiteX6" y="connsiteY6"/>
+              </a:cxn>
+              <a:cxn ang="0">
+                <a:pos x="connsiteX7" y="connsiteY7"/>
+              </a:cxn>
+              <a:cxn ang="0">
+                <a:pos x="connsiteX8" y="connsiteY8"/>
+              </a:cxn>
+              <a:cxn ang="0">
+                <a:pos x="connsiteX9" y="connsiteY9"/>
+              </a:cxn>
+            </a:cxnLst>
+            <a:rect l="l" t="t" r="r" b="b"/>
+            <a:pathLst>
+              <a:path w="9963150" h="6858000">
+                <a:moveTo>
+                  <a:pt x="1595771" y="0"/>
+                </a:moveTo>
+                <a:lnTo>
+                  <a:pt x="8367379" y="0"/>
+                </a:lnTo>
+                <a:lnTo>
+                  <a:pt x="8504080" y="130333"/>
+                </a:lnTo>
+                <a:cubicBezTo>
+                  <a:pt x="9405568" y="1031820"/>
+                  <a:pt x="9963150" y="2277214"/>
+                  <a:pt x="9963150" y="3652838"/>
+                </a:cubicBezTo>
+                <a:cubicBezTo>
+                  <a:pt x="9963150" y="4856509"/>
+                  <a:pt x="9536251" y="5960473"/>
+                  <a:pt x="8825600" y="6821583"/>
+                </a:cubicBezTo>
+                <a:lnTo>
+                  <a:pt x="8794055" y="6858000"/>
+                </a:lnTo>
+                <a:lnTo>
+                  <a:pt x="1169096" y="6858000"/>
+                </a:lnTo>
+                <a:lnTo>
+                  <a:pt x="1137550" y="6821583"/>
+                </a:lnTo>
+                <a:cubicBezTo>
+                  <a:pt x="426899" y="5960473"/>
+                  <a:pt x="0" y="4856509"/>
+                  <a:pt x="0" y="3652838"/>
+                </a:cubicBezTo>
+                <a:cubicBezTo>
+                  <a:pt x="0" y="2277214"/>
+                  <a:pt x="557582" y="1031820"/>
+                  <a:pt x="1459070" y="130333"/>
+                </a:cubicBezTo>
+                <a:close/>
+              </a:path>
+            </a:pathLst>
+          </a:custGeom>
+          <a:ln w="9525">
+            <a:noFill/>
+          </a:ln>
+          <a:effectLst/>
+        </p:spPr>
+        <p:style>
+          <a:lnRef idx="2">
+            <a:schemeClr val="accent1">
+              <a:shade val="50000"/>
+            </a:schemeClr>
+          </a:lnRef>
+          <a:fillRef idx="1">
+            <a:schemeClr val="accent1"/>
+          </a:fillRef>
+          <a:effectRef idx="0">
+            <a:schemeClr val="accent1"/>
+          </a:effectRef>
+          <a:fontRef idx="minor">
+            <a:schemeClr val="lt1"/>
+          </a:fontRef>
+        </p:style>
+        <p:txBody>
+          <a:bodyPr wrap="square" rtlCol="0" anchor="ctr">
+            <a:noAutofit/>
+          </a:bodyPr>
+          <a:lstStyle/>
+          <a:p>
+            <a:pPr marL="0" marR="0" lvl="0" indent="0" algn="ctr" defTabSz="914400" rtl="0" eaLnBrk="1" fontAlgn="auto" latinLnBrk="0" hangingPunct="1">
+              <a:lnSpc>
+                <a:spcPct val="100000"/>
+              </a:lnSpc>
+              <a:spcBef>
+                <a:spcPts val="0"/>
+              </a:spcBef>
+              <a:spcAft>
+                <a:spcPts val="0"/>
+              </a:spcAft>
+              <a:buClrTx/>
+              <a:buSzTx/>
+              <a:buFontTx/>
+              <a:buNone/>
+              <a:tabLst/>
+              <a:defRPr/>
+            </a:pPr>
+            <a:endParaRPr kumimoji="0" lang="en-US" sz="1800" b="0" i="0" u="none" strike="noStrike" kern="1200" cap="none" spc="0" normalizeH="0" baseline="0" noProof="0">
+              <a:ln>
+                <a:noFill/>
+              </a:ln>
+              <a:solidFill>
+                <a:prstClr val="white"/>
+              </a:solidFill>
+              <a:effectLst/>
+              <a:uLnTx/>
+              <a:uFillTx/>
+              <a:latin typeface="Calibri" panose="020F0502020204030204"/>
+              <a:ea typeface="+mn-ea"/>
+              <a:cs typeface="+mn-cs"/>
+            </a:endParaRPr>
+          </a:p>
+        </p:txBody>
+      </p:sp>
+      <p:sp>
+        <p:nvSpPr>
+          <p:cNvPr id="2" name="タイトル 1">
+            <a:extLst>
+              <a:ext uri="{FF2B5EF4-FFF2-40B4-BE49-F238E27FC236}">
+                <a16:creationId xmlns:a16="http://schemas.microsoft.com/office/drawing/2014/main" id="{BA59AE61-8876-BD25-68C1-1FB5AA5D8DE2}"/>
+              </a:ext>
+            </a:extLst>
+          </p:cNvPr>
+          <p:cNvSpPr>
+            <a:spLocks noGrp="1"/>
+          </p:cNvSpPr>
+          <p:nvPr>
+            <p:ph type="title"/>
+          </p:nvPr>
+        </p:nvSpPr>
+        <p:spPr>
+          <a:xfrm>
+            <a:off x="1524003" y="1999615"/>
+            <a:ext cx="9144000" cy="2764028"/>
+          </a:xfrm>
+        </p:spPr>
+        <p:txBody>
+          <a:bodyPr vert="horz" lIns="91440" tIns="45720" rIns="91440" bIns="45720" rtlCol="0" anchor="ctr">
+            <a:normAutofit/>
+          </a:bodyPr>
+          <a:lstStyle/>
+          <a:p>
+            <a:pPr algn="ctr"/>
+            <a:r>
+              <a:rPr kumimoji="1" lang="ja-JP" altLang="en-US" sz="7200" kern="1200">
+                <a:solidFill>
+                  <a:schemeClr val="tx1"/>
+                </a:solidFill>
+                <a:latin typeface="+mj-lt"/>
+                <a:ea typeface="+mj-ea"/>
+                <a:cs typeface="+mj-cs"/>
+              </a:rPr>
+              <a:t>実機説明</a:t>
+            </a:r>
+          </a:p>
+        </p:txBody>
+      </p:sp>
+      <p:sp>
+        <p:nvSpPr>
+          <p:cNvPr id="13" name="Rectangle 12">
+            <a:extLst>
+              <a:ext uri="{FF2B5EF4-FFF2-40B4-BE49-F238E27FC236}">
+                <a16:creationId xmlns:a16="http://schemas.microsoft.com/office/drawing/2014/main" id="{3629484E-3792-4B3D-89AD-7C8A1ED0E0D4}"/>
+              </a:ext>
+              <a:ext uri="{C183D7F6-B498-43B3-948B-1728B52AA6E4}">
+                <adec:decorative xmlns:adec="http://schemas.microsoft.com/office/drawing/2017/decorative" val="1"/>
+              </a:ext>
+            </a:extLst>
+          </p:cNvPr>
+          <p:cNvSpPr>
+            <a:spLocks noGrp="1" noRot="1" noChangeAspect="1" noMove="1" noResize="1" noEditPoints="1" noAdjustHandles="1" noChangeArrowheads="1" noChangeShapeType="1" noTextEdit="1"/>
+          </p:cNvSpPr>
+          <p:nvPr>
+            <p:extLst>
+              <p:ext uri="{386F3935-93C4-4BCD-93E2-E3B085C9AB24}">
+                <p16:designElem xmlns:p16="http://schemas.microsoft.com/office/powerpoint/2015/main" val="1"/>
+              </p:ext>
+            </p:extLst>
+          </p:nvPr>
+        </p:nvSpPr>
+        <p:spPr>
+          <a:xfrm>
+            <a:off x="3718560" y="5524786"/>
+            <a:ext cx="4754880" cy="27432"/>
+          </a:xfrm>
+          <a:prstGeom prst="rect">
+            <a:avLst/>
+          </a:prstGeom>
+          <a:solidFill>
+            <a:schemeClr val="accent2"/>
+          </a:solidFill>
+          <a:ln>
+            <a:noFill/>
+          </a:ln>
+        </p:spPr>
+        <p:style>
+          <a:lnRef idx="2">
+            <a:schemeClr val="accent1">
+              <a:shade val="50000"/>
+            </a:schemeClr>
+          </a:lnRef>
+          <a:fillRef idx="1">
+            <a:schemeClr val="accent1"/>
+          </a:fillRef>
+          <a:effectRef idx="0">
+            <a:schemeClr val="accent1"/>
+          </a:effectRef>
+          <a:fontRef idx="minor">
+            <a:schemeClr val="lt1"/>
+          </a:fontRef>
+        </p:style>
+        <p:txBody>
+          <a:bodyPr rtlCol="0" anchor="ctr"/>
+          <a:lstStyle/>
+          <a:p>
+            <a:pPr marL="0" marR="0" lvl="0" indent="0" algn="ctr" defTabSz="914400" rtl="0" eaLnBrk="1" fontAlgn="auto" latinLnBrk="0" hangingPunct="1">
+              <a:lnSpc>
+                <a:spcPct val="100000"/>
+              </a:lnSpc>
+              <a:spcBef>
+                <a:spcPts val="0"/>
+              </a:spcBef>
+              <a:spcAft>
+                <a:spcPts val="0"/>
+              </a:spcAft>
+              <a:buClrTx/>
+              <a:buSzTx/>
+              <a:buFontTx/>
+              <a:buNone/>
+              <a:tabLst/>
+              <a:defRPr/>
+            </a:pPr>
+            <a:endParaRPr kumimoji="0" lang="en-US" sz="1800" b="0" i="0" u="none" strike="noStrike" kern="1200" cap="none" spc="0" normalizeH="0" baseline="0" noProof="0">
+              <a:ln>
+                <a:noFill/>
+              </a:ln>
+              <a:solidFill>
+                <a:prstClr val="white"/>
+              </a:solidFill>
+              <a:effectLst/>
+              <a:uLnTx/>
+              <a:uFillTx/>
+              <a:latin typeface="Calibri" panose="020F0502020204030204"/>
+              <a:ea typeface="+mn-ea"/>
+              <a:cs typeface="+mn-cs"/>
+            </a:endParaRPr>
+          </a:p>
+        </p:txBody>
+      </p:sp>
+    </p:spTree>
+    <p:extLst>
+      <p:ext uri="{BB962C8B-B14F-4D97-AF65-F5344CB8AC3E}">
+        <p14:creationId xmlns:p14="http://schemas.microsoft.com/office/powerpoint/2010/main" val="2529292921"/>
+      </p:ext>
+    </p:extLst>
+  </p:cSld>
+  <p:clrMapOvr>
+    <a:masterClrMapping/>
+  </p:clrMapOvr>
+</p:sld>
+</file>
+
+<file path=ppt/slides/slide5.xml><?xml version="1.0" encoding="utf-8"?>
 <p:sld xmlns:a="http://schemas.openxmlformats.org/drawingml/2006/main" xmlns:r="http://schemas.openxmlformats.org/officeDocument/2006/relationships" xmlns:p="http://schemas.openxmlformats.org/presentationml/2006/main">
   <p:cSld>
     <p:spTree>
@@ -7534,7 +9086,7 @@
           <p:cNvPr id="2" name="タイトル 1">
             <a:extLst>
               <a:ext uri="{FF2B5EF4-FFF2-40B4-BE49-F238E27FC236}">
-                <a16:creationId xmlns:a16="http://schemas.microsoft.com/office/drawing/2014/main" id="{E29EF7D8-1292-DE44-B5CF-13C3170B5887}"/>
+                <a16:creationId xmlns:a16="http://schemas.microsoft.com/office/drawing/2014/main" id="{FA5D234F-8C2B-421F-9A42-97D4579383E5}"/>
               </a:ext>
             </a:extLst>
           </p:cNvPr>
@@ -7551,10 +9103,9 @@
           <a:lstStyle/>
           <a:p>
             <a:r>
-              <a:rPr lang="ja-JP" altLang="en-US" dirty="0"/>
-              <a:t>３年時に行ったことの確認</a:t>
-            </a:r>
-            <a:endParaRPr kumimoji="1" lang="ja-JP" altLang="en-US" dirty="0"/>
+              <a:rPr kumimoji="1" lang="ja-JP" altLang="en-US"/>
+              <a:t>まとめ</a:t>
+            </a:r>
           </a:p>
         </p:txBody>
       </p:sp>
@@ -7563,7 +9114,7 @@
           <p:cNvPr id="3" name="コンテンツ プレースホルダー 2">
             <a:extLst>
               <a:ext uri="{FF2B5EF4-FFF2-40B4-BE49-F238E27FC236}">
-                <a16:creationId xmlns:a16="http://schemas.microsoft.com/office/drawing/2014/main" id="{97F363DB-D64A-A438-6D2D-9E09AF98BCEE}"/>
+                <a16:creationId xmlns:a16="http://schemas.microsoft.com/office/drawing/2014/main" id="{762047FC-9426-9E55-737F-322A48159D97}"/>
               </a:ext>
             </a:extLst>
           </p:cNvPr>
@@ -7579,43 +9130,14 @@
           <a:bodyPr/>
           <a:lstStyle/>
           <a:p>
-            <a:pPr marL="0" indent="0">
-              <a:buNone/>
-            </a:pPr>
-            <a:r>
-              <a:rPr lang="ja-JP" altLang="en-US" dirty="0"/>
-              <a:t>・企画書←パワーポイントで作成していなかった</a:t>
-            </a:r>
-            <a:endParaRPr lang="en-US" altLang="ja-JP" dirty="0"/>
-          </a:p>
-          <a:p>
-            <a:pPr marL="0" indent="0">
-              <a:buNone/>
-            </a:pPr>
-            <a:r>
-              <a:rPr kumimoji="1" lang="ja-JP" altLang="en-US" dirty="0"/>
-              <a:t>・モックの作成←このまま進めて大丈夫</a:t>
-            </a:r>
-            <a:endParaRPr kumimoji="1" lang="en-US" altLang="ja-JP" dirty="0"/>
-          </a:p>
-          <a:p>
-            <a:pPr marL="0" indent="0">
-              <a:buNone/>
-            </a:pPr>
-            <a:endParaRPr kumimoji="1" lang="en-US" altLang="ja-JP" dirty="0"/>
-          </a:p>
-          <a:p>
-            <a:pPr marL="0" indent="0">
-              <a:buNone/>
-            </a:pPr>
-            <a:endParaRPr kumimoji="1" lang="en-US" altLang="ja-JP" dirty="0"/>
+            <a:endParaRPr kumimoji="1" lang="ja-JP" altLang="en-US" dirty="0"/>
           </a:p>
         </p:txBody>
       </p:sp>
     </p:spTree>
     <p:extLst>
       <p:ext uri="{BB962C8B-B14F-4D97-AF65-F5344CB8AC3E}">
-        <p14:creationId xmlns:p14="http://schemas.microsoft.com/office/powerpoint/2010/main" val="2094644332"/>
+        <p14:creationId xmlns:p14="http://schemas.microsoft.com/office/powerpoint/2010/main" val="3329108899"/>
       </p:ext>
     </p:extLst>
   </p:cSld>
